--- a/presentacion_tecnica_churn.pptx
+++ b/presentacion_tecnica_churn.pptx
@@ -5,22 +5,21 @@
     <p:sldMasterId id="2147483648" r:id="rId1"/>
   </p:sldMasterIdLst>
   <p:notesMasterIdLst>
-    <p:notesMasterId r:id="rId15"/>
+    <p:notesMasterId r:id="rId14"/>
   </p:notesMasterIdLst>
   <p:sldIdLst>
     <p:sldId id="256" r:id="rId2"/>
     <p:sldId id="258" r:id="rId3"/>
     <p:sldId id="259" r:id="rId4"/>
-    <p:sldId id="261" r:id="rId5"/>
-    <p:sldId id="262" r:id="rId6"/>
-    <p:sldId id="263" r:id="rId7"/>
-    <p:sldId id="265" r:id="rId8"/>
-    <p:sldId id="266" r:id="rId9"/>
-    <p:sldId id="267" r:id="rId10"/>
-    <p:sldId id="268" r:id="rId11"/>
-    <p:sldId id="269" r:id="rId12"/>
-    <p:sldId id="270" r:id="rId13"/>
-    <p:sldId id="271" r:id="rId14"/>
+    <p:sldId id="262" r:id="rId5"/>
+    <p:sldId id="263" r:id="rId6"/>
+    <p:sldId id="265" r:id="rId7"/>
+    <p:sldId id="266" r:id="rId8"/>
+    <p:sldId id="267" r:id="rId9"/>
+    <p:sldId id="268" r:id="rId10"/>
+    <p:sldId id="269" r:id="rId11"/>
+    <p:sldId id="270" r:id="rId12"/>
+    <p:sldId id="271" r:id="rId13"/>
   </p:sldIdLst>
   <p:sldSz cx="12192000" cy="6858000"/>
   <p:notesSz cx="6858000" cy="12192000"/>
@@ -744,90 +743,6 @@
 </p:notes>
 </file>
 
-<file path=ppt/notesSlides/notesSlide13.xml><?xml version="1.0" encoding="utf-8"?>
-<p:notes xmlns:a="http://schemas.openxmlformats.org/drawingml/2006/main" xmlns:r="http://schemas.openxmlformats.org/officeDocument/2006/relationships" xmlns:p="http://schemas.openxmlformats.org/presentationml/2006/main">
-  <p:cSld>
-    <p:spTree>
-      <p:nvGrpSpPr>
-        <p:cNvPr id="1" name=""/>
-        <p:cNvGrpSpPr/>
-        <p:nvPr/>
-      </p:nvGrpSpPr>
-      <p:grpSpPr>
-        <a:xfrm>
-          <a:off x="0" y="0"/>
-          <a:ext cx="0" cy="0"/>
-          <a:chOff x="0" y="0"/>
-          <a:chExt cx="0" cy="0"/>
-        </a:xfrm>
-      </p:grpSpPr>
-      <p:sp>
-        <p:nvSpPr>
-          <p:cNvPr id="2" name="Slide Image Placeholder 1"/>
-          <p:cNvSpPr>
-            <a:spLocks noGrp="1" noRot="1" noChangeAspect="1"/>
-          </p:cNvSpPr>
-          <p:nvPr>
-            <p:ph type="sldImg"/>
-          </p:nvPr>
-        </p:nvSpPr>
-        <p:spPr/>
-      </p:sp>
-      <p:sp>
-        <p:nvSpPr>
-          <p:cNvPr id="3" name="Notes Placeholder 2"/>
-          <p:cNvSpPr>
-            <a:spLocks noGrp="1"/>
-          </p:cNvSpPr>
-          <p:nvPr>
-            <p:ph type="body" idx="1"/>
-          </p:nvPr>
-        </p:nvSpPr>
-        <p:spPr/>
-        <p:txBody>
-          <a:bodyPr/>
-          <a:lstStyle/>
-          <a:p>
-            <a:endParaRPr lang="en-US" dirty="0"/>
-          </a:p>
-        </p:txBody>
-      </p:sp>
-      <p:sp>
-        <p:nvSpPr>
-          <p:cNvPr id="4" name="Slide Number Placeholder 3"/>
-          <p:cNvSpPr>
-            <a:spLocks noGrp="1"/>
-          </p:cNvSpPr>
-          <p:nvPr>
-            <p:ph type="sldNum" sz="quarter" idx="10"/>
-          </p:nvPr>
-        </p:nvSpPr>
-        <p:spPr/>
-        <p:txBody>
-          <a:bodyPr/>
-          <a:lstStyle/>
-          <a:p>
-            <a:fld id="{F7021451-1387-4CA6-816F-3879F97B5CBC}" type="slidenum">
-              <a:rPr lang="en-US"/>
-              <a:t>13</a:t>
-            </a:fld>
-            <a:endParaRPr lang="en-US"/>
-          </a:p>
-        </p:txBody>
-      </p:sp>
-    </p:spTree>
-    <p:extLst>
-      <p:ext uri="{BB962C8B-B14F-4D97-AF65-F5344CB8AC3E}">
-        <p14:creationId xmlns:p14="http://schemas.microsoft.com/office/powerpoint/2010/main" val="1024086991"/>
-      </p:ext>
-    </p:extLst>
-  </p:cSld>
-  <p:clrMapOvr>
-    <a:masterClrMapping/>
-  </p:clrMapOvr>
-</p:notes>
-</file>
-
 <file path=ppt/notesSlides/notesSlide2.xml><?xml version="1.0" encoding="utf-8"?>
 <p:notes xmlns:a="http://schemas.openxmlformats.org/drawingml/2006/main" xmlns:r="http://schemas.openxmlformats.org/officeDocument/2006/relationships" xmlns:p="http://schemas.openxmlformats.org/presentationml/2006/main">
   <p:cSld>
@@ -2372,2497 +2287,6 @@
 
 <file path=ppt/slides/slide10.xml><?xml version="1.0" encoding="utf-8"?>
 <p:sld xmlns:a="http://schemas.openxmlformats.org/drawingml/2006/main" xmlns:r="http://schemas.openxmlformats.org/officeDocument/2006/relationships" xmlns:p="http://schemas.openxmlformats.org/presentationml/2006/main">
-  <p:cSld name="Slide 13">
-    <p:bg>
-      <p:bgPr>
-        <a:solidFill>
-          <a:srgbClr val="F5F8F9"/>
-        </a:solidFill>
-        <a:effectLst/>
-      </p:bgPr>
-    </p:bg>
-    <p:spTree>
-      <p:nvGrpSpPr>
-        <p:cNvPr id="1" name=""/>
-        <p:cNvGrpSpPr/>
-        <p:nvPr/>
-      </p:nvGrpSpPr>
-      <p:grpSpPr>
-        <a:xfrm>
-          <a:off x="0" y="0"/>
-          <a:ext cx="0" cy="0"/>
-          <a:chOff x="0" y="0"/>
-          <a:chExt cx="0" cy="0"/>
-        </a:xfrm>
-      </p:grpSpPr>
-      <p:sp>
-        <p:nvSpPr>
-          <p:cNvPr id="2" name="Shape 0"/>
-          <p:cNvSpPr/>
-          <p:nvPr/>
-        </p:nvSpPr>
-        <p:spPr>
-          <a:xfrm>
-            <a:off x="548640" y="457200"/>
-            <a:ext cx="566928" cy="566928"/>
-          </a:xfrm>
-          <a:prstGeom prst="roundRect">
-            <a:avLst>
-              <a:gd name="adj" fmla="val 16129"/>
-            </a:avLst>
-          </a:prstGeom>
-          <a:solidFill>
-            <a:srgbClr val="0E7C86"/>
-          </a:solidFill>
-          <a:ln/>
-        </p:spPr>
-        <p:txBody>
-          <a:bodyPr/>
-          <a:lstStyle/>
-          <a:p>
-            <a:endParaRPr/>
-          </a:p>
-        </p:txBody>
-      </p:sp>
-      <p:sp>
-        <p:nvSpPr>
-          <p:cNvPr id="3" name="Text 1"/>
-          <p:cNvSpPr/>
-          <p:nvPr/>
-        </p:nvSpPr>
-        <p:spPr>
-          <a:xfrm>
-            <a:off x="548640" y="457200"/>
-            <a:ext cx="566928" cy="566928"/>
-          </a:xfrm>
-          <a:prstGeom prst="rect">
-            <a:avLst/>
-          </a:prstGeom>
-          <a:noFill/>
-          <a:ln/>
-        </p:spPr>
-        <p:txBody>
-          <a:bodyPr wrap="square" lIns="0" tIns="0" rIns="0" bIns="0" rtlCol="0" anchor="ctr"/>
-          <a:lstStyle/>
-          <a:p>
-            <a:pPr marL="0" indent="0" algn="ctr">
-              <a:buNone/>
-            </a:pPr>
-            <a:r>
-              <a:rPr sz="1800" b="1">
-                <a:solidFill>
-                  <a:srgbClr val="FFFFFF"/>
-                </a:solidFill>
-                <a:latin typeface="Trebuchet MS"/>
-              </a:rPr>
-              <a:t>09</a:t>
-            </a:r>
-            <a:endParaRPr lang="en-US" sz="1800" dirty="0"/>
-          </a:p>
-        </p:txBody>
-      </p:sp>
-      <p:sp>
-        <p:nvSpPr>
-          <p:cNvPr id="4" name="Text 2"/>
-          <p:cNvSpPr/>
-          <p:nvPr/>
-        </p:nvSpPr>
-        <p:spPr>
-          <a:xfrm>
-            <a:off x="1280160" y="457200"/>
-            <a:ext cx="9144000" cy="256032"/>
-          </a:xfrm>
-          <a:prstGeom prst="rect">
-            <a:avLst/>
-          </a:prstGeom>
-          <a:noFill/>
-          <a:ln/>
-        </p:spPr>
-        <p:txBody>
-          <a:bodyPr wrap="square" lIns="0" tIns="0" rIns="0" bIns="0" rtlCol="0" anchor="ctr"/>
-          <a:lstStyle/>
-          <a:p>
-            <a:pPr marL="0" indent="0">
-              <a:buNone/>
-            </a:pPr>
-            <a:r>
-              <a:rPr lang="en-US" sz="1150" b="1" kern="0" spc="200" dirty="0">
-                <a:solidFill>
-                  <a:srgbClr val="0E7C86"/>
-                </a:solidFill>
-                <a:latin typeface="Trebuchet MS" pitchFamily="34" charset="0"/>
-                <a:ea typeface="Trebuchet MS" pitchFamily="34" charset="-122"/>
-                <a:cs typeface="Trebuchet MS" pitchFamily="34" charset="-120"/>
-              </a:rPr>
-              <a:t>COMPARACION DE MODELOS</a:t>
-            </a:r>
-            <a:endParaRPr lang="en-US" sz="1150" dirty="0"/>
-          </a:p>
-        </p:txBody>
-      </p:sp>
-      <p:sp>
-        <p:nvSpPr>
-          <p:cNvPr id="5" name="Text 3"/>
-          <p:cNvSpPr/>
-          <p:nvPr/>
-        </p:nvSpPr>
-        <p:spPr>
-          <a:xfrm>
-            <a:off x="1280160" y="694944"/>
-            <a:ext cx="10362895" cy="566928"/>
-          </a:xfrm>
-          <a:prstGeom prst="rect">
-            <a:avLst/>
-          </a:prstGeom>
-          <a:noFill/>
-          <a:ln/>
-        </p:spPr>
-        <p:txBody>
-          <a:bodyPr wrap="square" lIns="0" tIns="0" rIns="0" bIns="0" rtlCol="0" anchor="ctr"/>
-          <a:lstStyle/>
-          <a:p>
-            <a:pPr marL="0" indent="0">
-              <a:buNone/>
-            </a:pPr>
-            <a:r>
-              <a:rPr lang="en-US" sz="2700" b="1" dirty="0">
-                <a:solidFill>
-                  <a:srgbClr val="1F2D34"/>
-                </a:solidFill>
-                <a:latin typeface="Trebuchet MS" pitchFamily="34" charset="0"/>
-                <a:ea typeface="Trebuchet MS" pitchFamily="34" charset="-122"/>
-                <a:cs typeface="Trebuchet MS" pitchFamily="34" charset="-120"/>
-              </a:rPr>
-              <a:t>Fuera de fold, modelos tuneados, umbral 0,50</a:t>
-            </a:r>
-            <a:endParaRPr lang="en-US" sz="2700" dirty="0"/>
-          </a:p>
-        </p:txBody>
-      </p:sp>
-      <p:sp>
-        <p:nvSpPr>
-          <p:cNvPr id="6" name="Text 4"/>
-          <p:cNvSpPr/>
-          <p:nvPr/>
-        </p:nvSpPr>
-        <p:spPr>
-          <a:xfrm>
-            <a:off x="548640" y="6473952"/>
-            <a:ext cx="7315200" cy="274320"/>
-          </a:xfrm>
-          <a:prstGeom prst="rect">
-            <a:avLst/>
-          </a:prstGeom>
-          <a:noFill/>
-          <a:ln/>
-        </p:spPr>
-        <p:txBody>
-          <a:bodyPr wrap="square" lIns="0" tIns="0" rIns="0" bIns="0" rtlCol="0" anchor="ctr"/>
-          <a:lstStyle/>
-          <a:p>
-            <a:pPr marL="0" indent="0">
-              <a:buNone/>
-            </a:pPr>
-            <a:r>
-              <a:rPr lang="en-US" sz="900" dirty="0">
-                <a:solidFill>
-                  <a:srgbClr val="6A7A82"/>
-                </a:solidFill>
-                <a:latin typeface="Calibri" pitchFamily="34" charset="0"/>
-                <a:ea typeface="Calibri" pitchFamily="34" charset="-122"/>
-                <a:cs typeface="Calibri" pitchFamily="34" charset="-120"/>
-              </a:rPr>
-              <a:t>Pipeline de clasificacion de churn  ·  Grupo 1</a:t>
-            </a:r>
-            <a:endParaRPr lang="en-US" sz="900" dirty="0"/>
-          </a:p>
-        </p:txBody>
-      </p:sp>
-      <p:sp>
-        <p:nvSpPr>
-          <p:cNvPr id="7" name="Text 5"/>
-          <p:cNvSpPr/>
-          <p:nvPr/>
-        </p:nvSpPr>
-        <p:spPr>
-          <a:xfrm>
-            <a:off x="10545775" y="6473952"/>
-            <a:ext cx="1097280" cy="274320"/>
-          </a:xfrm>
-          <a:prstGeom prst="rect">
-            <a:avLst/>
-          </a:prstGeom>
-          <a:noFill/>
-          <a:ln/>
-        </p:spPr>
-        <p:txBody>
-          <a:bodyPr wrap="square" lIns="0" tIns="0" rIns="0" bIns="0" rtlCol="0" anchor="ctr"/>
-          <a:lstStyle/>
-          <a:p>
-            <a:pPr marL="0" indent="0" algn="r">
-              <a:buNone/>
-            </a:pPr>
-            <a:r>
-              <a:rPr sz="900">
-                <a:solidFill>
-                  <a:srgbClr val="6A7A82"/>
-                </a:solidFill>
-                <a:latin typeface="Calibri"/>
-              </a:rPr>
-              <a:t>9 / 11</a:t>
-            </a:r>
-            <a:endParaRPr lang="en-US" sz="900" dirty="0"/>
-          </a:p>
-        </p:txBody>
-      </p:sp>
-      <p:graphicFrame>
-        <p:nvGraphicFramePr>
-          <p:cNvPr id="14" name="Table 0"/>
-          <p:cNvGraphicFramePr>
-            <a:graphicFrameLocks noGrp="1"/>
-          </p:cNvGraphicFramePr>
-          <p:nvPr>
-            <p:extLst>
-              <p:ext uri="{D42A27DB-BD31-4B8C-83A1-F6EECF244321}">
-                <p14:modId xmlns:p14="http://schemas.microsoft.com/office/powerpoint/2010/main" val="489474477"/>
-              </p:ext>
-            </p:extLst>
-          </p:nvPr>
-        </p:nvGraphicFramePr>
-        <p:xfrm>
-          <a:off x="548640" y="1828800"/>
-          <a:ext cx="5486400" cy="2377440"/>
-        </p:xfrm>
-        <a:graphic>
-          <a:graphicData uri="http://schemas.openxmlformats.org/drawingml/2006/table">
-            <a:tbl>
-              <a:tblPr/>
-              <a:tblGrid>
-                <a:gridCol w="1783080">
-                  <a:extLst>
-                    <a:ext uri="{9D8B030D-6E8A-4147-A177-3AD203B41FA5}">
-                      <a16:colId xmlns:a16="http://schemas.microsoft.com/office/drawing/2014/main" val="20000"/>
-                    </a:ext>
-                  </a:extLst>
-                </a:gridCol>
-                <a:gridCol w="749808">
-                  <a:extLst>
-                    <a:ext uri="{9D8B030D-6E8A-4147-A177-3AD203B41FA5}">
-                      <a16:colId xmlns:a16="http://schemas.microsoft.com/office/drawing/2014/main" val="20001"/>
-                    </a:ext>
-                  </a:extLst>
-                </a:gridCol>
-                <a:gridCol w="749808">
-                  <a:extLst>
-                    <a:ext uri="{9D8B030D-6E8A-4147-A177-3AD203B41FA5}">
-                      <a16:colId xmlns:a16="http://schemas.microsoft.com/office/drawing/2014/main" val="20002"/>
-                    </a:ext>
-                  </a:extLst>
-                </a:gridCol>
-                <a:gridCol w="841248">
-                  <a:extLst>
-                    <a:ext uri="{9D8B030D-6E8A-4147-A177-3AD203B41FA5}">
-                      <a16:colId xmlns:a16="http://schemas.microsoft.com/office/drawing/2014/main" val="20003"/>
-                    </a:ext>
-                  </a:extLst>
-                </a:gridCol>
-                <a:gridCol w="713232">
-                  <a:extLst>
-                    <a:ext uri="{9D8B030D-6E8A-4147-A177-3AD203B41FA5}">
-                      <a16:colId xmlns:a16="http://schemas.microsoft.com/office/drawing/2014/main" val="20004"/>
-                    </a:ext>
-                  </a:extLst>
-                </a:gridCol>
-                <a:gridCol w="649224">
-                  <a:extLst>
-                    <a:ext uri="{9D8B030D-6E8A-4147-A177-3AD203B41FA5}">
-                      <a16:colId xmlns:a16="http://schemas.microsoft.com/office/drawing/2014/main" val="20005"/>
-                    </a:ext>
-                  </a:extLst>
-                </a:gridCol>
-              </a:tblGrid>
-              <a:tr h="475488">
-                <a:tc>
-                  <a:txBody>
-                    <a:bodyPr/>
-                    <a:lstStyle/>
-                    <a:p>
-                      <a:pPr marL="0" indent="0" algn="ctr">
-                        <a:buNone/>
-                      </a:pPr>
-                      <a:r>
-                        <a:rPr lang="en-US" sz="1200" b="1" dirty="0">
-                          <a:solidFill>
-                            <a:srgbClr val="FFFFFF"/>
-                          </a:solidFill>
-                          <a:latin typeface="Trebuchet MS" pitchFamily="34" charset="0"/>
-                          <a:ea typeface="Trebuchet MS" pitchFamily="34" charset="-122"/>
-                          <a:cs typeface="Trebuchet MS" pitchFamily="34" charset="-120"/>
-                        </a:rPr>
-                        <a:t>Modelo</a:t>
-                      </a:r>
-                      <a:endParaRPr lang="en-US" sz="1200" dirty="0">
-                        <a:latin typeface="Trebuchet MS" charset="0"/>
-                        <a:ea typeface="Trebuchet MS" charset="0"/>
-                        <a:cs typeface="Trebuchet MS" charset="0"/>
-                      </a:endParaRPr>
-                    </a:p>
-                  </a:txBody>
-                  <a:tcPr anchor="ctr">
-                    <a:lnL w="12700" cap="flat" cmpd="sng" algn="ctr">
-                      <a:solidFill>
-                        <a:srgbClr val="DCE6E9"/>
-                      </a:solidFill>
-                      <a:prstDash val="solid"/>
-                      <a:round/>
-                      <a:headEnd type="none" w="med" len="med"/>
-                      <a:tailEnd type="none" w="med" len="med"/>
-                    </a:lnL>
-                    <a:lnR w="12700" cap="flat" cmpd="sng" algn="ctr">
-                      <a:solidFill>
-                        <a:srgbClr val="DCE6E9"/>
-                      </a:solidFill>
-                      <a:prstDash val="solid"/>
-                      <a:round/>
-                      <a:headEnd type="none" w="med" len="med"/>
-                      <a:tailEnd type="none" w="med" len="med"/>
-                    </a:lnR>
-                    <a:lnT w="12700" cap="flat" cmpd="sng" algn="ctr">
-                      <a:solidFill>
-                        <a:srgbClr val="DCE6E9"/>
-                      </a:solidFill>
-                      <a:prstDash val="solid"/>
-                      <a:round/>
-                      <a:headEnd type="none" w="med" len="med"/>
-                      <a:tailEnd type="none" w="med" len="med"/>
-                    </a:lnT>
-                    <a:lnB w="12700" cap="flat" cmpd="sng" algn="ctr">
-                      <a:solidFill>
-                        <a:srgbClr val="DCE6E9"/>
-                      </a:solidFill>
-                      <a:prstDash val="solid"/>
-                      <a:round/>
-                      <a:headEnd type="none" w="med" len="med"/>
-                      <a:tailEnd type="none" w="med" len="med"/>
-                    </a:lnB>
-                    <a:solidFill>
-                      <a:srgbClr val="0E7C86"/>
-                    </a:solidFill>
-                  </a:tcPr>
-                </a:tc>
-                <a:tc>
-                  <a:txBody>
-                    <a:bodyPr/>
-                    <a:lstStyle/>
-                    <a:p>
-                      <a:pPr marL="0" indent="0" algn="ctr">
-                        <a:buNone/>
-                      </a:pPr>
-                      <a:r>
-                        <a:rPr lang="en-US" sz="1200" b="1" dirty="0">
-                          <a:solidFill>
-                            <a:srgbClr val="FFFFFF"/>
-                          </a:solidFill>
-                          <a:latin typeface="Trebuchet MS" pitchFamily="34" charset="0"/>
-                          <a:ea typeface="Trebuchet MS" pitchFamily="34" charset="-122"/>
-                          <a:cs typeface="Trebuchet MS" pitchFamily="34" charset="-120"/>
-                        </a:rPr>
-                        <a:t>F2</a:t>
-                      </a:r>
-                      <a:endParaRPr lang="en-US" sz="1200" dirty="0">
-                        <a:latin typeface="Trebuchet MS" charset="0"/>
-                        <a:ea typeface="Trebuchet MS" charset="0"/>
-                        <a:cs typeface="Trebuchet MS" charset="0"/>
-                      </a:endParaRPr>
-                    </a:p>
-                  </a:txBody>
-                  <a:tcPr anchor="ctr">
-                    <a:lnL w="12700" cap="flat" cmpd="sng" algn="ctr">
-                      <a:solidFill>
-                        <a:srgbClr val="DCE6E9"/>
-                      </a:solidFill>
-                      <a:prstDash val="solid"/>
-                      <a:round/>
-                      <a:headEnd type="none" w="med" len="med"/>
-                      <a:tailEnd type="none" w="med" len="med"/>
-                    </a:lnL>
-                    <a:lnR w="12700" cap="flat" cmpd="sng" algn="ctr">
-                      <a:solidFill>
-                        <a:srgbClr val="DCE6E9"/>
-                      </a:solidFill>
-                      <a:prstDash val="solid"/>
-                      <a:round/>
-                      <a:headEnd type="none" w="med" len="med"/>
-                      <a:tailEnd type="none" w="med" len="med"/>
-                    </a:lnR>
-                    <a:lnT w="12700" cap="flat" cmpd="sng" algn="ctr">
-                      <a:solidFill>
-                        <a:srgbClr val="DCE6E9"/>
-                      </a:solidFill>
-                      <a:prstDash val="solid"/>
-                      <a:round/>
-                      <a:headEnd type="none" w="med" len="med"/>
-                      <a:tailEnd type="none" w="med" len="med"/>
-                    </a:lnT>
-                    <a:lnB w="12700" cap="flat" cmpd="sng" algn="ctr">
-                      <a:solidFill>
-                        <a:srgbClr val="DCE6E9"/>
-                      </a:solidFill>
-                      <a:prstDash val="solid"/>
-                      <a:round/>
-                      <a:headEnd type="none" w="med" len="med"/>
-                      <a:tailEnd type="none" w="med" len="med"/>
-                    </a:lnB>
-                    <a:solidFill>
-                      <a:srgbClr val="0E7C86"/>
-                    </a:solidFill>
-                  </a:tcPr>
-                </a:tc>
-                <a:tc>
-                  <a:txBody>
-                    <a:bodyPr/>
-                    <a:lstStyle/>
-                    <a:p>
-                      <a:pPr marL="0" indent="0" algn="ctr">
-                        <a:buNone/>
-                      </a:pPr>
-                      <a:r>
-                        <a:rPr lang="en-US" sz="1200" b="1" dirty="0">
-                          <a:solidFill>
-                            <a:srgbClr val="FFFFFF"/>
-                          </a:solidFill>
-                          <a:latin typeface="Trebuchet MS" pitchFamily="34" charset="0"/>
-                          <a:ea typeface="Trebuchet MS" pitchFamily="34" charset="-122"/>
-                          <a:cs typeface="Trebuchet MS" pitchFamily="34" charset="-120"/>
-                        </a:rPr>
-                        <a:t>Recall</a:t>
-                      </a:r>
-                      <a:endParaRPr lang="en-US" sz="1200" dirty="0">
-                        <a:latin typeface="Trebuchet MS" charset="0"/>
-                        <a:ea typeface="Trebuchet MS" charset="0"/>
-                        <a:cs typeface="Trebuchet MS" charset="0"/>
-                      </a:endParaRPr>
-                    </a:p>
-                  </a:txBody>
-                  <a:tcPr anchor="ctr">
-                    <a:lnL w="12700" cap="flat" cmpd="sng" algn="ctr">
-                      <a:solidFill>
-                        <a:srgbClr val="DCE6E9"/>
-                      </a:solidFill>
-                      <a:prstDash val="solid"/>
-                      <a:round/>
-                      <a:headEnd type="none" w="med" len="med"/>
-                      <a:tailEnd type="none" w="med" len="med"/>
-                    </a:lnL>
-                    <a:lnR w="12700" cap="flat" cmpd="sng" algn="ctr">
-                      <a:solidFill>
-                        <a:srgbClr val="DCE6E9"/>
-                      </a:solidFill>
-                      <a:prstDash val="solid"/>
-                      <a:round/>
-                      <a:headEnd type="none" w="med" len="med"/>
-                      <a:tailEnd type="none" w="med" len="med"/>
-                    </a:lnR>
-                    <a:lnT w="12700" cap="flat" cmpd="sng" algn="ctr">
-                      <a:solidFill>
-                        <a:srgbClr val="DCE6E9"/>
-                      </a:solidFill>
-                      <a:prstDash val="solid"/>
-                      <a:round/>
-                      <a:headEnd type="none" w="med" len="med"/>
-                      <a:tailEnd type="none" w="med" len="med"/>
-                    </a:lnT>
-                    <a:lnB w="12700" cap="flat" cmpd="sng" algn="ctr">
-                      <a:solidFill>
-                        <a:srgbClr val="DCE6E9"/>
-                      </a:solidFill>
-                      <a:prstDash val="solid"/>
-                      <a:round/>
-                      <a:headEnd type="none" w="med" len="med"/>
-                      <a:tailEnd type="none" w="med" len="med"/>
-                    </a:lnB>
-                    <a:solidFill>
-                      <a:srgbClr val="0E7C86"/>
-                    </a:solidFill>
-                  </a:tcPr>
-                </a:tc>
-                <a:tc>
-                  <a:txBody>
-                    <a:bodyPr/>
-                    <a:lstStyle/>
-                    <a:p>
-                      <a:pPr marL="0" indent="0" algn="ctr">
-                        <a:buNone/>
-                      </a:pPr>
-                      <a:r>
-                        <a:rPr lang="en-US" sz="1200" b="1" dirty="0">
-                          <a:solidFill>
-                            <a:srgbClr val="FFFFFF"/>
-                          </a:solidFill>
-                          <a:latin typeface="Trebuchet MS" pitchFamily="34" charset="0"/>
-                          <a:ea typeface="Trebuchet MS" pitchFamily="34" charset="-122"/>
-                          <a:cs typeface="Trebuchet MS" pitchFamily="34" charset="-120"/>
-                        </a:rPr>
-                        <a:t>Precision</a:t>
-                      </a:r>
-                      <a:endParaRPr lang="en-US" sz="1200" dirty="0">
-                        <a:latin typeface="Trebuchet MS" charset="0"/>
-                        <a:ea typeface="Trebuchet MS" charset="0"/>
-                        <a:cs typeface="Trebuchet MS" charset="0"/>
-                      </a:endParaRPr>
-                    </a:p>
-                  </a:txBody>
-                  <a:tcPr anchor="ctr">
-                    <a:lnL w="12700" cap="flat" cmpd="sng" algn="ctr">
-                      <a:solidFill>
-                        <a:srgbClr val="DCE6E9"/>
-                      </a:solidFill>
-                      <a:prstDash val="solid"/>
-                      <a:round/>
-                      <a:headEnd type="none" w="med" len="med"/>
-                      <a:tailEnd type="none" w="med" len="med"/>
-                    </a:lnL>
-                    <a:lnR w="12700" cap="flat" cmpd="sng" algn="ctr">
-                      <a:solidFill>
-                        <a:srgbClr val="DCE6E9"/>
-                      </a:solidFill>
-                      <a:prstDash val="solid"/>
-                      <a:round/>
-                      <a:headEnd type="none" w="med" len="med"/>
-                      <a:tailEnd type="none" w="med" len="med"/>
-                    </a:lnR>
-                    <a:lnT w="12700" cap="flat" cmpd="sng" algn="ctr">
-                      <a:solidFill>
-                        <a:srgbClr val="DCE6E9"/>
-                      </a:solidFill>
-                      <a:prstDash val="solid"/>
-                      <a:round/>
-                      <a:headEnd type="none" w="med" len="med"/>
-                      <a:tailEnd type="none" w="med" len="med"/>
-                    </a:lnT>
-                    <a:lnB w="12700" cap="flat" cmpd="sng" algn="ctr">
-                      <a:solidFill>
-                        <a:srgbClr val="DCE6E9"/>
-                      </a:solidFill>
-                      <a:prstDash val="solid"/>
-                      <a:round/>
-                      <a:headEnd type="none" w="med" len="med"/>
-                      <a:tailEnd type="none" w="med" len="med"/>
-                    </a:lnB>
-                    <a:solidFill>
-                      <a:srgbClr val="0E7C86"/>
-                    </a:solidFill>
-                  </a:tcPr>
-                </a:tc>
-                <a:tc>
-                  <a:txBody>
-                    <a:bodyPr/>
-                    <a:lstStyle/>
-                    <a:p>
-                      <a:pPr marL="0" indent="0" algn="ctr">
-                        <a:buNone/>
-                      </a:pPr>
-                      <a:r>
-                        <a:rPr lang="en-US" sz="1200" b="1" dirty="0">
-                          <a:solidFill>
-                            <a:srgbClr val="FFFFFF"/>
-                          </a:solidFill>
-                          <a:latin typeface="Trebuchet MS" pitchFamily="34" charset="0"/>
-                          <a:ea typeface="Trebuchet MS" pitchFamily="34" charset="-122"/>
-                          <a:cs typeface="Trebuchet MS" pitchFamily="34" charset="-120"/>
-                        </a:rPr>
-                        <a:t>PR-AUC</a:t>
-                      </a:r>
-                      <a:endParaRPr lang="en-US" sz="1200" dirty="0">
-                        <a:latin typeface="Trebuchet MS" charset="0"/>
-                        <a:ea typeface="Trebuchet MS" charset="0"/>
-                        <a:cs typeface="Trebuchet MS" charset="0"/>
-                      </a:endParaRPr>
-                    </a:p>
-                  </a:txBody>
-                  <a:tcPr anchor="ctr">
-                    <a:lnL w="12700" cap="flat" cmpd="sng" algn="ctr">
-                      <a:solidFill>
-                        <a:srgbClr val="DCE6E9"/>
-                      </a:solidFill>
-                      <a:prstDash val="solid"/>
-                      <a:round/>
-                      <a:headEnd type="none" w="med" len="med"/>
-                      <a:tailEnd type="none" w="med" len="med"/>
-                    </a:lnL>
-                    <a:lnR w="12700" cap="flat" cmpd="sng" algn="ctr">
-                      <a:solidFill>
-                        <a:srgbClr val="DCE6E9"/>
-                      </a:solidFill>
-                      <a:prstDash val="solid"/>
-                      <a:round/>
-                      <a:headEnd type="none" w="med" len="med"/>
-                      <a:tailEnd type="none" w="med" len="med"/>
-                    </a:lnR>
-                    <a:lnT w="12700" cap="flat" cmpd="sng" algn="ctr">
-                      <a:solidFill>
-                        <a:srgbClr val="DCE6E9"/>
-                      </a:solidFill>
-                      <a:prstDash val="solid"/>
-                      <a:round/>
-                      <a:headEnd type="none" w="med" len="med"/>
-                      <a:tailEnd type="none" w="med" len="med"/>
-                    </a:lnT>
-                    <a:lnB w="12700" cap="flat" cmpd="sng" algn="ctr">
-                      <a:solidFill>
-                        <a:srgbClr val="DCE6E9"/>
-                      </a:solidFill>
-                      <a:prstDash val="solid"/>
-                      <a:round/>
-                      <a:headEnd type="none" w="med" len="med"/>
-                      <a:tailEnd type="none" w="med" len="med"/>
-                    </a:lnB>
-                    <a:solidFill>
-                      <a:srgbClr val="0E7C86"/>
-                    </a:solidFill>
-                  </a:tcPr>
-                </a:tc>
-                <a:tc>
-                  <a:txBody>
-                    <a:bodyPr/>
-                    <a:lstStyle/>
-                    <a:p>
-                      <a:pPr marL="0" indent="0" algn="ctr">
-                        <a:buNone/>
-                      </a:pPr>
-                      <a:r>
-                        <a:rPr lang="en-US" sz="1200" b="1" dirty="0">
-                          <a:solidFill>
-                            <a:srgbClr val="FFFFFF"/>
-                          </a:solidFill>
-                          <a:latin typeface="Trebuchet MS" pitchFamily="34" charset="0"/>
-                          <a:ea typeface="Trebuchet MS" pitchFamily="34" charset="-122"/>
-                          <a:cs typeface="Trebuchet MS" pitchFamily="34" charset="-120"/>
-                        </a:rPr>
-                        <a:t>ROC-AUC</a:t>
-                      </a:r>
-                      <a:endParaRPr lang="en-US" sz="1200" dirty="0">
-                        <a:latin typeface="Trebuchet MS" charset="0"/>
-                        <a:ea typeface="Trebuchet MS" charset="0"/>
-                        <a:cs typeface="Trebuchet MS" charset="0"/>
-                      </a:endParaRPr>
-                    </a:p>
-                  </a:txBody>
-                  <a:tcPr anchor="ctr">
-                    <a:lnL w="12700" cap="flat" cmpd="sng" algn="ctr">
-                      <a:solidFill>
-                        <a:srgbClr val="DCE6E9"/>
-                      </a:solidFill>
-                      <a:prstDash val="solid"/>
-                      <a:round/>
-                      <a:headEnd type="none" w="med" len="med"/>
-                      <a:tailEnd type="none" w="med" len="med"/>
-                    </a:lnL>
-                    <a:lnR w="12700" cap="flat" cmpd="sng" algn="ctr">
-                      <a:solidFill>
-                        <a:srgbClr val="DCE6E9"/>
-                      </a:solidFill>
-                      <a:prstDash val="solid"/>
-                      <a:round/>
-                      <a:headEnd type="none" w="med" len="med"/>
-                      <a:tailEnd type="none" w="med" len="med"/>
-                    </a:lnR>
-                    <a:lnT w="12700" cap="flat" cmpd="sng" algn="ctr">
-                      <a:solidFill>
-                        <a:srgbClr val="DCE6E9"/>
-                      </a:solidFill>
-                      <a:prstDash val="solid"/>
-                      <a:round/>
-                      <a:headEnd type="none" w="med" len="med"/>
-                      <a:tailEnd type="none" w="med" len="med"/>
-                    </a:lnT>
-                    <a:lnB w="12700" cap="flat" cmpd="sng" algn="ctr">
-                      <a:solidFill>
-                        <a:srgbClr val="DCE6E9"/>
-                      </a:solidFill>
-                      <a:prstDash val="solid"/>
-                      <a:round/>
-                      <a:headEnd type="none" w="med" len="med"/>
-                      <a:tailEnd type="none" w="med" len="med"/>
-                    </a:lnB>
-                    <a:solidFill>
-                      <a:srgbClr val="0E7C86"/>
-                    </a:solidFill>
-                  </a:tcPr>
-                </a:tc>
-                <a:extLst>
-                  <a:ext uri="{0D108BD9-81ED-4DB2-BD59-A6C34878D82A}">
-                    <a16:rowId xmlns:a16="http://schemas.microsoft.com/office/drawing/2014/main" val="10000"/>
-                  </a:ext>
-                </a:extLst>
-              </a:tr>
-              <a:tr h="475488">
-                <a:tc>
-                  <a:txBody>
-                    <a:bodyPr/>
-                    <a:lstStyle/>
-                    <a:p>
-                      <a:pPr marL="0" indent="0" algn="l">
-                        <a:buNone/>
-                      </a:pPr>
-                      <a:r>
-                        <a:rPr lang="en-US" sz="1200" dirty="0">
-                          <a:solidFill>
-                            <a:srgbClr val="6A7A82"/>
-                          </a:solidFill>
-                          <a:latin typeface="Calibri" pitchFamily="34" charset="0"/>
-                          <a:ea typeface="Calibri" pitchFamily="34" charset="-122"/>
-                          <a:cs typeface="Calibri" pitchFamily="34" charset="-120"/>
-                        </a:rPr>
-                        <a:t>Dummy</a:t>
-                      </a:r>
-                      <a:endParaRPr lang="en-US" sz="1200" dirty="0">
-                        <a:latin typeface="Calibri" charset="0"/>
-                        <a:ea typeface="Calibri" charset="0"/>
-                        <a:cs typeface="Calibri" charset="0"/>
-                      </a:endParaRPr>
-                    </a:p>
-                  </a:txBody>
-                  <a:tcPr anchor="ctr">
-                    <a:lnL w="12700" cap="flat" cmpd="sng" algn="ctr">
-                      <a:solidFill>
-                        <a:srgbClr val="DCE6E9"/>
-                      </a:solidFill>
-                      <a:prstDash val="solid"/>
-                      <a:round/>
-                      <a:headEnd type="none" w="med" len="med"/>
-                      <a:tailEnd type="none" w="med" len="med"/>
-                    </a:lnL>
-                    <a:lnR w="12700" cap="flat" cmpd="sng" algn="ctr">
-                      <a:solidFill>
-                        <a:srgbClr val="DCE6E9"/>
-                      </a:solidFill>
-                      <a:prstDash val="solid"/>
-                      <a:round/>
-                      <a:headEnd type="none" w="med" len="med"/>
-                      <a:tailEnd type="none" w="med" len="med"/>
-                    </a:lnR>
-                    <a:lnT w="12700" cap="flat" cmpd="sng" algn="ctr">
-                      <a:solidFill>
-                        <a:srgbClr val="DCE6E9"/>
-                      </a:solidFill>
-                      <a:prstDash val="solid"/>
-                      <a:round/>
-                      <a:headEnd type="none" w="med" len="med"/>
-                      <a:tailEnd type="none" w="med" len="med"/>
-                    </a:lnT>
-                    <a:lnB w="12700" cap="flat" cmpd="sng" algn="ctr">
-                      <a:solidFill>
-                        <a:srgbClr val="DCE6E9"/>
-                      </a:solidFill>
-                      <a:prstDash val="solid"/>
-                      <a:round/>
-                      <a:headEnd type="none" w="med" len="med"/>
-                      <a:tailEnd type="none" w="med" len="med"/>
-                    </a:lnB>
-                    <a:solidFill>
-                      <a:srgbClr val="FFFFFF"/>
-                    </a:solidFill>
-                  </a:tcPr>
-                </a:tc>
-                <a:tc>
-                  <a:txBody>
-                    <a:bodyPr/>
-                    <a:lstStyle/>
-                    <a:p>
-                      <a:pPr marL="0" indent="0" algn="ctr">
-                        <a:buNone/>
-                      </a:pPr>
-                      <a:r>
-                        <a:rPr lang="en-US" sz="1200" dirty="0">
-                          <a:solidFill>
-                            <a:srgbClr val="1F2D34"/>
-                          </a:solidFill>
-                          <a:latin typeface="Calibri" pitchFamily="34" charset="0"/>
-                          <a:ea typeface="Calibri" pitchFamily="34" charset="-122"/>
-                          <a:cs typeface="Calibri" pitchFamily="34" charset="-120"/>
-                        </a:rPr>
-                        <a:t>0,000</a:t>
-                      </a:r>
-                      <a:endParaRPr lang="en-US" sz="1200" dirty="0">
-                        <a:latin typeface="Calibri" charset="0"/>
-                        <a:ea typeface="Calibri" charset="0"/>
-                        <a:cs typeface="Calibri" charset="0"/>
-                      </a:endParaRPr>
-                    </a:p>
-                  </a:txBody>
-                  <a:tcPr anchor="ctr">
-                    <a:lnL w="12700" cap="flat" cmpd="sng" algn="ctr">
-                      <a:solidFill>
-                        <a:srgbClr val="DCE6E9"/>
-                      </a:solidFill>
-                      <a:prstDash val="solid"/>
-                      <a:round/>
-                      <a:headEnd type="none" w="med" len="med"/>
-                      <a:tailEnd type="none" w="med" len="med"/>
-                    </a:lnL>
-                    <a:lnR w="12700" cap="flat" cmpd="sng" algn="ctr">
-                      <a:solidFill>
-                        <a:srgbClr val="DCE6E9"/>
-                      </a:solidFill>
-                      <a:prstDash val="solid"/>
-                      <a:round/>
-                      <a:headEnd type="none" w="med" len="med"/>
-                      <a:tailEnd type="none" w="med" len="med"/>
-                    </a:lnR>
-                    <a:lnT w="12700" cap="flat" cmpd="sng" algn="ctr">
-                      <a:solidFill>
-                        <a:srgbClr val="DCE6E9"/>
-                      </a:solidFill>
-                      <a:prstDash val="solid"/>
-                      <a:round/>
-                      <a:headEnd type="none" w="med" len="med"/>
-                      <a:tailEnd type="none" w="med" len="med"/>
-                    </a:lnT>
-                    <a:lnB w="12700" cap="flat" cmpd="sng" algn="ctr">
-                      <a:solidFill>
-                        <a:srgbClr val="DCE6E9"/>
-                      </a:solidFill>
-                      <a:prstDash val="solid"/>
-                      <a:round/>
-                      <a:headEnd type="none" w="med" len="med"/>
-                      <a:tailEnd type="none" w="med" len="med"/>
-                    </a:lnB>
-                    <a:solidFill>
-                      <a:srgbClr val="FFFFFF"/>
-                    </a:solidFill>
-                  </a:tcPr>
-                </a:tc>
-                <a:tc>
-                  <a:txBody>
-                    <a:bodyPr/>
-                    <a:lstStyle/>
-                    <a:p>
-                      <a:pPr marL="0" indent="0" algn="ctr">
-                        <a:buNone/>
-                      </a:pPr>
-                      <a:r>
-                        <a:rPr lang="en-US" sz="1200" dirty="0">
-                          <a:solidFill>
-                            <a:srgbClr val="1F2D34"/>
-                          </a:solidFill>
-                          <a:latin typeface="Calibri" pitchFamily="34" charset="0"/>
-                          <a:ea typeface="Calibri" pitchFamily="34" charset="-122"/>
-                          <a:cs typeface="Calibri" pitchFamily="34" charset="-120"/>
-                        </a:rPr>
-                        <a:t>0,000</a:t>
-                      </a:r>
-                      <a:endParaRPr lang="en-US" sz="1200" dirty="0">
-                        <a:latin typeface="Calibri" charset="0"/>
-                        <a:ea typeface="Calibri" charset="0"/>
-                        <a:cs typeface="Calibri" charset="0"/>
-                      </a:endParaRPr>
-                    </a:p>
-                  </a:txBody>
-                  <a:tcPr anchor="ctr">
-                    <a:lnL w="12700" cap="flat" cmpd="sng" algn="ctr">
-                      <a:solidFill>
-                        <a:srgbClr val="DCE6E9"/>
-                      </a:solidFill>
-                      <a:prstDash val="solid"/>
-                      <a:round/>
-                      <a:headEnd type="none" w="med" len="med"/>
-                      <a:tailEnd type="none" w="med" len="med"/>
-                    </a:lnL>
-                    <a:lnR w="12700" cap="flat" cmpd="sng" algn="ctr">
-                      <a:solidFill>
-                        <a:srgbClr val="DCE6E9"/>
-                      </a:solidFill>
-                      <a:prstDash val="solid"/>
-                      <a:round/>
-                      <a:headEnd type="none" w="med" len="med"/>
-                      <a:tailEnd type="none" w="med" len="med"/>
-                    </a:lnR>
-                    <a:lnT w="12700" cap="flat" cmpd="sng" algn="ctr">
-                      <a:solidFill>
-                        <a:srgbClr val="DCE6E9"/>
-                      </a:solidFill>
-                      <a:prstDash val="solid"/>
-                      <a:round/>
-                      <a:headEnd type="none" w="med" len="med"/>
-                      <a:tailEnd type="none" w="med" len="med"/>
-                    </a:lnT>
-                    <a:lnB w="12700" cap="flat" cmpd="sng" algn="ctr">
-                      <a:solidFill>
-                        <a:srgbClr val="DCE6E9"/>
-                      </a:solidFill>
-                      <a:prstDash val="solid"/>
-                      <a:round/>
-                      <a:headEnd type="none" w="med" len="med"/>
-                      <a:tailEnd type="none" w="med" len="med"/>
-                    </a:lnB>
-                    <a:solidFill>
-                      <a:srgbClr val="FFFFFF"/>
-                    </a:solidFill>
-                  </a:tcPr>
-                </a:tc>
-                <a:tc>
-                  <a:txBody>
-                    <a:bodyPr/>
-                    <a:lstStyle/>
-                    <a:p>
-                      <a:pPr marL="0" indent="0" algn="ctr">
-                        <a:buNone/>
-                      </a:pPr>
-                      <a:r>
-                        <a:rPr lang="en-US" sz="1200" dirty="0">
-                          <a:solidFill>
-                            <a:srgbClr val="1F2D34"/>
-                          </a:solidFill>
-                          <a:latin typeface="Calibri" pitchFamily="34" charset="0"/>
-                          <a:ea typeface="Calibri" pitchFamily="34" charset="-122"/>
-                          <a:cs typeface="Calibri" pitchFamily="34" charset="-120"/>
-                        </a:rPr>
-                        <a:t>0,000</a:t>
-                      </a:r>
-                      <a:endParaRPr lang="en-US" sz="1200" dirty="0">
-                        <a:latin typeface="Calibri" charset="0"/>
-                        <a:ea typeface="Calibri" charset="0"/>
-                        <a:cs typeface="Calibri" charset="0"/>
-                      </a:endParaRPr>
-                    </a:p>
-                  </a:txBody>
-                  <a:tcPr anchor="ctr">
-                    <a:lnL w="12700" cap="flat" cmpd="sng" algn="ctr">
-                      <a:solidFill>
-                        <a:srgbClr val="DCE6E9"/>
-                      </a:solidFill>
-                      <a:prstDash val="solid"/>
-                      <a:round/>
-                      <a:headEnd type="none" w="med" len="med"/>
-                      <a:tailEnd type="none" w="med" len="med"/>
-                    </a:lnL>
-                    <a:lnR w="12700" cap="flat" cmpd="sng" algn="ctr">
-                      <a:solidFill>
-                        <a:srgbClr val="DCE6E9"/>
-                      </a:solidFill>
-                      <a:prstDash val="solid"/>
-                      <a:round/>
-                      <a:headEnd type="none" w="med" len="med"/>
-                      <a:tailEnd type="none" w="med" len="med"/>
-                    </a:lnR>
-                    <a:lnT w="12700" cap="flat" cmpd="sng" algn="ctr">
-                      <a:solidFill>
-                        <a:srgbClr val="DCE6E9"/>
-                      </a:solidFill>
-                      <a:prstDash val="solid"/>
-                      <a:round/>
-                      <a:headEnd type="none" w="med" len="med"/>
-                      <a:tailEnd type="none" w="med" len="med"/>
-                    </a:lnT>
-                    <a:lnB w="12700" cap="flat" cmpd="sng" algn="ctr">
-                      <a:solidFill>
-                        <a:srgbClr val="DCE6E9"/>
-                      </a:solidFill>
-                      <a:prstDash val="solid"/>
-                      <a:round/>
-                      <a:headEnd type="none" w="med" len="med"/>
-                      <a:tailEnd type="none" w="med" len="med"/>
-                    </a:lnB>
-                    <a:solidFill>
-                      <a:srgbClr val="FFFFFF"/>
-                    </a:solidFill>
-                  </a:tcPr>
-                </a:tc>
-                <a:tc>
-                  <a:txBody>
-                    <a:bodyPr/>
-                    <a:lstStyle/>
-                    <a:p>
-                      <a:pPr marL="0" indent="0" algn="ctr">
-                        <a:buNone/>
-                      </a:pPr>
-                      <a:r>
-                        <a:rPr lang="en-US" sz="1200" dirty="0">
-                          <a:solidFill>
-                            <a:srgbClr val="1F2D34"/>
-                          </a:solidFill>
-                          <a:latin typeface="Calibri" pitchFamily="34" charset="0"/>
-                          <a:ea typeface="Calibri" pitchFamily="34" charset="-122"/>
-                          <a:cs typeface="Calibri" pitchFamily="34" charset="-120"/>
-                        </a:rPr>
-                        <a:t>0,168</a:t>
-                      </a:r>
-                      <a:endParaRPr lang="en-US" sz="1200" dirty="0">
-                        <a:latin typeface="Calibri" charset="0"/>
-                        <a:ea typeface="Calibri" charset="0"/>
-                        <a:cs typeface="Calibri" charset="0"/>
-                      </a:endParaRPr>
-                    </a:p>
-                  </a:txBody>
-                  <a:tcPr anchor="ctr">
-                    <a:lnL w="12700" cap="flat" cmpd="sng" algn="ctr">
-                      <a:solidFill>
-                        <a:srgbClr val="DCE6E9"/>
-                      </a:solidFill>
-                      <a:prstDash val="solid"/>
-                      <a:round/>
-                      <a:headEnd type="none" w="med" len="med"/>
-                      <a:tailEnd type="none" w="med" len="med"/>
-                    </a:lnL>
-                    <a:lnR w="12700" cap="flat" cmpd="sng" algn="ctr">
-                      <a:solidFill>
-                        <a:srgbClr val="DCE6E9"/>
-                      </a:solidFill>
-                      <a:prstDash val="solid"/>
-                      <a:round/>
-                      <a:headEnd type="none" w="med" len="med"/>
-                      <a:tailEnd type="none" w="med" len="med"/>
-                    </a:lnR>
-                    <a:lnT w="12700" cap="flat" cmpd="sng" algn="ctr">
-                      <a:solidFill>
-                        <a:srgbClr val="DCE6E9"/>
-                      </a:solidFill>
-                      <a:prstDash val="solid"/>
-                      <a:round/>
-                      <a:headEnd type="none" w="med" len="med"/>
-                      <a:tailEnd type="none" w="med" len="med"/>
-                    </a:lnT>
-                    <a:lnB w="12700" cap="flat" cmpd="sng" algn="ctr">
-                      <a:solidFill>
-                        <a:srgbClr val="DCE6E9"/>
-                      </a:solidFill>
-                      <a:prstDash val="solid"/>
-                      <a:round/>
-                      <a:headEnd type="none" w="med" len="med"/>
-                      <a:tailEnd type="none" w="med" len="med"/>
-                    </a:lnB>
-                    <a:solidFill>
-                      <a:srgbClr val="FFFFFF"/>
-                    </a:solidFill>
-                  </a:tcPr>
-                </a:tc>
-                <a:tc>
-                  <a:txBody>
-                    <a:bodyPr/>
-                    <a:lstStyle/>
-                    <a:p>
-                      <a:pPr marL="0" indent="0" algn="ctr">
-                        <a:buNone/>
-                      </a:pPr>
-                      <a:r>
-                        <a:rPr lang="en-US" sz="1200" dirty="0">
-                          <a:solidFill>
-                            <a:srgbClr val="1F2D34"/>
-                          </a:solidFill>
-                          <a:latin typeface="Calibri" pitchFamily="34" charset="0"/>
-                          <a:ea typeface="Calibri" pitchFamily="34" charset="-122"/>
-                          <a:cs typeface="Calibri" pitchFamily="34" charset="-120"/>
-                        </a:rPr>
-                        <a:t>0,500</a:t>
-                      </a:r>
-                      <a:endParaRPr lang="en-US" sz="1200" dirty="0">
-                        <a:latin typeface="Calibri" charset="0"/>
-                        <a:ea typeface="Calibri" charset="0"/>
-                        <a:cs typeface="Calibri" charset="0"/>
-                      </a:endParaRPr>
-                    </a:p>
-                  </a:txBody>
-                  <a:tcPr anchor="ctr">
-                    <a:lnL w="12700" cap="flat" cmpd="sng" algn="ctr">
-                      <a:solidFill>
-                        <a:srgbClr val="DCE6E9"/>
-                      </a:solidFill>
-                      <a:prstDash val="solid"/>
-                      <a:round/>
-                      <a:headEnd type="none" w="med" len="med"/>
-                      <a:tailEnd type="none" w="med" len="med"/>
-                    </a:lnL>
-                    <a:lnR w="12700" cap="flat" cmpd="sng" algn="ctr">
-                      <a:solidFill>
-                        <a:srgbClr val="DCE6E9"/>
-                      </a:solidFill>
-                      <a:prstDash val="solid"/>
-                      <a:round/>
-                      <a:headEnd type="none" w="med" len="med"/>
-                      <a:tailEnd type="none" w="med" len="med"/>
-                    </a:lnR>
-                    <a:lnT w="12700" cap="flat" cmpd="sng" algn="ctr">
-                      <a:solidFill>
-                        <a:srgbClr val="DCE6E9"/>
-                      </a:solidFill>
-                      <a:prstDash val="solid"/>
-                      <a:round/>
-                      <a:headEnd type="none" w="med" len="med"/>
-                      <a:tailEnd type="none" w="med" len="med"/>
-                    </a:lnT>
-                    <a:lnB w="12700" cap="flat" cmpd="sng" algn="ctr">
-                      <a:solidFill>
-                        <a:srgbClr val="DCE6E9"/>
-                      </a:solidFill>
-                      <a:prstDash val="solid"/>
-                      <a:round/>
-                      <a:headEnd type="none" w="med" len="med"/>
-                      <a:tailEnd type="none" w="med" len="med"/>
-                    </a:lnB>
-                    <a:solidFill>
-                      <a:srgbClr val="FFFFFF"/>
-                    </a:solidFill>
-                  </a:tcPr>
-                </a:tc>
-                <a:extLst>
-                  <a:ext uri="{0D108BD9-81ED-4DB2-BD59-A6C34878D82A}">
-                    <a16:rowId xmlns:a16="http://schemas.microsoft.com/office/drawing/2014/main" val="10001"/>
-                  </a:ext>
-                </a:extLst>
-              </a:tr>
-              <a:tr h="475488">
-                <a:tc>
-                  <a:txBody>
-                    <a:bodyPr/>
-                    <a:lstStyle/>
-                    <a:p>
-                      <a:pPr marL="0" indent="0" algn="l">
-                        <a:buNone/>
-                      </a:pPr>
-                      <a:r>
-                        <a:rPr lang="en-US" sz="1200" kern="1200" dirty="0">
-                          <a:solidFill>
-                            <a:srgbClr val="6A7A82"/>
-                          </a:solidFill>
-                          <a:latin typeface="Calibri" pitchFamily="34" charset="0"/>
-                          <a:ea typeface="Calibri" pitchFamily="34" charset="-122"/>
-                          <a:cs typeface="Calibri" pitchFamily="34" charset="-120"/>
-                        </a:rPr>
-                        <a:t>Regresion logistica</a:t>
-                      </a:r>
-                    </a:p>
-                  </a:txBody>
-                  <a:tcPr anchor="ctr">
-                    <a:lnL w="12700" cap="flat" cmpd="sng" algn="ctr">
-                      <a:solidFill>
-                        <a:srgbClr val="DCE6E9"/>
-                      </a:solidFill>
-                      <a:prstDash val="solid"/>
-                      <a:round/>
-                      <a:headEnd type="none" w="med" len="med"/>
-                      <a:tailEnd type="none" w="med" len="med"/>
-                    </a:lnL>
-                    <a:lnR w="12700" cap="flat" cmpd="sng" algn="ctr">
-                      <a:solidFill>
-                        <a:srgbClr val="DCE6E9"/>
-                      </a:solidFill>
-                      <a:prstDash val="solid"/>
-                      <a:round/>
-                      <a:headEnd type="none" w="med" len="med"/>
-                      <a:tailEnd type="none" w="med" len="med"/>
-                    </a:lnR>
-                    <a:lnT w="12700" cap="flat" cmpd="sng" algn="ctr">
-                      <a:solidFill>
-                        <a:srgbClr val="DCE6E9"/>
-                      </a:solidFill>
-                      <a:prstDash val="solid"/>
-                      <a:round/>
-                      <a:headEnd type="none" w="med" len="med"/>
-                      <a:tailEnd type="none" w="med" len="med"/>
-                    </a:lnT>
-                    <a:lnB w="12700" cap="flat" cmpd="sng" algn="ctr">
-                      <a:solidFill>
-                        <a:srgbClr val="DCE6E9"/>
-                      </a:solidFill>
-                      <a:prstDash val="solid"/>
-                      <a:round/>
-                      <a:headEnd type="none" w="med" len="med"/>
-                      <a:tailEnd type="none" w="med" len="med"/>
-                    </a:lnB>
-                    <a:solidFill>
-                      <a:srgbClr val="FFFFFF"/>
-                    </a:solidFill>
-                  </a:tcPr>
-                </a:tc>
-                <a:tc>
-                  <a:txBody>
-                    <a:bodyPr/>
-                    <a:lstStyle/>
-                    <a:p>
-                      <a:pPr marL="0" indent="0" algn="ctr">
-                        <a:buNone/>
-                      </a:pPr>
-                      <a:r>
-                        <a:rPr lang="en-US" sz="1200" kern="1200" dirty="0">
-                          <a:solidFill>
-                            <a:srgbClr val="1F2D34"/>
-                          </a:solidFill>
-                          <a:latin typeface="Calibri" pitchFamily="34" charset="0"/>
-                          <a:ea typeface="Calibri" pitchFamily="34" charset="-122"/>
-                          <a:cs typeface="Calibri" pitchFamily="34" charset="-120"/>
-                        </a:rPr>
-                        <a:t>0,688</a:t>
-                      </a:r>
-                    </a:p>
-                  </a:txBody>
-                  <a:tcPr anchor="ctr">
-                    <a:lnL w="12700" cap="flat" cmpd="sng" algn="ctr">
-                      <a:solidFill>
-                        <a:srgbClr val="DCE6E9"/>
-                      </a:solidFill>
-                      <a:prstDash val="solid"/>
-                      <a:round/>
-                      <a:headEnd type="none" w="med" len="med"/>
-                      <a:tailEnd type="none" w="med" len="med"/>
-                    </a:lnL>
-                    <a:lnR w="12700" cap="flat" cmpd="sng" algn="ctr">
-                      <a:solidFill>
-                        <a:srgbClr val="DCE6E9"/>
-                      </a:solidFill>
-                      <a:prstDash val="solid"/>
-                      <a:round/>
-                      <a:headEnd type="none" w="med" len="med"/>
-                      <a:tailEnd type="none" w="med" len="med"/>
-                    </a:lnR>
-                    <a:lnT w="12700" cap="flat" cmpd="sng" algn="ctr">
-                      <a:solidFill>
-                        <a:srgbClr val="DCE6E9"/>
-                      </a:solidFill>
-                      <a:prstDash val="solid"/>
-                      <a:round/>
-                      <a:headEnd type="none" w="med" len="med"/>
-                      <a:tailEnd type="none" w="med" len="med"/>
-                    </a:lnT>
-                    <a:lnB w="12700" cap="flat" cmpd="sng" algn="ctr">
-                      <a:solidFill>
-                        <a:srgbClr val="DCE6E9"/>
-                      </a:solidFill>
-                      <a:prstDash val="solid"/>
-                      <a:round/>
-                      <a:headEnd type="none" w="med" len="med"/>
-                      <a:tailEnd type="none" w="med" len="med"/>
-                    </a:lnB>
-                    <a:solidFill>
-                      <a:srgbClr val="FFFFFF"/>
-                    </a:solidFill>
-                  </a:tcPr>
-                </a:tc>
-                <a:tc>
-                  <a:txBody>
-                    <a:bodyPr/>
-                    <a:lstStyle/>
-                    <a:p>
-                      <a:pPr marL="0" indent="0" algn="ctr">
-                        <a:buNone/>
-                      </a:pPr>
-                      <a:r>
-                        <a:rPr lang="en-US" sz="1200" kern="1200" dirty="0">
-                          <a:solidFill>
-                            <a:srgbClr val="1F2D34"/>
-                          </a:solidFill>
-                          <a:latin typeface="Calibri" pitchFamily="34" charset="0"/>
-                          <a:ea typeface="Calibri" pitchFamily="34" charset="-122"/>
-                          <a:cs typeface="Calibri" pitchFamily="34" charset="-120"/>
-                        </a:rPr>
-                        <a:t>0,809</a:t>
-                      </a:r>
-                    </a:p>
-                  </a:txBody>
-                  <a:tcPr anchor="ctr">
-                    <a:lnL w="12700" cap="flat" cmpd="sng" algn="ctr">
-                      <a:solidFill>
-                        <a:srgbClr val="DCE6E9"/>
-                      </a:solidFill>
-                      <a:prstDash val="solid"/>
-                      <a:round/>
-                      <a:headEnd type="none" w="med" len="med"/>
-                      <a:tailEnd type="none" w="med" len="med"/>
-                    </a:lnL>
-                    <a:lnR w="12700" cap="flat" cmpd="sng" algn="ctr">
-                      <a:solidFill>
-                        <a:srgbClr val="DCE6E9"/>
-                      </a:solidFill>
-                      <a:prstDash val="solid"/>
-                      <a:round/>
-                      <a:headEnd type="none" w="med" len="med"/>
-                      <a:tailEnd type="none" w="med" len="med"/>
-                    </a:lnR>
-                    <a:lnT w="12700" cap="flat" cmpd="sng" algn="ctr">
-                      <a:solidFill>
-                        <a:srgbClr val="DCE6E9"/>
-                      </a:solidFill>
-                      <a:prstDash val="solid"/>
-                      <a:round/>
-                      <a:headEnd type="none" w="med" len="med"/>
-                      <a:tailEnd type="none" w="med" len="med"/>
-                    </a:lnT>
-                    <a:lnB w="12700" cap="flat" cmpd="sng" algn="ctr">
-                      <a:solidFill>
-                        <a:srgbClr val="DCE6E9"/>
-                      </a:solidFill>
-                      <a:prstDash val="solid"/>
-                      <a:round/>
-                      <a:headEnd type="none" w="med" len="med"/>
-                      <a:tailEnd type="none" w="med" len="med"/>
-                    </a:lnB>
-                    <a:solidFill>
-                      <a:srgbClr val="FFFFFF"/>
-                    </a:solidFill>
-                  </a:tcPr>
-                </a:tc>
-                <a:tc>
-                  <a:txBody>
-                    <a:bodyPr/>
-                    <a:lstStyle/>
-                    <a:p>
-                      <a:pPr marL="0" indent="0" algn="ctr">
-                        <a:buNone/>
-                      </a:pPr>
-                      <a:r>
-                        <a:rPr lang="en-US" sz="1200" dirty="0">
-                          <a:solidFill>
-                            <a:srgbClr val="1F2D34"/>
-                          </a:solidFill>
-                          <a:latin typeface="Calibri" pitchFamily="34" charset="0"/>
-                          <a:ea typeface="Calibri" pitchFamily="34" charset="-122"/>
-                          <a:cs typeface="Calibri" pitchFamily="34" charset="-120"/>
-                        </a:rPr>
-                        <a:t>0,431</a:t>
-                      </a:r>
-                      <a:endParaRPr lang="en-US" sz="1200" dirty="0">
-                        <a:latin typeface="Calibri" charset="0"/>
-                        <a:ea typeface="Calibri" charset="0"/>
-                        <a:cs typeface="Calibri" charset="0"/>
-                      </a:endParaRPr>
-                    </a:p>
-                  </a:txBody>
-                  <a:tcPr anchor="ctr">
-                    <a:lnL w="12700" cap="flat" cmpd="sng" algn="ctr">
-                      <a:solidFill>
-                        <a:srgbClr val="DCE6E9"/>
-                      </a:solidFill>
-                      <a:prstDash val="solid"/>
-                      <a:round/>
-                      <a:headEnd type="none" w="med" len="med"/>
-                      <a:tailEnd type="none" w="med" len="med"/>
-                    </a:lnL>
-                    <a:lnR w="12700" cap="flat" cmpd="sng" algn="ctr">
-                      <a:solidFill>
-                        <a:srgbClr val="DCE6E9"/>
-                      </a:solidFill>
-                      <a:prstDash val="solid"/>
-                      <a:round/>
-                      <a:headEnd type="none" w="med" len="med"/>
-                      <a:tailEnd type="none" w="med" len="med"/>
-                    </a:lnR>
-                    <a:lnT w="12700" cap="flat" cmpd="sng" algn="ctr">
-                      <a:solidFill>
-                        <a:srgbClr val="DCE6E9"/>
-                      </a:solidFill>
-                      <a:prstDash val="solid"/>
-                      <a:round/>
-                      <a:headEnd type="none" w="med" len="med"/>
-                      <a:tailEnd type="none" w="med" len="med"/>
-                    </a:lnT>
-                    <a:lnB w="12700" cap="flat" cmpd="sng" algn="ctr">
-                      <a:solidFill>
-                        <a:srgbClr val="DCE6E9"/>
-                      </a:solidFill>
-                      <a:prstDash val="solid"/>
-                      <a:round/>
-                      <a:headEnd type="none" w="med" len="med"/>
-                      <a:tailEnd type="none" w="med" len="med"/>
-                    </a:lnB>
-                    <a:solidFill>
-                      <a:srgbClr val="FFFFFF"/>
-                    </a:solidFill>
-                  </a:tcPr>
-                </a:tc>
-                <a:tc>
-                  <a:txBody>
-                    <a:bodyPr/>
-                    <a:lstStyle/>
-                    <a:p>
-                      <a:pPr marL="0" indent="0" algn="ctr">
-                        <a:buNone/>
-                      </a:pPr>
-                      <a:r>
-                        <a:rPr lang="en-US" sz="1200" dirty="0">
-                          <a:solidFill>
-                            <a:srgbClr val="1F2D34"/>
-                          </a:solidFill>
-                          <a:latin typeface="Calibri" pitchFamily="34" charset="0"/>
-                          <a:ea typeface="Calibri" pitchFamily="34" charset="-122"/>
-                          <a:cs typeface="Calibri" pitchFamily="34" charset="-120"/>
-                        </a:rPr>
-                        <a:t>0,609</a:t>
-                      </a:r>
-                      <a:endParaRPr lang="en-US" sz="1200" dirty="0">
-                        <a:latin typeface="Calibri" charset="0"/>
-                        <a:ea typeface="Calibri" charset="0"/>
-                        <a:cs typeface="Calibri" charset="0"/>
-                      </a:endParaRPr>
-                    </a:p>
-                  </a:txBody>
-                  <a:tcPr anchor="ctr">
-                    <a:lnL w="12700" cap="flat" cmpd="sng" algn="ctr">
-                      <a:solidFill>
-                        <a:srgbClr val="DCE6E9"/>
-                      </a:solidFill>
-                      <a:prstDash val="solid"/>
-                      <a:round/>
-                      <a:headEnd type="none" w="med" len="med"/>
-                      <a:tailEnd type="none" w="med" len="med"/>
-                    </a:lnL>
-                    <a:lnR w="12700" cap="flat" cmpd="sng" algn="ctr">
-                      <a:solidFill>
-                        <a:srgbClr val="DCE6E9"/>
-                      </a:solidFill>
-                      <a:prstDash val="solid"/>
-                      <a:round/>
-                      <a:headEnd type="none" w="med" len="med"/>
-                      <a:tailEnd type="none" w="med" len="med"/>
-                    </a:lnR>
-                    <a:lnT w="12700" cap="flat" cmpd="sng" algn="ctr">
-                      <a:solidFill>
-                        <a:srgbClr val="DCE6E9"/>
-                      </a:solidFill>
-                      <a:prstDash val="solid"/>
-                      <a:round/>
-                      <a:headEnd type="none" w="med" len="med"/>
-                      <a:tailEnd type="none" w="med" len="med"/>
-                    </a:lnT>
-                    <a:lnB w="12700" cap="flat" cmpd="sng" algn="ctr">
-                      <a:solidFill>
-                        <a:srgbClr val="DCE6E9"/>
-                      </a:solidFill>
-                      <a:prstDash val="solid"/>
-                      <a:round/>
-                      <a:headEnd type="none" w="med" len="med"/>
-                      <a:tailEnd type="none" w="med" len="med"/>
-                    </a:lnB>
-                    <a:solidFill>
-                      <a:srgbClr val="FFFFFF"/>
-                    </a:solidFill>
-                  </a:tcPr>
-                </a:tc>
-                <a:tc>
-                  <a:txBody>
-                    <a:bodyPr/>
-                    <a:lstStyle/>
-                    <a:p>
-                      <a:pPr marL="0" indent="0" algn="ctr">
-                        <a:buNone/>
-                      </a:pPr>
-                      <a:r>
-                        <a:rPr lang="en-US" sz="1200" dirty="0">
-                          <a:solidFill>
-                            <a:srgbClr val="1F2D34"/>
-                          </a:solidFill>
-                          <a:latin typeface="Calibri" pitchFamily="34" charset="0"/>
-                          <a:ea typeface="Calibri" pitchFamily="34" charset="-122"/>
-                          <a:cs typeface="Calibri" pitchFamily="34" charset="-120"/>
-                        </a:rPr>
-                        <a:t>0,868</a:t>
-                      </a:r>
-                      <a:endParaRPr lang="en-US" sz="1200" dirty="0">
-                        <a:latin typeface="Calibri" charset="0"/>
-                        <a:ea typeface="Calibri" charset="0"/>
-                        <a:cs typeface="Calibri" charset="0"/>
-                      </a:endParaRPr>
-                    </a:p>
-                  </a:txBody>
-                  <a:tcPr anchor="ctr">
-                    <a:lnL w="12700" cap="flat" cmpd="sng" algn="ctr">
-                      <a:solidFill>
-                        <a:srgbClr val="DCE6E9"/>
-                      </a:solidFill>
-                      <a:prstDash val="solid"/>
-                      <a:round/>
-                      <a:headEnd type="none" w="med" len="med"/>
-                      <a:tailEnd type="none" w="med" len="med"/>
-                    </a:lnL>
-                    <a:lnR w="12700" cap="flat" cmpd="sng" algn="ctr">
-                      <a:solidFill>
-                        <a:srgbClr val="DCE6E9"/>
-                      </a:solidFill>
-                      <a:prstDash val="solid"/>
-                      <a:round/>
-                      <a:headEnd type="none" w="med" len="med"/>
-                      <a:tailEnd type="none" w="med" len="med"/>
-                    </a:lnR>
-                    <a:lnT w="12700" cap="flat" cmpd="sng" algn="ctr">
-                      <a:solidFill>
-                        <a:srgbClr val="DCE6E9"/>
-                      </a:solidFill>
-                      <a:prstDash val="solid"/>
-                      <a:round/>
-                      <a:headEnd type="none" w="med" len="med"/>
-                      <a:tailEnd type="none" w="med" len="med"/>
-                    </a:lnT>
-                    <a:lnB w="12700" cap="flat" cmpd="sng" algn="ctr">
-                      <a:solidFill>
-                        <a:srgbClr val="DCE6E9"/>
-                      </a:solidFill>
-                      <a:prstDash val="solid"/>
-                      <a:round/>
-                      <a:headEnd type="none" w="med" len="med"/>
-                      <a:tailEnd type="none" w="med" len="med"/>
-                    </a:lnB>
-                    <a:solidFill>
-                      <a:srgbClr val="FFFFFF"/>
-                    </a:solidFill>
-                  </a:tcPr>
-                </a:tc>
-                <a:extLst>
-                  <a:ext uri="{0D108BD9-81ED-4DB2-BD59-A6C34878D82A}">
-                    <a16:rowId xmlns:a16="http://schemas.microsoft.com/office/drawing/2014/main" val="10002"/>
-                  </a:ext>
-                </a:extLst>
-              </a:tr>
-              <a:tr h="475488">
-                <a:tc>
-                  <a:txBody>
-                    <a:bodyPr/>
-                    <a:lstStyle/>
-                    <a:p>
-                      <a:pPr marL="0" indent="0" algn="l">
-                        <a:buNone/>
-                      </a:pPr>
-                      <a:r>
-                        <a:rPr lang="en-US" sz="1200" dirty="0">
-                          <a:solidFill>
-                            <a:srgbClr val="1F2D34"/>
-                          </a:solidFill>
-                          <a:latin typeface="Calibri" pitchFamily="34" charset="0"/>
-                          <a:ea typeface="Calibri" pitchFamily="34" charset="-122"/>
-                          <a:cs typeface="Calibri" pitchFamily="34" charset="-120"/>
-                        </a:rPr>
-                        <a:t>Arbol de decision</a:t>
-                      </a:r>
-                      <a:endParaRPr lang="en-US" sz="1200" dirty="0">
-                        <a:latin typeface="Calibri" charset="0"/>
-                        <a:ea typeface="Calibri" charset="0"/>
-                        <a:cs typeface="Calibri" charset="0"/>
-                      </a:endParaRPr>
-                    </a:p>
-                  </a:txBody>
-                  <a:tcPr anchor="ctr">
-                    <a:lnL w="12700" cap="flat" cmpd="sng" algn="ctr">
-                      <a:solidFill>
-                        <a:srgbClr val="DCE6E9"/>
-                      </a:solidFill>
-                      <a:prstDash val="solid"/>
-                      <a:round/>
-                      <a:headEnd type="none" w="med" len="med"/>
-                      <a:tailEnd type="none" w="med" len="med"/>
-                    </a:lnL>
-                    <a:lnR w="12700" cap="flat" cmpd="sng" algn="ctr">
-                      <a:solidFill>
-                        <a:srgbClr val="DCE6E9"/>
-                      </a:solidFill>
-                      <a:prstDash val="solid"/>
-                      <a:round/>
-                      <a:headEnd type="none" w="med" len="med"/>
-                      <a:tailEnd type="none" w="med" len="med"/>
-                    </a:lnR>
-                    <a:lnT w="12700" cap="flat" cmpd="sng" algn="ctr">
-                      <a:solidFill>
-                        <a:srgbClr val="DCE6E9"/>
-                      </a:solidFill>
-                      <a:prstDash val="solid"/>
-                      <a:round/>
-                      <a:headEnd type="none" w="med" len="med"/>
-                      <a:tailEnd type="none" w="med" len="med"/>
-                    </a:lnT>
-                    <a:lnB w="12700" cap="flat" cmpd="sng" algn="ctr">
-                      <a:solidFill>
-                        <a:srgbClr val="DCE6E9"/>
-                      </a:solidFill>
-                      <a:prstDash val="solid"/>
-                      <a:round/>
-                      <a:headEnd type="none" w="med" len="med"/>
-                      <a:tailEnd type="none" w="med" len="med"/>
-                    </a:lnB>
-                    <a:solidFill>
-                      <a:srgbClr val="FFFFFF"/>
-                    </a:solidFill>
-                  </a:tcPr>
-                </a:tc>
-                <a:tc>
-                  <a:txBody>
-                    <a:bodyPr/>
-                    <a:lstStyle/>
-                    <a:p>
-                      <a:pPr marL="0" indent="0" algn="ctr">
-                        <a:buNone/>
-                      </a:pPr>
-                      <a:r>
-                        <a:rPr lang="en-US" sz="1200" dirty="0">
-                          <a:solidFill>
-                            <a:srgbClr val="1F2D34"/>
-                          </a:solidFill>
-                          <a:latin typeface="Calibri" pitchFamily="34" charset="0"/>
-                          <a:ea typeface="Calibri" pitchFamily="34" charset="-122"/>
-                          <a:cs typeface="Calibri" pitchFamily="34" charset="-120"/>
-                        </a:rPr>
-                        <a:t>0,669</a:t>
-                      </a:r>
-                      <a:endParaRPr lang="en-US" sz="1200" dirty="0">
-                        <a:latin typeface="Calibri" charset="0"/>
-                        <a:ea typeface="Calibri" charset="0"/>
-                        <a:cs typeface="Calibri" charset="0"/>
-                      </a:endParaRPr>
-                    </a:p>
-                  </a:txBody>
-                  <a:tcPr anchor="ctr">
-                    <a:lnL w="12700" cap="flat" cmpd="sng" algn="ctr">
-                      <a:solidFill>
-                        <a:srgbClr val="DCE6E9"/>
-                      </a:solidFill>
-                      <a:prstDash val="solid"/>
-                      <a:round/>
-                      <a:headEnd type="none" w="med" len="med"/>
-                      <a:tailEnd type="none" w="med" len="med"/>
-                    </a:lnL>
-                    <a:lnR w="12700" cap="flat" cmpd="sng" algn="ctr">
-                      <a:solidFill>
-                        <a:srgbClr val="DCE6E9"/>
-                      </a:solidFill>
-                      <a:prstDash val="solid"/>
-                      <a:round/>
-                      <a:headEnd type="none" w="med" len="med"/>
-                      <a:tailEnd type="none" w="med" len="med"/>
-                    </a:lnR>
-                    <a:lnT w="12700" cap="flat" cmpd="sng" algn="ctr">
-                      <a:solidFill>
-                        <a:srgbClr val="DCE6E9"/>
-                      </a:solidFill>
-                      <a:prstDash val="solid"/>
-                      <a:round/>
-                      <a:headEnd type="none" w="med" len="med"/>
-                      <a:tailEnd type="none" w="med" len="med"/>
-                    </a:lnT>
-                    <a:lnB w="12700" cap="flat" cmpd="sng" algn="ctr">
-                      <a:solidFill>
-                        <a:srgbClr val="DCE6E9"/>
-                      </a:solidFill>
-                      <a:prstDash val="solid"/>
-                      <a:round/>
-                      <a:headEnd type="none" w="med" len="med"/>
-                      <a:tailEnd type="none" w="med" len="med"/>
-                    </a:lnB>
-                    <a:solidFill>
-                      <a:srgbClr val="FFFFFF"/>
-                    </a:solidFill>
-                  </a:tcPr>
-                </a:tc>
-                <a:tc>
-                  <a:txBody>
-                    <a:bodyPr/>
-                    <a:lstStyle/>
-                    <a:p>
-                      <a:pPr marL="0" indent="0" algn="ctr">
-                        <a:buNone/>
-                      </a:pPr>
-                      <a:r>
-                        <a:rPr lang="en-US" sz="1200" dirty="0">
-                          <a:solidFill>
-                            <a:srgbClr val="1F2D34"/>
-                          </a:solidFill>
-                          <a:latin typeface="Calibri" pitchFamily="34" charset="0"/>
-                          <a:ea typeface="Calibri" pitchFamily="34" charset="-122"/>
-                          <a:cs typeface="Calibri" pitchFamily="34" charset="-120"/>
-                        </a:rPr>
-                        <a:t>0,780</a:t>
-                      </a:r>
-                      <a:endParaRPr lang="en-US" sz="1200" dirty="0">
-                        <a:latin typeface="Calibri" charset="0"/>
-                        <a:ea typeface="Calibri" charset="0"/>
-                        <a:cs typeface="Calibri" charset="0"/>
-                      </a:endParaRPr>
-                    </a:p>
-                  </a:txBody>
-                  <a:tcPr anchor="ctr">
-                    <a:lnL w="12700" cap="flat" cmpd="sng" algn="ctr">
-                      <a:solidFill>
-                        <a:srgbClr val="DCE6E9"/>
-                      </a:solidFill>
-                      <a:prstDash val="solid"/>
-                      <a:round/>
-                      <a:headEnd type="none" w="med" len="med"/>
-                      <a:tailEnd type="none" w="med" len="med"/>
-                    </a:lnL>
-                    <a:lnR w="12700" cap="flat" cmpd="sng" algn="ctr">
-                      <a:solidFill>
-                        <a:srgbClr val="DCE6E9"/>
-                      </a:solidFill>
-                      <a:prstDash val="solid"/>
-                      <a:round/>
-                      <a:headEnd type="none" w="med" len="med"/>
-                      <a:tailEnd type="none" w="med" len="med"/>
-                    </a:lnR>
-                    <a:lnT w="12700" cap="flat" cmpd="sng" algn="ctr">
-                      <a:solidFill>
-                        <a:srgbClr val="DCE6E9"/>
-                      </a:solidFill>
-                      <a:prstDash val="solid"/>
-                      <a:round/>
-                      <a:headEnd type="none" w="med" len="med"/>
-                      <a:tailEnd type="none" w="med" len="med"/>
-                    </a:lnT>
-                    <a:lnB w="12700" cap="flat" cmpd="sng" algn="ctr">
-                      <a:solidFill>
-                        <a:srgbClr val="DCE6E9"/>
-                      </a:solidFill>
-                      <a:prstDash val="solid"/>
-                      <a:round/>
-                      <a:headEnd type="none" w="med" len="med"/>
-                      <a:tailEnd type="none" w="med" len="med"/>
-                    </a:lnB>
-                    <a:solidFill>
-                      <a:srgbClr val="FFFFFF"/>
-                    </a:solidFill>
-                  </a:tcPr>
-                </a:tc>
-                <a:tc>
-                  <a:txBody>
-                    <a:bodyPr/>
-                    <a:lstStyle/>
-                    <a:p>
-                      <a:pPr marL="0" indent="0" algn="ctr">
-                        <a:buNone/>
-                      </a:pPr>
-                      <a:r>
-                        <a:rPr lang="en-US" sz="1200" dirty="0">
-                          <a:solidFill>
-                            <a:srgbClr val="1F2D34"/>
-                          </a:solidFill>
-                          <a:latin typeface="Calibri" pitchFamily="34" charset="0"/>
-                          <a:ea typeface="Calibri" pitchFamily="34" charset="-122"/>
-                          <a:cs typeface="Calibri" pitchFamily="34" charset="-120"/>
-                        </a:rPr>
-                        <a:t>0,427</a:t>
-                      </a:r>
-                      <a:endParaRPr lang="en-US" sz="1200" dirty="0">
-                        <a:latin typeface="Calibri" charset="0"/>
-                        <a:ea typeface="Calibri" charset="0"/>
-                        <a:cs typeface="Calibri" charset="0"/>
-                      </a:endParaRPr>
-                    </a:p>
-                  </a:txBody>
-                  <a:tcPr anchor="ctr">
-                    <a:lnL w="12700" cap="flat" cmpd="sng" algn="ctr">
-                      <a:solidFill>
-                        <a:srgbClr val="DCE6E9"/>
-                      </a:solidFill>
-                      <a:prstDash val="solid"/>
-                      <a:round/>
-                      <a:headEnd type="none" w="med" len="med"/>
-                      <a:tailEnd type="none" w="med" len="med"/>
-                    </a:lnL>
-                    <a:lnR w="12700" cap="flat" cmpd="sng" algn="ctr">
-                      <a:solidFill>
-                        <a:srgbClr val="DCE6E9"/>
-                      </a:solidFill>
-                      <a:prstDash val="solid"/>
-                      <a:round/>
-                      <a:headEnd type="none" w="med" len="med"/>
-                      <a:tailEnd type="none" w="med" len="med"/>
-                    </a:lnR>
-                    <a:lnT w="12700" cap="flat" cmpd="sng" algn="ctr">
-                      <a:solidFill>
-                        <a:srgbClr val="DCE6E9"/>
-                      </a:solidFill>
-                      <a:prstDash val="solid"/>
-                      <a:round/>
-                      <a:headEnd type="none" w="med" len="med"/>
-                      <a:tailEnd type="none" w="med" len="med"/>
-                    </a:lnT>
-                    <a:lnB w="12700" cap="flat" cmpd="sng" algn="ctr">
-                      <a:solidFill>
-                        <a:srgbClr val="DCE6E9"/>
-                      </a:solidFill>
-                      <a:prstDash val="solid"/>
-                      <a:round/>
-                      <a:headEnd type="none" w="med" len="med"/>
-                      <a:tailEnd type="none" w="med" len="med"/>
-                    </a:lnB>
-                    <a:solidFill>
-                      <a:srgbClr val="FFFFFF"/>
-                    </a:solidFill>
-                  </a:tcPr>
-                </a:tc>
-                <a:tc>
-                  <a:txBody>
-                    <a:bodyPr/>
-                    <a:lstStyle/>
-                    <a:p>
-                      <a:pPr marL="0" indent="0" algn="ctr">
-                        <a:buNone/>
-                      </a:pPr>
-                      <a:r>
-                        <a:rPr lang="en-US" sz="1200" dirty="0">
-                          <a:solidFill>
-                            <a:srgbClr val="1F2D34"/>
-                          </a:solidFill>
-                          <a:latin typeface="Calibri" pitchFamily="34" charset="0"/>
-                          <a:ea typeface="Calibri" pitchFamily="34" charset="-122"/>
-                          <a:cs typeface="Calibri" pitchFamily="34" charset="-120"/>
-                        </a:rPr>
-                        <a:t>0,579</a:t>
-                      </a:r>
-                      <a:endParaRPr lang="en-US" sz="1200" dirty="0">
-                        <a:latin typeface="Calibri" charset="0"/>
-                        <a:ea typeface="Calibri" charset="0"/>
-                        <a:cs typeface="Calibri" charset="0"/>
-                      </a:endParaRPr>
-                    </a:p>
-                  </a:txBody>
-                  <a:tcPr anchor="ctr">
-                    <a:lnL w="12700" cap="flat" cmpd="sng" algn="ctr">
-                      <a:solidFill>
-                        <a:srgbClr val="DCE6E9"/>
-                      </a:solidFill>
-                      <a:prstDash val="solid"/>
-                      <a:round/>
-                      <a:headEnd type="none" w="med" len="med"/>
-                      <a:tailEnd type="none" w="med" len="med"/>
-                    </a:lnL>
-                    <a:lnR w="12700" cap="flat" cmpd="sng" algn="ctr">
-                      <a:solidFill>
-                        <a:srgbClr val="DCE6E9"/>
-                      </a:solidFill>
-                      <a:prstDash val="solid"/>
-                      <a:round/>
-                      <a:headEnd type="none" w="med" len="med"/>
-                      <a:tailEnd type="none" w="med" len="med"/>
-                    </a:lnR>
-                    <a:lnT w="12700" cap="flat" cmpd="sng" algn="ctr">
-                      <a:solidFill>
-                        <a:srgbClr val="DCE6E9"/>
-                      </a:solidFill>
-                      <a:prstDash val="solid"/>
-                      <a:round/>
-                      <a:headEnd type="none" w="med" len="med"/>
-                      <a:tailEnd type="none" w="med" len="med"/>
-                    </a:lnT>
-                    <a:lnB w="12700" cap="flat" cmpd="sng" algn="ctr">
-                      <a:solidFill>
-                        <a:srgbClr val="DCE6E9"/>
-                      </a:solidFill>
-                      <a:prstDash val="solid"/>
-                      <a:round/>
-                      <a:headEnd type="none" w="med" len="med"/>
-                      <a:tailEnd type="none" w="med" len="med"/>
-                    </a:lnB>
-                    <a:solidFill>
-                      <a:srgbClr val="FFFFFF"/>
-                    </a:solidFill>
-                  </a:tcPr>
-                </a:tc>
-                <a:tc>
-                  <a:txBody>
-                    <a:bodyPr/>
-                    <a:lstStyle/>
-                    <a:p>
-                      <a:pPr marL="0" indent="0" algn="ctr">
-                        <a:buNone/>
-                      </a:pPr>
-                      <a:r>
-                        <a:rPr lang="en-US" sz="1200" dirty="0">
-                          <a:solidFill>
-                            <a:srgbClr val="1F2D34"/>
-                          </a:solidFill>
-                          <a:latin typeface="Calibri" pitchFamily="34" charset="0"/>
-                          <a:ea typeface="Calibri" pitchFamily="34" charset="-122"/>
-                          <a:cs typeface="Calibri" pitchFamily="34" charset="-120"/>
-                        </a:rPr>
-                        <a:t>0,855</a:t>
-                      </a:r>
-                      <a:endParaRPr lang="en-US" sz="1200" dirty="0">
-                        <a:latin typeface="Calibri" charset="0"/>
-                        <a:ea typeface="Calibri" charset="0"/>
-                        <a:cs typeface="Calibri" charset="0"/>
-                      </a:endParaRPr>
-                    </a:p>
-                  </a:txBody>
-                  <a:tcPr anchor="ctr">
-                    <a:lnL w="12700" cap="flat" cmpd="sng" algn="ctr">
-                      <a:solidFill>
-                        <a:srgbClr val="DCE6E9"/>
-                      </a:solidFill>
-                      <a:prstDash val="solid"/>
-                      <a:round/>
-                      <a:headEnd type="none" w="med" len="med"/>
-                      <a:tailEnd type="none" w="med" len="med"/>
-                    </a:lnL>
-                    <a:lnR w="12700" cap="flat" cmpd="sng" algn="ctr">
-                      <a:solidFill>
-                        <a:srgbClr val="DCE6E9"/>
-                      </a:solidFill>
-                      <a:prstDash val="solid"/>
-                      <a:round/>
-                      <a:headEnd type="none" w="med" len="med"/>
-                      <a:tailEnd type="none" w="med" len="med"/>
-                    </a:lnR>
-                    <a:lnT w="12700" cap="flat" cmpd="sng" algn="ctr">
-                      <a:solidFill>
-                        <a:srgbClr val="DCE6E9"/>
-                      </a:solidFill>
-                      <a:prstDash val="solid"/>
-                      <a:round/>
-                      <a:headEnd type="none" w="med" len="med"/>
-                      <a:tailEnd type="none" w="med" len="med"/>
-                    </a:lnT>
-                    <a:lnB w="12700" cap="flat" cmpd="sng" algn="ctr">
-                      <a:solidFill>
-                        <a:srgbClr val="DCE6E9"/>
-                      </a:solidFill>
-                      <a:prstDash val="solid"/>
-                      <a:round/>
-                      <a:headEnd type="none" w="med" len="med"/>
-                      <a:tailEnd type="none" w="med" len="med"/>
-                    </a:lnB>
-                    <a:solidFill>
-                      <a:srgbClr val="FFFFFF"/>
-                    </a:solidFill>
-                  </a:tcPr>
-                </a:tc>
-                <a:extLst>
-                  <a:ext uri="{0D108BD9-81ED-4DB2-BD59-A6C34878D82A}">
-                    <a16:rowId xmlns:a16="http://schemas.microsoft.com/office/drawing/2014/main" val="10003"/>
-                  </a:ext>
-                </a:extLst>
-              </a:tr>
-              <a:tr h="475488">
-                <a:tc>
-                  <a:txBody>
-                    <a:bodyPr/>
-                    <a:lstStyle/>
-                    <a:p>
-                      <a:pPr marL="0" indent="0" algn="l" defTabSz="914400" rtl="0" eaLnBrk="1" latinLnBrk="0" hangingPunct="1">
-                        <a:buNone/>
-                      </a:pPr>
-                      <a:r>
-                        <a:rPr lang="en-US" sz="1200" b="1" kern="1200" dirty="0">
-                          <a:solidFill>
-                            <a:srgbClr val="0E7C86"/>
-                          </a:solidFill>
-                          <a:latin typeface="Calibri" pitchFamily="34" charset="0"/>
-                          <a:ea typeface="Calibri" pitchFamily="34" charset="-122"/>
-                          <a:cs typeface="Calibri" pitchFamily="34" charset="-120"/>
-                        </a:rPr>
-                        <a:t>Random Forest</a:t>
-                      </a:r>
-                    </a:p>
-                  </a:txBody>
-                  <a:tcPr anchor="ctr">
-                    <a:lnL w="12700" cap="flat" cmpd="sng" algn="ctr">
-                      <a:solidFill>
-                        <a:srgbClr val="DCE6E9"/>
-                      </a:solidFill>
-                      <a:prstDash val="solid"/>
-                      <a:round/>
-                      <a:headEnd type="none" w="med" len="med"/>
-                      <a:tailEnd type="none" w="med" len="med"/>
-                    </a:lnL>
-                    <a:lnR w="12700" cap="flat" cmpd="sng" algn="ctr">
-                      <a:solidFill>
-                        <a:srgbClr val="DCE6E9"/>
-                      </a:solidFill>
-                      <a:prstDash val="solid"/>
-                      <a:round/>
-                      <a:headEnd type="none" w="med" len="med"/>
-                      <a:tailEnd type="none" w="med" len="med"/>
-                    </a:lnR>
-                    <a:lnT w="12700" cap="flat" cmpd="sng" algn="ctr">
-                      <a:solidFill>
-                        <a:srgbClr val="DCE6E9"/>
-                      </a:solidFill>
-                      <a:prstDash val="solid"/>
-                      <a:round/>
-                      <a:headEnd type="none" w="med" len="med"/>
-                      <a:tailEnd type="none" w="med" len="med"/>
-                    </a:lnT>
-                    <a:lnB w="12700" cap="flat" cmpd="sng" algn="ctr">
-                      <a:solidFill>
-                        <a:srgbClr val="DCE6E9"/>
-                      </a:solidFill>
-                      <a:prstDash val="solid"/>
-                      <a:round/>
-                      <a:headEnd type="none" w="med" len="med"/>
-                      <a:tailEnd type="none" w="med" len="med"/>
-                    </a:lnB>
-                    <a:solidFill>
-                      <a:srgbClr val="FFFFFF"/>
-                    </a:solidFill>
-                  </a:tcPr>
-                </a:tc>
-                <a:tc>
-                  <a:txBody>
-                    <a:bodyPr/>
-                    <a:lstStyle/>
-                    <a:p>
-                      <a:pPr marL="0" indent="0" algn="ctr">
-                        <a:buNone/>
-                      </a:pPr>
-                      <a:r>
-                        <a:rPr lang="en-US" sz="1200" b="1" dirty="0">
-                          <a:solidFill>
-                            <a:srgbClr val="1F2D34"/>
-                          </a:solidFill>
-                          <a:latin typeface="Calibri" pitchFamily="34" charset="0"/>
-                          <a:ea typeface="Calibri" pitchFamily="34" charset="-122"/>
-                          <a:cs typeface="Calibri" pitchFamily="34" charset="-120"/>
-                        </a:rPr>
-                        <a:t>0,698</a:t>
-                      </a:r>
-                      <a:endParaRPr lang="en-US" sz="1200" b="1" dirty="0">
-                        <a:latin typeface="Calibri" charset="0"/>
-                        <a:ea typeface="Calibri" charset="0"/>
-                        <a:cs typeface="Calibri" charset="0"/>
-                      </a:endParaRPr>
-                    </a:p>
-                  </a:txBody>
-                  <a:tcPr anchor="ctr">
-                    <a:lnL w="12700" cap="flat" cmpd="sng" algn="ctr">
-                      <a:solidFill>
-                        <a:srgbClr val="DCE6E9"/>
-                      </a:solidFill>
-                      <a:prstDash val="solid"/>
-                      <a:round/>
-                      <a:headEnd type="none" w="med" len="med"/>
-                      <a:tailEnd type="none" w="med" len="med"/>
-                    </a:lnL>
-                    <a:lnR w="12700" cap="flat" cmpd="sng" algn="ctr">
-                      <a:solidFill>
-                        <a:srgbClr val="DCE6E9"/>
-                      </a:solidFill>
-                      <a:prstDash val="solid"/>
-                      <a:round/>
-                      <a:headEnd type="none" w="med" len="med"/>
-                      <a:tailEnd type="none" w="med" len="med"/>
-                    </a:lnR>
-                    <a:lnT w="12700" cap="flat" cmpd="sng" algn="ctr">
-                      <a:solidFill>
-                        <a:srgbClr val="DCE6E9"/>
-                      </a:solidFill>
-                      <a:prstDash val="solid"/>
-                      <a:round/>
-                      <a:headEnd type="none" w="med" len="med"/>
-                      <a:tailEnd type="none" w="med" len="med"/>
-                    </a:lnT>
-                    <a:lnB w="12700" cap="flat" cmpd="sng" algn="ctr">
-                      <a:solidFill>
-                        <a:srgbClr val="DCE6E9"/>
-                      </a:solidFill>
-                      <a:prstDash val="solid"/>
-                      <a:round/>
-                      <a:headEnd type="none" w="med" len="med"/>
-                      <a:tailEnd type="none" w="med" len="med"/>
-                    </a:lnB>
-                    <a:solidFill>
-                      <a:srgbClr val="FFFFFF"/>
-                    </a:solidFill>
-                  </a:tcPr>
-                </a:tc>
-                <a:tc>
-                  <a:txBody>
-                    <a:bodyPr/>
-                    <a:lstStyle/>
-                    <a:p>
-                      <a:pPr marL="0" indent="0" algn="ctr">
-                        <a:buNone/>
-                      </a:pPr>
-                      <a:r>
-                        <a:rPr lang="en-US" sz="1200" b="0" dirty="0">
-                          <a:solidFill>
-                            <a:srgbClr val="1F2D34"/>
-                          </a:solidFill>
-                          <a:latin typeface="Calibri" pitchFamily="34" charset="0"/>
-                          <a:ea typeface="Calibri" pitchFamily="34" charset="-122"/>
-                          <a:cs typeface="Calibri" pitchFamily="34" charset="-120"/>
-                        </a:rPr>
-                        <a:t>0,707</a:t>
-                      </a:r>
-                      <a:endParaRPr lang="en-US" sz="1200" b="0" dirty="0">
-                        <a:latin typeface="Calibri" charset="0"/>
-                        <a:ea typeface="Calibri" charset="0"/>
-                        <a:cs typeface="Calibri" charset="0"/>
-                      </a:endParaRPr>
-                    </a:p>
-                  </a:txBody>
-                  <a:tcPr anchor="ctr">
-                    <a:lnL w="12700" cap="flat" cmpd="sng" algn="ctr">
-                      <a:solidFill>
-                        <a:srgbClr val="DCE6E9"/>
-                      </a:solidFill>
-                      <a:prstDash val="solid"/>
-                      <a:round/>
-                      <a:headEnd type="none" w="med" len="med"/>
-                      <a:tailEnd type="none" w="med" len="med"/>
-                    </a:lnL>
-                    <a:lnR w="12700" cap="flat" cmpd="sng" algn="ctr">
-                      <a:solidFill>
-                        <a:srgbClr val="DCE6E9"/>
-                      </a:solidFill>
-                      <a:prstDash val="solid"/>
-                      <a:round/>
-                      <a:headEnd type="none" w="med" len="med"/>
-                      <a:tailEnd type="none" w="med" len="med"/>
-                    </a:lnR>
-                    <a:lnT w="12700" cap="flat" cmpd="sng" algn="ctr">
-                      <a:solidFill>
-                        <a:srgbClr val="DCE6E9"/>
-                      </a:solidFill>
-                      <a:prstDash val="solid"/>
-                      <a:round/>
-                      <a:headEnd type="none" w="med" len="med"/>
-                      <a:tailEnd type="none" w="med" len="med"/>
-                    </a:lnT>
-                    <a:lnB w="12700" cap="flat" cmpd="sng" algn="ctr">
-                      <a:solidFill>
-                        <a:srgbClr val="DCE6E9"/>
-                      </a:solidFill>
-                      <a:prstDash val="solid"/>
-                      <a:round/>
-                      <a:headEnd type="none" w="med" len="med"/>
-                      <a:tailEnd type="none" w="med" len="med"/>
-                    </a:lnB>
-                    <a:solidFill>
-                      <a:srgbClr val="FFFFFF"/>
-                    </a:solidFill>
-                  </a:tcPr>
-                </a:tc>
-                <a:tc>
-                  <a:txBody>
-                    <a:bodyPr/>
-                    <a:lstStyle/>
-                    <a:p>
-                      <a:pPr marL="0" indent="0" algn="ctr">
-                        <a:buNone/>
-                      </a:pPr>
-                      <a:r>
-                        <a:rPr lang="en-US" sz="1200" b="1" dirty="0">
-                          <a:solidFill>
-                            <a:srgbClr val="1F2D34"/>
-                          </a:solidFill>
-                          <a:latin typeface="Calibri" pitchFamily="34" charset="0"/>
-                          <a:ea typeface="Calibri" pitchFamily="34" charset="-122"/>
-                          <a:cs typeface="Calibri" pitchFamily="34" charset="-120"/>
-                        </a:rPr>
-                        <a:t>0,662</a:t>
-                      </a:r>
-                      <a:endParaRPr lang="en-US" sz="1200" dirty="0">
-                        <a:latin typeface="Calibri" charset="0"/>
-                        <a:ea typeface="Calibri" charset="0"/>
-                        <a:cs typeface="Calibri" charset="0"/>
-                      </a:endParaRPr>
-                    </a:p>
-                  </a:txBody>
-                  <a:tcPr anchor="ctr">
-                    <a:lnL w="12700" cap="flat" cmpd="sng" algn="ctr">
-                      <a:solidFill>
-                        <a:srgbClr val="DCE6E9"/>
-                      </a:solidFill>
-                      <a:prstDash val="solid"/>
-                      <a:round/>
-                      <a:headEnd type="none" w="med" len="med"/>
-                      <a:tailEnd type="none" w="med" len="med"/>
-                    </a:lnL>
-                    <a:lnR w="12700" cap="flat" cmpd="sng" algn="ctr">
-                      <a:solidFill>
-                        <a:srgbClr val="DCE6E9"/>
-                      </a:solidFill>
-                      <a:prstDash val="solid"/>
-                      <a:round/>
-                      <a:headEnd type="none" w="med" len="med"/>
-                      <a:tailEnd type="none" w="med" len="med"/>
-                    </a:lnR>
-                    <a:lnT w="12700" cap="flat" cmpd="sng" algn="ctr">
-                      <a:solidFill>
-                        <a:srgbClr val="DCE6E9"/>
-                      </a:solidFill>
-                      <a:prstDash val="solid"/>
-                      <a:round/>
-                      <a:headEnd type="none" w="med" len="med"/>
-                      <a:tailEnd type="none" w="med" len="med"/>
-                    </a:lnT>
-                    <a:lnB w="12700" cap="flat" cmpd="sng" algn="ctr">
-                      <a:solidFill>
-                        <a:srgbClr val="DCE6E9"/>
-                      </a:solidFill>
-                      <a:prstDash val="solid"/>
-                      <a:round/>
-                      <a:headEnd type="none" w="med" len="med"/>
-                      <a:tailEnd type="none" w="med" len="med"/>
-                    </a:lnB>
-                    <a:solidFill>
-                      <a:srgbClr val="FFFFFF"/>
-                    </a:solidFill>
-                  </a:tcPr>
-                </a:tc>
-                <a:tc>
-                  <a:txBody>
-                    <a:bodyPr/>
-                    <a:lstStyle/>
-                    <a:p>
-                      <a:pPr marL="0" indent="0" algn="ctr">
-                        <a:buNone/>
-                      </a:pPr>
-                      <a:r>
-                        <a:rPr lang="en-US" sz="1200" b="1" dirty="0">
-                          <a:solidFill>
-                            <a:srgbClr val="1F2D34"/>
-                          </a:solidFill>
-                          <a:latin typeface="Calibri" pitchFamily="34" charset="0"/>
-                          <a:ea typeface="Calibri" pitchFamily="34" charset="-122"/>
-                          <a:cs typeface="Calibri" pitchFamily="34" charset="-120"/>
-                        </a:rPr>
-                        <a:t>0,768</a:t>
-                      </a:r>
-                      <a:endParaRPr lang="en-US" sz="1200" dirty="0">
-                        <a:latin typeface="Calibri" charset="0"/>
-                        <a:ea typeface="Calibri" charset="0"/>
-                        <a:cs typeface="Calibri" charset="0"/>
-                      </a:endParaRPr>
-                    </a:p>
-                  </a:txBody>
-                  <a:tcPr anchor="ctr">
-                    <a:lnL w="12700" cap="flat" cmpd="sng" algn="ctr">
-                      <a:solidFill>
-                        <a:srgbClr val="DCE6E9"/>
-                      </a:solidFill>
-                      <a:prstDash val="solid"/>
-                      <a:round/>
-                      <a:headEnd type="none" w="med" len="med"/>
-                      <a:tailEnd type="none" w="med" len="med"/>
-                    </a:lnL>
-                    <a:lnR w="12700" cap="flat" cmpd="sng" algn="ctr">
-                      <a:solidFill>
-                        <a:srgbClr val="DCE6E9"/>
-                      </a:solidFill>
-                      <a:prstDash val="solid"/>
-                      <a:round/>
-                      <a:headEnd type="none" w="med" len="med"/>
-                      <a:tailEnd type="none" w="med" len="med"/>
-                    </a:lnR>
-                    <a:lnT w="12700" cap="flat" cmpd="sng" algn="ctr">
-                      <a:solidFill>
-                        <a:srgbClr val="DCE6E9"/>
-                      </a:solidFill>
-                      <a:prstDash val="solid"/>
-                      <a:round/>
-                      <a:headEnd type="none" w="med" len="med"/>
-                      <a:tailEnd type="none" w="med" len="med"/>
-                    </a:lnT>
-                    <a:lnB w="12700" cap="flat" cmpd="sng" algn="ctr">
-                      <a:solidFill>
-                        <a:srgbClr val="DCE6E9"/>
-                      </a:solidFill>
-                      <a:prstDash val="solid"/>
-                      <a:round/>
-                      <a:headEnd type="none" w="med" len="med"/>
-                      <a:tailEnd type="none" w="med" len="med"/>
-                    </a:lnB>
-                    <a:solidFill>
-                      <a:srgbClr val="FFFFFF"/>
-                    </a:solidFill>
-                  </a:tcPr>
-                </a:tc>
-                <a:tc>
-                  <a:txBody>
-                    <a:bodyPr/>
-                    <a:lstStyle/>
-                    <a:p>
-                      <a:pPr marL="0" indent="0" algn="ctr">
-                        <a:buNone/>
-                      </a:pPr>
-                      <a:r>
-                        <a:rPr lang="en-US" sz="1200" b="1" dirty="0">
-                          <a:solidFill>
-                            <a:srgbClr val="1F2D34"/>
-                          </a:solidFill>
-                          <a:latin typeface="Calibri" pitchFamily="34" charset="0"/>
-                          <a:ea typeface="Calibri" pitchFamily="34" charset="-122"/>
-                          <a:cs typeface="Calibri" pitchFamily="34" charset="-120"/>
-                        </a:rPr>
-                        <a:t>0,936</a:t>
-                      </a:r>
-                      <a:endParaRPr lang="en-US" sz="1200" dirty="0">
-                        <a:latin typeface="Calibri" charset="0"/>
-                        <a:ea typeface="Calibri" charset="0"/>
-                        <a:cs typeface="Calibri" charset="0"/>
-                      </a:endParaRPr>
-                    </a:p>
-                  </a:txBody>
-                  <a:tcPr anchor="ctr">
-                    <a:lnL w="12700" cap="flat" cmpd="sng" algn="ctr">
-                      <a:solidFill>
-                        <a:srgbClr val="DCE6E9"/>
-                      </a:solidFill>
-                      <a:prstDash val="solid"/>
-                      <a:round/>
-                      <a:headEnd type="none" w="med" len="med"/>
-                      <a:tailEnd type="none" w="med" len="med"/>
-                    </a:lnL>
-                    <a:lnR w="12700" cap="flat" cmpd="sng" algn="ctr">
-                      <a:solidFill>
-                        <a:srgbClr val="DCE6E9"/>
-                      </a:solidFill>
-                      <a:prstDash val="solid"/>
-                      <a:round/>
-                      <a:headEnd type="none" w="med" len="med"/>
-                      <a:tailEnd type="none" w="med" len="med"/>
-                    </a:lnR>
-                    <a:lnT w="12700" cap="flat" cmpd="sng" algn="ctr">
-                      <a:solidFill>
-                        <a:srgbClr val="DCE6E9"/>
-                      </a:solidFill>
-                      <a:prstDash val="solid"/>
-                      <a:round/>
-                      <a:headEnd type="none" w="med" len="med"/>
-                      <a:tailEnd type="none" w="med" len="med"/>
-                    </a:lnT>
-                    <a:lnB w="12700" cap="flat" cmpd="sng" algn="ctr">
-                      <a:solidFill>
-                        <a:srgbClr val="DCE6E9"/>
-                      </a:solidFill>
-                      <a:prstDash val="solid"/>
-                      <a:round/>
-                      <a:headEnd type="none" w="med" len="med"/>
-                      <a:tailEnd type="none" w="med" len="med"/>
-                    </a:lnB>
-                    <a:solidFill>
-                      <a:srgbClr val="FFFFFF"/>
-                    </a:solidFill>
-                  </a:tcPr>
-                </a:tc>
-                <a:extLst>
-                  <a:ext uri="{0D108BD9-81ED-4DB2-BD59-A6C34878D82A}">
-                    <a16:rowId xmlns:a16="http://schemas.microsoft.com/office/drawing/2014/main" val="10004"/>
-                  </a:ext>
-                </a:extLst>
-              </a:tr>
-            </a:tbl>
-          </a:graphicData>
-        </a:graphic>
-      </p:graphicFrame>
-      <p:pic>
-        <p:nvPicPr>
-          <p:cNvPr id="9" name="Image 0" descr="C:\Users\ftamaki\Documents\ITBA\1C2026\IA\TP_IA_aplicada_a_negocios_churn_Grupo1\reports\figures\final_model_comparison_cv.png"/>
-          <p:cNvPicPr>
-            <a:picLocks noChangeAspect="1"/>
-          </p:cNvPicPr>
-          <p:nvPr/>
-        </p:nvPicPr>
-        <p:blipFill>
-          <a:blip r:embed="rId3"/>
-          <a:stretch>
-            <a:fillRect/>
-          </a:stretch>
-        </p:blipFill>
-        <p:spPr>
-          <a:xfrm>
-            <a:off x="6860061" y="1737360"/>
-            <a:ext cx="4275270" cy="3291840"/>
-          </a:xfrm>
-          <a:prstGeom prst="rect">
-            <a:avLst/>
-          </a:prstGeom>
-        </p:spPr>
-      </p:pic>
-      <p:sp>
-        <p:nvSpPr>
-          <p:cNvPr id="10" name="Shape 6"/>
-          <p:cNvSpPr/>
-          <p:nvPr/>
-        </p:nvSpPr>
-        <p:spPr>
-          <a:xfrm>
-            <a:off x="548640" y="4343400"/>
-            <a:ext cx="5486400" cy="914400"/>
-          </a:xfrm>
-          <a:prstGeom prst="rect">
-            <a:avLst/>
-          </a:prstGeom>
-          <a:solidFill>
-            <a:srgbClr val="FFFFFF"/>
-          </a:solidFill>
-          <a:ln w="12700">
-            <a:solidFill>
-              <a:srgbClr val="DCE6E9"/>
-            </a:solidFill>
-            <a:prstDash val="solid"/>
-          </a:ln>
-          <a:effectLst>
-            <a:outerShdw blurRad="114300" dist="38100" dir="5400000" algn="bl" rotWithShape="0">
-              <a:srgbClr val="0E2A38">
-                <a:alpha val="13000"/>
-              </a:srgbClr>
-            </a:outerShdw>
-          </a:effectLst>
-        </p:spPr>
-        <p:txBody>
-          <a:bodyPr/>
-          <a:lstStyle/>
-          <a:p>
-            <a:endParaRPr/>
-          </a:p>
-        </p:txBody>
-      </p:sp>
-      <p:sp>
-        <p:nvSpPr>
-          <p:cNvPr id="11" name="Text 7"/>
-          <p:cNvSpPr/>
-          <p:nvPr/>
-        </p:nvSpPr>
-        <p:spPr>
-          <a:xfrm>
-            <a:off x="822960" y="4343400"/>
-            <a:ext cx="5074920" cy="914400"/>
-          </a:xfrm>
-          <a:prstGeom prst="rect">
-            <a:avLst/>
-          </a:prstGeom>
-          <a:noFill/>
-          <a:ln/>
-        </p:spPr>
-        <p:txBody>
-          <a:bodyPr wrap="square" lIns="0" tIns="0" rIns="0" bIns="0" rtlCol="0" anchor="ctr"/>
-          <a:lstStyle/>
-          <a:p>
-            <a:pPr marL="0" indent="0">
-              <a:buNone/>
-            </a:pPr>
-            <a:r>
-              <a:rPr lang="en-US" sz="1150" b="1" dirty="0">
-                <a:solidFill>
-                  <a:srgbClr val="0E7C86"/>
-                </a:solidFill>
-                <a:latin typeface="Calibri" pitchFamily="34" charset="0"/>
-                <a:ea typeface="Calibri" pitchFamily="34" charset="-122"/>
-                <a:cs typeface="Calibri" pitchFamily="34" charset="-120"/>
-              </a:rPr>
-              <a:t>Seleccion   </a:t>
-            </a:r>
-            <a:r>
-              <a:rPr lang="en-US" sz="1150" dirty="0">
-                <a:solidFill>
-                  <a:srgbClr val="1F2D34"/>
-                </a:solidFill>
-                <a:latin typeface="Calibri" pitchFamily="34" charset="0"/>
-                <a:ea typeface="Calibri" pitchFamily="34" charset="-122"/>
-                <a:cs typeface="Calibri" pitchFamily="34" charset="-120"/>
-              </a:rPr>
-              <a:t>Random Forest tuneado. Criterio primario F2 (el mas alto fuera de fold). A igual recall genera la mitad de falsas alertas que la logistica. La logistica queda como baseline interpretable.</a:t>
-            </a:r>
-            <a:endParaRPr lang="en-US" sz="1150" dirty="0"/>
-          </a:p>
-        </p:txBody>
-      </p:sp>
-    </p:spTree>
-  </p:cSld>
-  <p:clrMapOvr>
-    <a:masterClrMapping/>
-  </p:clrMapOvr>
-</p:sld>
-</file>
-
-<file path=ppt/slides/slide11.xml><?xml version="1.0" encoding="utf-8"?>
-<p:sld xmlns:a="http://schemas.openxmlformats.org/drawingml/2006/main" xmlns:r="http://schemas.openxmlformats.org/officeDocument/2006/relationships" xmlns:p="http://schemas.openxmlformats.org/presentationml/2006/main">
   <p:cSld name="Slide 14">
     <p:bg>
       <p:bgPr>
@@ -4940,13 +2364,22 @@
               <a:buNone/>
             </a:pPr>
             <a:r>
-              <a:rPr sz="1800" b="1">
+              <a:rPr lang="es-AR" b="1" dirty="0">
                 <a:solidFill>
                   <a:srgbClr val="FFFFFF"/>
                 </a:solidFill>
                 <a:latin typeface="Trebuchet MS"/>
               </a:rPr>
-              <a:t>10</a:t>
+              <a:t>0</a:t>
+            </a:r>
+            <a:r>
+              <a:rPr lang="en-US" b="1" dirty="0">
+                <a:solidFill>
+                  <a:srgbClr val="FFFFFF"/>
+                </a:solidFill>
+                <a:latin typeface="Trebuchet MS"/>
+              </a:rPr>
+              <a:t>9</a:t>
             </a:r>
             <a:endParaRPr lang="en-US" sz="1800" dirty="0"/>
           </a:p>
@@ -5024,7 +2457,29 @@
                 <a:ea typeface="Trebuchet MS" pitchFamily="34" charset="-122"/>
                 <a:cs typeface="Trebuchet MS" pitchFamily="34" charset="-120"/>
               </a:rPr>
-              <a:t>Umbral elegido OOF, congelado antes de test</a:t>
+              <a:t>Umbral </a:t>
+            </a:r>
+            <a:r>
+              <a:rPr lang="en-US" sz="2700" b="1" dirty="0" err="1">
+                <a:solidFill>
+                  <a:srgbClr val="1F2D34"/>
+                </a:solidFill>
+                <a:latin typeface="Trebuchet MS" pitchFamily="34" charset="0"/>
+                <a:ea typeface="Trebuchet MS" pitchFamily="34" charset="-122"/>
+                <a:cs typeface="Trebuchet MS" pitchFamily="34" charset="-120"/>
+              </a:rPr>
+              <a:t>elegido</a:t>
+            </a:r>
+            <a:r>
+              <a:rPr lang="en-US" sz="2700" b="1" dirty="0">
+                <a:solidFill>
+                  <a:srgbClr val="1F2D34"/>
+                </a:solidFill>
+                <a:latin typeface="Trebuchet MS" pitchFamily="34" charset="0"/>
+                <a:ea typeface="Trebuchet MS" pitchFamily="34" charset="-122"/>
+                <a:cs typeface="Trebuchet MS" pitchFamily="34" charset="-120"/>
+              </a:rPr>
+              <a:t> 0,27, congelado antes de test</a:t>
             </a:r>
             <a:endParaRPr lang="en-US" sz="2700" dirty="0"/>
           </a:p>
@@ -7817,7 +5272,7 @@
 </p:sld>
 </file>
 
-<file path=ppt/slides/slide12.xml><?xml version="1.0" encoding="utf-8"?>
+<file path=ppt/slides/slide11.xml><?xml version="1.0" encoding="utf-8"?>
 <p:sld xmlns:a="http://schemas.openxmlformats.org/drawingml/2006/main" xmlns:r="http://schemas.openxmlformats.org/officeDocument/2006/relationships" xmlns:p="http://schemas.openxmlformats.org/presentationml/2006/main">
   <p:cSld name="Slide 15">
     <p:bg>
@@ -7896,13 +5351,22 @@
               <a:buNone/>
             </a:pPr>
             <a:r>
-              <a:rPr sz="1800" b="1">
+              <a:rPr sz="1800" b="1" dirty="0">
                 <a:solidFill>
                   <a:srgbClr val="FFFFFF"/>
                 </a:solidFill>
                 <a:latin typeface="Trebuchet MS"/>
               </a:rPr>
-              <a:t>11</a:t>
+              <a:t>1</a:t>
+            </a:r>
+            <a:r>
+              <a:rPr lang="es-AR" sz="1800" b="1" dirty="0">
+                <a:solidFill>
+                  <a:srgbClr val="FFFFFF"/>
+                </a:solidFill>
+                <a:latin typeface="Trebuchet MS"/>
+              </a:rPr>
+              <a:t>0</a:t>
             </a:r>
             <a:endParaRPr lang="en-US" sz="1800" dirty="0"/>
           </a:p>
@@ -8328,7 +5792,7 @@
 </p:sld>
 </file>
 
-<file path=ppt/slides/slide13.xml><?xml version="1.0" encoding="utf-8"?>
+<file path=ppt/slides/slide12.xml><?xml version="1.0" encoding="utf-8"?>
 <p:sld xmlns:a="http://schemas.openxmlformats.org/drawingml/2006/main" xmlns:r="http://schemas.openxmlformats.org/officeDocument/2006/relationships" xmlns:p="http://schemas.openxmlformats.org/presentationml/2006/main">
   <p:cSld name="Slide 16">
     <p:bg>
@@ -10066,7 +7530,7 @@
               <a:buNone/>
             </a:pPr>
             <a:r>
-              <a:rPr lang="en-US" sz="1200" b="1" dirty="0">
+              <a:rPr lang="en-US" sz="1200" b="1" dirty="0" err="1">
                 <a:solidFill>
                   <a:srgbClr val="1F2D34"/>
                 </a:solidFill>
@@ -10074,7 +7538,18 @@
                 <a:ea typeface="Calibri" pitchFamily="34" charset="-122"/>
                 <a:cs typeface="Calibri" pitchFamily="34" charset="-120"/>
               </a:rPr>
-              <a:t>Numericas continuas  </a:t>
+              <a:t>Numéricas</a:t>
+            </a:r>
+            <a:r>
+              <a:rPr lang="en-US" sz="1200" b="1" dirty="0">
+                <a:solidFill>
+                  <a:srgbClr val="1F2D34"/>
+                </a:solidFill>
+                <a:latin typeface="Calibri" pitchFamily="34" charset="0"/>
+                <a:ea typeface="Calibri" pitchFamily="34" charset="-122"/>
+                <a:cs typeface="Calibri" pitchFamily="34" charset="-120"/>
+              </a:rPr>
+              <a:t> continuas  </a:t>
             </a:r>
             <a:r>
               <a:rPr lang="en-US" sz="1050" dirty="0">
@@ -10143,7 +7618,7 @@
               <a:buNone/>
             </a:pPr>
             <a:r>
-              <a:rPr lang="en-US" sz="1200" b="1" dirty="0">
+              <a:rPr lang="en-US" sz="1200" b="1" dirty="0" err="1">
                 <a:solidFill>
                   <a:srgbClr val="1F2D34"/>
                 </a:solidFill>
@@ -10151,7 +7626,18 @@
                 <a:ea typeface="Calibri" pitchFamily="34" charset="-122"/>
                 <a:cs typeface="Calibri" pitchFamily="34" charset="-120"/>
               </a:rPr>
-              <a:t>Numericas discretas / ordinales  </a:t>
+              <a:t>Numéricas</a:t>
+            </a:r>
+            <a:r>
+              <a:rPr lang="en-US" sz="1200" b="1" dirty="0">
+                <a:solidFill>
+                  <a:srgbClr val="1F2D34"/>
+                </a:solidFill>
+                <a:latin typeface="Calibri" pitchFamily="34" charset="0"/>
+                <a:ea typeface="Calibri" pitchFamily="34" charset="-122"/>
+                <a:cs typeface="Calibri" pitchFamily="34" charset="-120"/>
+              </a:rPr>
+              <a:t> discretas / ordinales  </a:t>
             </a:r>
             <a:r>
               <a:rPr lang="en-US" sz="1050" dirty="0">
@@ -10220,7 +7706,7 @@
               <a:buNone/>
             </a:pPr>
             <a:r>
-              <a:rPr lang="en-US" sz="1200" b="1" dirty="0">
+              <a:rPr lang="en-US" sz="1200" b="1" dirty="0" err="1">
                 <a:solidFill>
                   <a:srgbClr val="1F2D34"/>
                 </a:solidFill>
@@ -10228,7 +7714,18 @@
                 <a:ea typeface="Calibri" pitchFamily="34" charset="-122"/>
                 <a:cs typeface="Calibri" pitchFamily="34" charset="-120"/>
               </a:rPr>
-              <a:t>Categoricas nominales  </a:t>
+              <a:t>Categóricas</a:t>
+            </a:r>
+            <a:r>
+              <a:rPr lang="en-US" sz="1200" b="1" dirty="0">
+                <a:solidFill>
+                  <a:srgbClr val="1F2D34"/>
+                </a:solidFill>
+                <a:latin typeface="Calibri" pitchFamily="34" charset="0"/>
+                <a:ea typeface="Calibri" pitchFamily="34" charset="-122"/>
+                <a:cs typeface="Calibri" pitchFamily="34" charset="-120"/>
+              </a:rPr>
+              <a:t> nominales  </a:t>
             </a:r>
             <a:r>
               <a:rPr lang="en-US" sz="1050" dirty="0">
@@ -10357,230 +7854,20 @@
       </p:grpSpPr>
       <p:sp>
         <p:nvSpPr>
-          <p:cNvPr id="2" name="Shape 0"/>
+          <p:cNvPr id="50" name="Rectangle 49">
+            <a:extLst>
+              <a:ext uri="{FF2B5EF4-FFF2-40B4-BE49-F238E27FC236}">
+                <a16:creationId xmlns:a16="http://schemas.microsoft.com/office/drawing/2014/main" id="{E65C2A4B-A6AB-A58B-4423-E08BAA683B9D}"/>
+              </a:ext>
+            </a:extLst>
+          </p:cNvPr>
           <p:cNvSpPr/>
           <p:nvPr/>
         </p:nvSpPr>
         <p:spPr>
           <a:xfrm>
-            <a:off x="548640" y="457200"/>
-            <a:ext cx="566928" cy="566928"/>
-          </a:xfrm>
-          <a:prstGeom prst="roundRect">
-            <a:avLst>
-              <a:gd name="adj" fmla="val 16129"/>
-            </a:avLst>
-          </a:prstGeom>
-          <a:solidFill>
-            <a:srgbClr val="0E7C86"/>
-          </a:solidFill>
-          <a:ln/>
-        </p:spPr>
-        <p:txBody>
-          <a:bodyPr/>
-          <a:lstStyle/>
-          <a:p>
-            <a:endParaRPr/>
-          </a:p>
-        </p:txBody>
-      </p:sp>
-      <p:sp>
-        <p:nvSpPr>
-          <p:cNvPr id="3" name="Text 1"/>
-          <p:cNvSpPr/>
-          <p:nvPr/>
-        </p:nvSpPr>
-        <p:spPr>
-          <a:xfrm>
-            <a:off x="548640" y="457200"/>
-            <a:ext cx="566928" cy="566928"/>
-          </a:xfrm>
-          <a:prstGeom prst="rect">
-            <a:avLst/>
-          </a:prstGeom>
-          <a:noFill/>
-          <a:ln/>
-        </p:spPr>
-        <p:txBody>
-          <a:bodyPr wrap="square" lIns="0" tIns="0" rIns="0" bIns="0" rtlCol="0" anchor="ctr"/>
-          <a:lstStyle/>
-          <a:p>
-            <a:pPr marL="0" indent="0" algn="ctr">
-              <a:buNone/>
-            </a:pPr>
-            <a:r>
-              <a:rPr sz="1800" b="1">
-                <a:solidFill>
-                  <a:srgbClr val="FFFFFF"/>
-                </a:solidFill>
-                <a:latin typeface="Trebuchet MS"/>
-              </a:rPr>
-              <a:t>02</a:t>
-            </a:r>
-            <a:endParaRPr lang="en-US" sz="1800" dirty="0"/>
-          </a:p>
-        </p:txBody>
-      </p:sp>
-      <p:sp>
-        <p:nvSpPr>
-          <p:cNvPr id="4" name="Text 2"/>
-          <p:cNvSpPr/>
-          <p:nvPr/>
-        </p:nvSpPr>
-        <p:spPr>
-          <a:xfrm>
-            <a:off x="1280160" y="457200"/>
-            <a:ext cx="9144000" cy="256032"/>
-          </a:xfrm>
-          <a:prstGeom prst="rect">
-            <a:avLst/>
-          </a:prstGeom>
-          <a:noFill/>
-          <a:ln/>
-        </p:spPr>
-        <p:txBody>
-          <a:bodyPr wrap="square" lIns="0" tIns="0" rIns="0" bIns="0" rtlCol="0" anchor="ctr"/>
-          <a:lstStyle/>
-          <a:p>
-            <a:pPr marL="0" indent="0">
-              <a:buNone/>
-            </a:pPr>
-            <a:r>
-              <a:rPr sz="1150" b="1">
-                <a:solidFill>
-                  <a:srgbClr val="0E7C86"/>
-                </a:solidFill>
-                <a:latin typeface="Trebuchet MS"/>
-              </a:rPr>
-              <a:t>AUDITORIA DE CALIDAD E IMPUTACION</a:t>
-            </a:r>
-            <a:endParaRPr lang="en-US" sz="1150" dirty="0"/>
-          </a:p>
-        </p:txBody>
-      </p:sp>
-      <p:sp>
-        <p:nvSpPr>
-          <p:cNvPr id="5" name="Text 3"/>
-          <p:cNvSpPr/>
-          <p:nvPr/>
-        </p:nvSpPr>
-        <p:spPr>
-          <a:xfrm>
-            <a:off x="1280160" y="694944"/>
-            <a:ext cx="10362895" cy="566928"/>
-          </a:xfrm>
-          <a:prstGeom prst="rect">
-            <a:avLst/>
-          </a:prstGeom>
-          <a:noFill/>
-          <a:ln/>
-        </p:spPr>
-        <p:txBody>
-          <a:bodyPr wrap="square" lIns="0" tIns="0" rIns="0" bIns="0" rtlCol="0" anchor="ctr"/>
-          <a:lstStyle/>
-          <a:p>
-            <a:pPr marL="0" indent="0">
-              <a:buNone/>
-            </a:pPr>
-            <a:r>
-              <a:rPr sz="2600" b="1">
-                <a:solidFill>
-                  <a:srgbClr val="1F2D34"/>
-                </a:solidFill>
-                <a:latin typeface="Trebuchet MS"/>
-              </a:rPr>
-              <a:t>Nulos, duplicados, categorias equivalentes e imputacion</a:t>
-            </a:r>
-            <a:endParaRPr lang="en-US" sz="2700" dirty="0"/>
-          </a:p>
-        </p:txBody>
-      </p:sp>
-      <p:sp>
-        <p:nvSpPr>
-          <p:cNvPr id="6" name="Text 4"/>
-          <p:cNvSpPr/>
-          <p:nvPr/>
-        </p:nvSpPr>
-        <p:spPr>
-          <a:xfrm>
-            <a:off x="548640" y="6473952"/>
-            <a:ext cx="7315200" cy="274320"/>
-          </a:xfrm>
-          <a:prstGeom prst="rect">
-            <a:avLst/>
-          </a:prstGeom>
-          <a:noFill/>
-          <a:ln/>
-        </p:spPr>
-        <p:txBody>
-          <a:bodyPr wrap="square" lIns="0" tIns="0" rIns="0" bIns="0" rtlCol="0" anchor="ctr"/>
-          <a:lstStyle/>
-          <a:p>
-            <a:pPr marL="0" indent="0">
-              <a:buNone/>
-            </a:pPr>
-            <a:r>
-              <a:rPr lang="en-US" sz="900" dirty="0">
-                <a:solidFill>
-                  <a:srgbClr val="6A7A82"/>
-                </a:solidFill>
-                <a:latin typeface="Calibri" pitchFamily="34" charset="0"/>
-                <a:ea typeface="Calibri" pitchFamily="34" charset="-122"/>
-                <a:cs typeface="Calibri" pitchFamily="34" charset="-120"/>
-              </a:rPr>
-              <a:t>Pipeline de clasificacion de churn  ·  Grupo 1</a:t>
-            </a:r>
-            <a:endParaRPr lang="en-US" sz="900" dirty="0"/>
-          </a:p>
-        </p:txBody>
-      </p:sp>
-      <p:sp>
-        <p:nvSpPr>
-          <p:cNvPr id="7" name="Text 5"/>
-          <p:cNvSpPr/>
-          <p:nvPr/>
-        </p:nvSpPr>
-        <p:spPr>
-          <a:xfrm>
-            <a:off x="10545775" y="6473952"/>
-            <a:ext cx="1097280" cy="274320"/>
-          </a:xfrm>
-          <a:prstGeom prst="rect">
-            <a:avLst/>
-          </a:prstGeom>
-          <a:noFill/>
-          <a:ln/>
-        </p:spPr>
-        <p:txBody>
-          <a:bodyPr wrap="square" lIns="0" tIns="0" rIns="0" bIns="0" rtlCol="0" anchor="ctr"/>
-          <a:lstStyle/>
-          <a:p>
-            <a:pPr marL="0" indent="0" algn="r">
-              <a:buNone/>
-            </a:pPr>
-            <a:r>
-              <a:rPr sz="900">
-                <a:solidFill>
-                  <a:srgbClr val="6A7A82"/>
-                </a:solidFill>
-                <a:latin typeface="Calibri"/>
-              </a:rPr>
-              <a:t>2 / 11</a:t>
-            </a:r>
-            <a:endParaRPr lang="en-US" sz="900" dirty="0"/>
-          </a:p>
-        </p:txBody>
-      </p:sp>
-      <p:sp>
-        <p:nvSpPr>
-          <p:cNvPr id="8" name="Rectangle 7"/>
-          <p:cNvSpPr/>
-          <p:nvPr/>
-        </p:nvSpPr>
-        <p:spPr>
-          <a:xfrm>
-            <a:off x="548640" y="1417320"/>
-            <a:ext cx="2423160" cy="987552"/>
+            <a:off x="8054959" y="1426464"/>
+            <a:ext cx="1673352" cy="987552"/>
           </a:xfrm>
           <a:prstGeom prst="rect">
             <a:avLst/>
@@ -10613,124 +7900,370 @@
           <a:lstStyle/>
           <a:p>
             <a:pPr algn="ctr"/>
+            <a:endParaRPr dirty="0"/>
+          </a:p>
+        </p:txBody>
+      </p:sp>
+      <p:sp>
+        <p:nvSpPr>
+          <p:cNvPr id="2" name="Shape 0"/>
+          <p:cNvSpPr/>
+          <p:nvPr/>
+        </p:nvSpPr>
+        <p:spPr>
+          <a:xfrm>
+            <a:off x="548640" y="457200"/>
+            <a:ext cx="566928" cy="566928"/>
+          </a:xfrm>
+          <a:prstGeom prst="roundRect">
+            <a:avLst>
+              <a:gd name="adj" fmla="val 16129"/>
+            </a:avLst>
+          </a:prstGeom>
+          <a:solidFill>
+            <a:srgbClr val="0E7C86"/>
+          </a:solidFill>
+          <a:ln/>
+        </p:spPr>
+        <p:txBody>
+          <a:bodyPr/>
+          <a:lstStyle/>
+          <a:p>
             <a:endParaRPr/>
           </a:p>
         </p:txBody>
       </p:sp>
       <p:sp>
         <p:nvSpPr>
-          <p:cNvPr id="9" name="TextBox 8"/>
-          <p:cNvSpPr txBox="1"/>
-          <p:nvPr/>
-        </p:nvSpPr>
-        <p:spPr>
-          <a:xfrm>
-            <a:off x="548640" y="1563624"/>
-            <a:ext cx="2423160" cy="384048"/>
+          <p:cNvPr id="3" name="Text 1"/>
+          <p:cNvSpPr/>
+          <p:nvPr/>
+        </p:nvSpPr>
+        <p:spPr>
+          <a:xfrm>
+            <a:off x="548640" y="457200"/>
+            <a:ext cx="566928" cy="566928"/>
           </a:xfrm>
           <a:prstGeom prst="rect">
             <a:avLst/>
           </a:prstGeom>
           <a:noFill/>
-        </p:spPr>
-        <p:txBody>
-          <a:bodyPr wrap="none" lIns="0" tIns="0" rIns="0" bIns="0">
-            <a:spAutoFit/>
-          </a:bodyPr>
-          <a:lstStyle/>
-          <a:p>
-            <a:pPr algn="ctr"/>
-            <a:r>
-              <a:rPr sz="2400" b="1" i="0">
-                <a:solidFill>
-                  <a:srgbClr val="E8833A"/>
+          <a:ln/>
+        </p:spPr>
+        <p:txBody>
+          <a:bodyPr wrap="square" lIns="0" tIns="0" rIns="0" bIns="0" rtlCol="0" anchor="ctr"/>
+          <a:lstStyle/>
+          <a:p>
+            <a:pPr marL="0" indent="0" algn="ctr">
+              <a:buNone/>
+            </a:pPr>
+            <a:r>
+              <a:rPr sz="1800" b="1">
+                <a:solidFill>
+                  <a:srgbClr val="FFFFFF"/>
                 </a:solidFill>
                 <a:latin typeface="Trebuchet MS"/>
               </a:rPr>
-              <a:t>1.856</a:t>
-            </a:r>
-          </a:p>
-        </p:txBody>
-      </p:sp>
-      <p:sp>
-        <p:nvSpPr>
-          <p:cNvPr id="10" name="TextBox 9"/>
-          <p:cNvSpPr txBox="1"/>
-          <p:nvPr/>
-        </p:nvSpPr>
-        <p:spPr>
-          <a:xfrm>
-            <a:off x="640080" y="2029968"/>
-            <a:ext cx="2240279" cy="201168"/>
+              <a:t>02</a:t>
+            </a:r>
+            <a:endParaRPr lang="en-US" sz="1800" dirty="0"/>
+          </a:p>
+        </p:txBody>
+      </p:sp>
+      <p:sp>
+        <p:nvSpPr>
+          <p:cNvPr id="4" name="Text 2"/>
+          <p:cNvSpPr/>
+          <p:nvPr/>
+        </p:nvSpPr>
+        <p:spPr>
+          <a:xfrm>
+            <a:off x="1280160" y="457200"/>
+            <a:ext cx="9144000" cy="256032"/>
           </a:xfrm>
           <a:prstGeom prst="rect">
             <a:avLst/>
           </a:prstGeom>
           <a:noFill/>
-        </p:spPr>
-        <p:txBody>
-          <a:bodyPr wrap="none" lIns="0" tIns="0" rIns="0" bIns="0">
-            <a:spAutoFit/>
-          </a:bodyPr>
-          <a:lstStyle/>
-          <a:p>
-            <a:pPr algn="ctr"/>
-            <a:r>
-              <a:rPr sz="940" b="1" i="0">
+          <a:ln/>
+        </p:spPr>
+        <p:txBody>
+          <a:bodyPr wrap="square" lIns="0" tIns="0" rIns="0" bIns="0" rtlCol="0" anchor="ctr"/>
+          <a:lstStyle/>
+          <a:p>
+            <a:pPr marL="0" indent="0">
+              <a:buNone/>
+            </a:pPr>
+            <a:r>
+              <a:rPr sz="1150" b="1" dirty="0">
+                <a:solidFill>
+                  <a:srgbClr val="0E7C86"/>
+                </a:solidFill>
+                <a:latin typeface="Trebuchet MS"/>
+              </a:rPr>
+              <a:t>AUDITOR</a:t>
+            </a:r>
+            <a:r>
+              <a:rPr lang="es-AR" sz="1150" b="1" dirty="0">
+                <a:solidFill>
+                  <a:srgbClr val="0E7C86"/>
+                </a:solidFill>
+                <a:latin typeface="Trebuchet MS"/>
+              </a:rPr>
+              <a:t>Í</a:t>
+            </a:r>
+            <a:r>
+              <a:rPr sz="1150" b="1" dirty="0">
+                <a:solidFill>
+                  <a:srgbClr val="0E7C86"/>
+                </a:solidFill>
+                <a:latin typeface="Trebuchet MS"/>
+              </a:rPr>
+              <a:t>A DE CALIDAD E IMPUTACI</a:t>
+            </a:r>
+            <a:r>
+              <a:rPr lang="es-AR" sz="1150" b="1" dirty="0" err="1">
+                <a:solidFill>
+                  <a:srgbClr val="0E7C86"/>
+                </a:solidFill>
+                <a:latin typeface="Trebuchet MS"/>
+              </a:rPr>
+              <a:t>Ó</a:t>
+            </a:r>
+            <a:r>
+              <a:rPr sz="1150" b="1" dirty="0">
+                <a:solidFill>
+                  <a:srgbClr val="0E7C86"/>
+                </a:solidFill>
+                <a:latin typeface="Trebuchet MS"/>
+              </a:rPr>
+              <a:t>N</a:t>
+            </a:r>
+            <a:endParaRPr lang="en-US" sz="1150" dirty="0"/>
+          </a:p>
+        </p:txBody>
+      </p:sp>
+      <p:sp>
+        <p:nvSpPr>
+          <p:cNvPr id="5" name="Text 3"/>
+          <p:cNvSpPr/>
+          <p:nvPr/>
+        </p:nvSpPr>
+        <p:spPr>
+          <a:xfrm>
+            <a:off x="1280160" y="694944"/>
+            <a:ext cx="10362895" cy="566928"/>
+          </a:xfrm>
+          <a:prstGeom prst="rect">
+            <a:avLst/>
+          </a:prstGeom>
+          <a:noFill/>
+          <a:ln/>
+        </p:spPr>
+        <p:txBody>
+          <a:bodyPr wrap="square" lIns="0" tIns="0" rIns="0" bIns="0" rtlCol="0" anchor="ctr"/>
+          <a:lstStyle/>
+          <a:p>
+            <a:pPr marL="0" indent="0">
+              <a:buNone/>
+            </a:pPr>
+            <a:r>
+              <a:rPr sz="2600" b="1" dirty="0" err="1">
                 <a:solidFill>
                   <a:srgbClr val="1F2D34"/>
                 </a:solidFill>
+                <a:latin typeface="Trebuchet MS"/>
+              </a:rPr>
+              <a:t>Nulos</a:t>
+            </a:r>
+            <a:r>
+              <a:rPr sz="2600" b="1" dirty="0">
+                <a:solidFill>
+                  <a:srgbClr val="1F2D34"/>
+                </a:solidFill>
+                <a:latin typeface="Trebuchet MS"/>
+              </a:rPr>
+              <a:t>, </a:t>
+            </a:r>
+            <a:r>
+              <a:rPr sz="2600" b="1" dirty="0" err="1">
+                <a:solidFill>
+                  <a:srgbClr val="1F2D34"/>
+                </a:solidFill>
+                <a:latin typeface="Trebuchet MS"/>
+              </a:rPr>
+              <a:t>duplicados</a:t>
+            </a:r>
+            <a:r>
+              <a:rPr sz="2600" b="1" dirty="0">
+                <a:solidFill>
+                  <a:srgbClr val="1F2D34"/>
+                </a:solidFill>
+                <a:latin typeface="Trebuchet MS"/>
+              </a:rPr>
+              <a:t>, </a:t>
+            </a:r>
+            <a:r>
+              <a:rPr sz="2600" b="1" dirty="0" err="1">
+                <a:solidFill>
+                  <a:srgbClr val="1F2D34"/>
+                </a:solidFill>
+                <a:latin typeface="Trebuchet MS"/>
+              </a:rPr>
+              <a:t>categor</a:t>
+            </a:r>
+            <a:r>
+              <a:rPr lang="es-AR" sz="2600" b="1" dirty="0">
+                <a:solidFill>
+                  <a:srgbClr val="1F2D34"/>
+                </a:solidFill>
+                <a:latin typeface="Trebuchet MS"/>
+              </a:rPr>
+              <a:t>í</a:t>
+            </a:r>
+            <a:r>
+              <a:rPr sz="2600" b="1" dirty="0">
+                <a:solidFill>
+                  <a:srgbClr val="1F2D34"/>
+                </a:solidFill>
+                <a:latin typeface="Trebuchet MS"/>
+              </a:rPr>
+              <a:t>as </a:t>
+            </a:r>
+            <a:r>
+              <a:rPr sz="2600" b="1" dirty="0" err="1">
+                <a:solidFill>
+                  <a:srgbClr val="1F2D34"/>
+                </a:solidFill>
+                <a:latin typeface="Trebuchet MS"/>
+              </a:rPr>
+              <a:t>equivalentes</a:t>
+            </a:r>
+            <a:r>
+              <a:rPr sz="2600" b="1" dirty="0">
+                <a:solidFill>
+                  <a:srgbClr val="1F2D34"/>
+                </a:solidFill>
+                <a:latin typeface="Trebuchet MS"/>
+              </a:rPr>
+              <a:t> e </a:t>
+            </a:r>
+            <a:r>
+              <a:rPr sz="2600" b="1" dirty="0" err="1">
+                <a:solidFill>
+                  <a:srgbClr val="1F2D34"/>
+                </a:solidFill>
+                <a:latin typeface="Trebuchet MS"/>
+              </a:rPr>
+              <a:t>imputaci</a:t>
+            </a:r>
+            <a:r>
+              <a:rPr lang="es-AR" sz="2600" b="1" dirty="0" err="1">
+                <a:solidFill>
+                  <a:srgbClr val="1F2D34"/>
+                </a:solidFill>
+                <a:latin typeface="Trebuchet MS"/>
+              </a:rPr>
+              <a:t>ó</a:t>
+            </a:r>
+            <a:r>
+              <a:rPr sz="2600" b="1" dirty="0">
+                <a:solidFill>
+                  <a:srgbClr val="1F2D34"/>
+                </a:solidFill>
+                <a:latin typeface="Trebuchet MS"/>
+              </a:rPr>
+              <a:t>n</a:t>
+            </a:r>
+            <a:endParaRPr lang="en-US" sz="2700" dirty="0"/>
+          </a:p>
+        </p:txBody>
+      </p:sp>
+      <p:sp>
+        <p:nvSpPr>
+          <p:cNvPr id="6" name="Text 4"/>
+          <p:cNvSpPr/>
+          <p:nvPr/>
+        </p:nvSpPr>
+        <p:spPr>
+          <a:xfrm>
+            <a:off x="548640" y="6473952"/>
+            <a:ext cx="7315200" cy="274320"/>
+          </a:xfrm>
+          <a:prstGeom prst="rect">
+            <a:avLst/>
+          </a:prstGeom>
+          <a:noFill/>
+          <a:ln/>
+        </p:spPr>
+        <p:txBody>
+          <a:bodyPr wrap="square" lIns="0" tIns="0" rIns="0" bIns="0" rtlCol="0" anchor="ctr"/>
+          <a:lstStyle/>
+          <a:p>
+            <a:pPr marL="0" indent="0">
+              <a:buNone/>
+            </a:pPr>
+            <a:r>
+              <a:rPr lang="en-US" sz="900" dirty="0">
+                <a:solidFill>
+                  <a:srgbClr val="6A7A82"/>
+                </a:solidFill>
+                <a:latin typeface="Calibri" pitchFamily="34" charset="0"/>
+                <a:ea typeface="Calibri" pitchFamily="34" charset="-122"/>
+                <a:cs typeface="Calibri" pitchFamily="34" charset="-120"/>
+              </a:rPr>
+              <a:t>Pipeline de clasificacion de churn  ·  Grupo 1</a:t>
+            </a:r>
+            <a:endParaRPr lang="en-US" sz="900" dirty="0"/>
+          </a:p>
+        </p:txBody>
+      </p:sp>
+      <p:sp>
+        <p:nvSpPr>
+          <p:cNvPr id="7" name="Text 5"/>
+          <p:cNvSpPr/>
+          <p:nvPr/>
+        </p:nvSpPr>
+        <p:spPr>
+          <a:xfrm>
+            <a:off x="10545775" y="6473952"/>
+            <a:ext cx="1097280" cy="274320"/>
+          </a:xfrm>
+          <a:prstGeom prst="rect">
+            <a:avLst/>
+          </a:prstGeom>
+          <a:noFill/>
+          <a:ln/>
+        </p:spPr>
+        <p:txBody>
+          <a:bodyPr wrap="square" lIns="0" tIns="0" rIns="0" bIns="0" rtlCol="0" anchor="ctr"/>
+          <a:lstStyle/>
+          <a:p>
+            <a:pPr marL="0" indent="0" algn="r">
+              <a:buNone/>
+            </a:pPr>
+            <a:r>
+              <a:rPr sz="900">
+                <a:solidFill>
+                  <a:srgbClr val="6A7A82"/>
+                </a:solidFill>
                 <a:latin typeface="Calibri"/>
               </a:rPr>
-              <a:t>filas con algun nulo</a:t>
-            </a:r>
-          </a:p>
-        </p:txBody>
-      </p:sp>
-      <p:sp>
-        <p:nvSpPr>
-          <p:cNvPr id="11" name="TextBox 10"/>
-          <p:cNvSpPr txBox="1"/>
-          <p:nvPr/>
-        </p:nvSpPr>
-        <p:spPr>
-          <a:xfrm>
-            <a:off x="685800" y="2313432"/>
-            <a:ext cx="2148840" cy="228600"/>
-          </a:xfrm>
-          <a:prstGeom prst="rect">
-            <a:avLst/>
-          </a:prstGeom>
-          <a:noFill/>
-        </p:spPr>
-        <p:txBody>
-          <a:bodyPr wrap="none" lIns="0" tIns="0" rIns="0" bIns="0">
-            <a:spAutoFit/>
-          </a:bodyPr>
-          <a:lstStyle/>
-          <a:p>
-            <a:pPr algn="ctr"/>
-            <a:r>
-              <a:rPr sz="840" b="0" i="0">
-                <a:solidFill>
-                  <a:srgbClr val="6A7A82"/>
-                </a:solidFill>
-                <a:latin typeface="Calibri"/>
-              </a:rPr>
-              <a:t>exactamente 1 faltante c/u</a:t>
-            </a:r>
-          </a:p>
-        </p:txBody>
-      </p:sp>
-      <p:sp>
-        <p:nvSpPr>
-          <p:cNvPr id="12" name="Rectangle 11"/>
+              <a:t>2 / 11</a:t>
+            </a:r>
+            <a:endParaRPr lang="en-US" sz="900" dirty="0"/>
+          </a:p>
+        </p:txBody>
+      </p:sp>
+      <p:sp>
+        <p:nvSpPr>
+          <p:cNvPr id="8" name="Rectangle 7"/>
           <p:cNvSpPr/>
           <p:nvPr/>
         </p:nvSpPr>
         <p:spPr>
           <a:xfrm>
-            <a:off x="3154680" y="1417320"/>
+            <a:off x="548640" y="1417320"/>
             <a:ext cx="2423160" cy="987552"/>
           </a:xfrm>
           <a:prstGeom prst="rect">
@@ -10770,13 +8303,13 @@
       </p:sp>
       <p:sp>
         <p:nvSpPr>
-          <p:cNvPr id="13" name="TextBox 12"/>
+          <p:cNvPr id="9" name="TextBox 8"/>
           <p:cNvSpPr txBox="1"/>
           <p:nvPr/>
         </p:nvSpPr>
         <p:spPr>
           <a:xfrm>
-            <a:off x="3154680" y="1563624"/>
+            <a:off x="548640" y="1563624"/>
             <a:ext cx="2423160" cy="384048"/>
           </a:xfrm>
           <a:prstGeom prst="rect">
@@ -10798,20 +8331,20 @@
                 </a:solidFill>
                 <a:latin typeface="Trebuchet MS"/>
               </a:rPr>
-              <a:t>556</a:t>
-            </a:r>
-          </a:p>
-        </p:txBody>
-      </p:sp>
-      <p:sp>
-        <p:nvSpPr>
-          <p:cNvPr id="14" name="TextBox 13"/>
+              <a:t>1.856</a:t>
+            </a:r>
+          </a:p>
+        </p:txBody>
+      </p:sp>
+      <p:sp>
+        <p:nvSpPr>
+          <p:cNvPr id="10" name="TextBox 9"/>
           <p:cNvSpPr txBox="1"/>
           <p:nvPr/>
         </p:nvSpPr>
         <p:spPr>
           <a:xfrm>
-            <a:off x="3246120" y="2029968"/>
+            <a:off x="640080" y="2029968"/>
             <a:ext cx="2240279" cy="201168"/>
           </a:xfrm>
           <a:prstGeom prst="rect">
@@ -10833,20 +8366,20 @@
                 </a:solidFill>
                 <a:latin typeface="Calibri"/>
               </a:rPr>
-              <a:t>filas con features identicas</a:t>
-            </a:r>
-          </a:p>
-        </p:txBody>
-      </p:sp>
-      <p:sp>
-        <p:nvSpPr>
-          <p:cNvPr id="15" name="TextBox 14"/>
+              <a:t>filas con algun nulo</a:t>
+            </a:r>
+          </a:p>
+        </p:txBody>
+      </p:sp>
+      <p:sp>
+        <p:nvSpPr>
+          <p:cNvPr id="11" name="TextBox 10"/>
           <p:cNvSpPr txBox="1"/>
           <p:nvPr/>
         </p:nvSpPr>
         <p:spPr>
           <a:xfrm>
-            <a:off x="3291840" y="2313432"/>
+            <a:off x="685800" y="2219888"/>
             <a:ext cx="2148840" cy="228600"/>
           </a:xfrm>
           <a:prstGeom prst="rect">
@@ -10862,27 +8395,54 @@
           <a:p>
             <a:pPr algn="ctr"/>
             <a:r>
-              <a:rPr sz="840" b="0" i="0">
+              <a:rPr sz="840" b="0" i="0" dirty="0" err="1">
                 <a:solidFill>
                   <a:srgbClr val="6A7A82"/>
                 </a:solidFill>
                 <a:latin typeface="Calibri"/>
               </a:rPr>
-              <a:t>perfiles duplicados</a:t>
-            </a:r>
-          </a:p>
-        </p:txBody>
-      </p:sp>
-      <p:sp>
-        <p:nvSpPr>
-          <p:cNvPr id="16" name="Rectangle 15"/>
+              <a:t>exactamente</a:t>
+            </a:r>
+            <a:r>
+              <a:rPr sz="840" b="0" i="0" dirty="0">
+                <a:solidFill>
+                  <a:srgbClr val="6A7A82"/>
+                </a:solidFill>
+                <a:latin typeface="Calibri"/>
+              </a:rPr>
+              <a:t> 1 </a:t>
+            </a:r>
+            <a:r>
+              <a:rPr sz="840" b="0" i="0" dirty="0" err="1">
+                <a:solidFill>
+                  <a:srgbClr val="6A7A82"/>
+                </a:solidFill>
+                <a:latin typeface="Calibri"/>
+              </a:rPr>
+              <a:t>faltante</a:t>
+            </a:r>
+            <a:r>
+              <a:rPr sz="840" b="0" i="0" dirty="0">
+                <a:solidFill>
+                  <a:srgbClr val="6A7A82"/>
+                </a:solidFill>
+                <a:latin typeface="Calibri"/>
+              </a:rPr>
+              <a:t> c/u</a:t>
+            </a:r>
+          </a:p>
+        </p:txBody>
+      </p:sp>
+      <p:sp>
+        <p:nvSpPr>
+          <p:cNvPr id="12" name="Rectangle 11"/>
           <p:cNvSpPr/>
           <p:nvPr/>
         </p:nvSpPr>
         <p:spPr>
           <a:xfrm>
-            <a:off x="5760720" y="1417320"/>
-            <a:ext cx="2057400" cy="987552"/>
+            <a:off x="3154680" y="1417320"/>
+            <a:ext cx="2423160" cy="987552"/>
           </a:xfrm>
           <a:prstGeom prst="rect">
             <a:avLst/>
@@ -10921,14 +8481,14 @@
       </p:sp>
       <p:sp>
         <p:nvSpPr>
-          <p:cNvPr id="17" name="TextBox 16"/>
+          <p:cNvPr id="13" name="TextBox 12"/>
           <p:cNvSpPr txBox="1"/>
           <p:nvPr/>
         </p:nvSpPr>
         <p:spPr>
           <a:xfrm>
-            <a:off x="5760720" y="1563624"/>
-            <a:ext cx="2057400" cy="384048"/>
+            <a:off x="3154680" y="1563624"/>
+            <a:ext cx="2423160" cy="384048"/>
           </a:xfrm>
           <a:prstGeom prst="rect">
             <a:avLst/>
@@ -10949,21 +8509,21 @@
                 </a:solidFill>
                 <a:latin typeface="Trebuchet MS"/>
               </a:rPr>
-              <a:t>0</a:t>
-            </a:r>
-          </a:p>
-        </p:txBody>
-      </p:sp>
-      <p:sp>
-        <p:nvSpPr>
-          <p:cNvPr id="18" name="TextBox 17"/>
+              <a:t>556</a:t>
+            </a:r>
+          </a:p>
+        </p:txBody>
+      </p:sp>
+      <p:sp>
+        <p:nvSpPr>
+          <p:cNvPr id="14" name="TextBox 13"/>
           <p:cNvSpPr txBox="1"/>
           <p:nvPr/>
         </p:nvSpPr>
         <p:spPr>
           <a:xfrm>
-            <a:off x="5852159" y="2029968"/>
-            <a:ext cx="1874519" cy="201168"/>
+            <a:off x="3246120" y="2029968"/>
+            <a:ext cx="2240279" cy="201168"/>
           </a:xfrm>
           <a:prstGeom prst="rect">
             <a:avLst/>
@@ -10984,21 +8544,21 @@
                 </a:solidFill>
                 <a:latin typeface="Calibri"/>
               </a:rPr>
-              <a:t>duplicados de CustomerID</a:t>
-            </a:r>
-          </a:p>
-        </p:txBody>
-      </p:sp>
-      <p:sp>
-        <p:nvSpPr>
-          <p:cNvPr id="19" name="TextBox 18"/>
+              <a:t>filas con features identicas</a:t>
+            </a:r>
+          </a:p>
+        </p:txBody>
+      </p:sp>
+      <p:sp>
+        <p:nvSpPr>
+          <p:cNvPr id="15" name="TextBox 14"/>
           <p:cNvSpPr txBox="1"/>
           <p:nvPr/>
         </p:nvSpPr>
         <p:spPr>
           <a:xfrm>
-            <a:off x="5897880" y="2313432"/>
-            <a:ext cx="1783080" cy="228600"/>
+            <a:off x="3273552" y="2197917"/>
+            <a:ext cx="2148840" cy="228600"/>
           </a:xfrm>
           <a:prstGeom prst="rect">
             <a:avLst/>
@@ -11013,33 +8573,57 @@
           <a:p>
             <a:pPr algn="ctr"/>
             <a:r>
-              <a:rPr sz="840" b="0" i="0">
+              <a:rPr sz="840" b="0" i="0" dirty="0" err="1">
                 <a:solidFill>
                   <a:srgbClr val="6A7A82"/>
                 </a:solidFill>
                 <a:latin typeface="Calibri"/>
               </a:rPr>
-              <a:t>identificador integro</a:t>
-            </a:r>
-          </a:p>
-        </p:txBody>
-      </p:sp>
-      <p:sp>
-        <p:nvSpPr>
-          <p:cNvPr id="20" name="Rectangle 19"/>
+              <a:t>perfiles</a:t>
+            </a:r>
+            <a:r>
+              <a:rPr sz="840" b="0" i="0" dirty="0">
+                <a:solidFill>
+                  <a:srgbClr val="6A7A82"/>
+                </a:solidFill>
+                <a:latin typeface="Calibri"/>
+              </a:rPr>
+              <a:t> </a:t>
+            </a:r>
+            <a:r>
+              <a:rPr sz="840" b="0" i="0" dirty="0" err="1">
+                <a:solidFill>
+                  <a:srgbClr val="6A7A82"/>
+                </a:solidFill>
+                <a:latin typeface="Calibri"/>
+              </a:rPr>
+              <a:t>duplicados</a:t>
+            </a:r>
+            <a:endParaRPr sz="840" b="0" i="0" dirty="0">
+              <a:solidFill>
+                <a:srgbClr val="6A7A82"/>
+              </a:solidFill>
+              <a:latin typeface="Calibri"/>
+            </a:endParaRPr>
+          </a:p>
+        </p:txBody>
+      </p:sp>
+      <p:sp>
+        <p:nvSpPr>
+          <p:cNvPr id="16" name="Rectangle 15"/>
           <p:cNvSpPr/>
           <p:nvPr/>
         </p:nvSpPr>
         <p:spPr>
           <a:xfrm>
-            <a:off x="7818120" y="1417320"/>
-            <a:ext cx="2011680" cy="987552"/>
+            <a:off x="5760720" y="1417320"/>
+            <a:ext cx="2057400" cy="987552"/>
           </a:xfrm>
           <a:prstGeom prst="rect">
             <a:avLst/>
           </a:prstGeom>
           <a:solidFill>
-            <a:srgbClr val="0E2A38"/>
+            <a:srgbClr val="FFFFFF"/>
           </a:solidFill>
           <a:ln w="12700">
             <a:solidFill>
@@ -11072,14 +8656,14 @@
       </p:sp>
       <p:sp>
         <p:nvSpPr>
-          <p:cNvPr id="21" name="TextBox 20"/>
+          <p:cNvPr id="17" name="TextBox 16"/>
           <p:cNvSpPr txBox="1"/>
           <p:nvPr/>
         </p:nvSpPr>
         <p:spPr>
           <a:xfrm>
-            <a:off x="7818120" y="1554480"/>
-            <a:ext cx="2011680" cy="365760"/>
+            <a:off x="5760720" y="1563624"/>
+            <a:ext cx="2057400" cy="384048"/>
           </a:xfrm>
           <a:prstGeom prst="rect">
             <a:avLst/>
@@ -11094,27 +8678,27 @@
           <a:p>
             <a:pPr algn="ctr"/>
             <a:r>
-              <a:rPr sz="2500" b="1" i="0">
-                <a:solidFill>
-                  <a:srgbClr val="0E7C86"/>
+              <a:rPr sz="2400" b="1" i="0">
+                <a:solidFill>
+                  <a:srgbClr val="E8833A"/>
                 </a:solidFill>
                 <a:latin typeface="Trebuchet MS"/>
               </a:rPr>
-              <a:t>7</a:t>
-            </a:r>
-          </a:p>
-        </p:txBody>
-      </p:sp>
-      <p:sp>
-        <p:nvSpPr>
-          <p:cNvPr id="22" name="TextBox 21"/>
+              <a:t>0</a:t>
+            </a:r>
+          </a:p>
+        </p:txBody>
+      </p:sp>
+      <p:sp>
+        <p:nvSpPr>
+          <p:cNvPr id="18" name="TextBox 17"/>
           <p:cNvSpPr txBox="1"/>
           <p:nvPr/>
         </p:nvSpPr>
         <p:spPr>
           <a:xfrm>
-            <a:off x="8001000" y="2020824"/>
-            <a:ext cx="1645920" cy="347472"/>
+            <a:off x="5852159" y="2029968"/>
+            <a:ext cx="1874519" cy="201168"/>
           </a:xfrm>
           <a:prstGeom prst="rect">
             <a:avLst/>
@@ -11129,14 +8713,229 @@
           <a:p>
             <a:pPr algn="ctr"/>
             <a:r>
-              <a:rPr sz="919" b="0" i="0">
-                <a:solidFill>
-                  <a:srgbClr val="FFFFFF"/>
+              <a:rPr sz="940" b="1" i="0">
+                <a:solidFill>
+                  <a:srgbClr val="1F2D34"/>
                 </a:solidFill>
                 <a:latin typeface="Calibri"/>
               </a:rPr>
-              <a:t>variables numericas
-con valores faltantes</a:t>
+              <a:t>duplicados de CustomerID</a:t>
+            </a:r>
+          </a:p>
+        </p:txBody>
+      </p:sp>
+      <p:sp>
+        <p:nvSpPr>
+          <p:cNvPr id="19" name="TextBox 18"/>
+          <p:cNvSpPr txBox="1"/>
+          <p:nvPr/>
+        </p:nvSpPr>
+        <p:spPr>
+          <a:xfrm>
+            <a:off x="5879592" y="2199132"/>
+            <a:ext cx="1783080" cy="228600"/>
+          </a:xfrm>
+          <a:prstGeom prst="rect">
+            <a:avLst/>
+          </a:prstGeom>
+          <a:noFill/>
+        </p:spPr>
+        <p:txBody>
+          <a:bodyPr wrap="none" lIns="0" tIns="0" rIns="0" bIns="0">
+            <a:spAutoFit/>
+          </a:bodyPr>
+          <a:lstStyle/>
+          <a:p>
+            <a:pPr algn="ctr"/>
+            <a:r>
+              <a:rPr sz="840" b="0" i="0" dirty="0" err="1">
+                <a:solidFill>
+                  <a:srgbClr val="6A7A82"/>
+                </a:solidFill>
+                <a:latin typeface="Calibri"/>
+              </a:rPr>
+              <a:t>identificador</a:t>
+            </a:r>
+            <a:r>
+              <a:rPr sz="840" b="0" i="0" dirty="0">
+                <a:solidFill>
+                  <a:srgbClr val="6A7A82"/>
+                </a:solidFill>
+                <a:latin typeface="Calibri"/>
+              </a:rPr>
+              <a:t> </a:t>
+            </a:r>
+            <a:r>
+              <a:rPr sz="840" b="0" i="0" dirty="0" err="1">
+                <a:solidFill>
+                  <a:srgbClr val="6A7A82"/>
+                </a:solidFill>
+                <a:latin typeface="Calibri"/>
+              </a:rPr>
+              <a:t>integro</a:t>
+            </a:r>
+            <a:endParaRPr sz="840" b="0" i="0" dirty="0">
+              <a:solidFill>
+                <a:srgbClr val="6A7A82"/>
+              </a:solidFill>
+              <a:latin typeface="Calibri"/>
+            </a:endParaRPr>
+          </a:p>
+        </p:txBody>
+      </p:sp>
+      <p:sp>
+        <p:nvSpPr>
+          <p:cNvPr id="22" name="TextBox 21"/>
+          <p:cNvSpPr txBox="1"/>
+          <p:nvPr/>
+        </p:nvSpPr>
+        <p:spPr>
+          <a:xfrm>
+            <a:off x="8372922" y="2020824"/>
+            <a:ext cx="998671" cy="282898"/>
+          </a:xfrm>
+          <a:prstGeom prst="rect">
+            <a:avLst/>
+          </a:prstGeom>
+          <a:noFill/>
+        </p:spPr>
+        <p:txBody>
+          <a:bodyPr wrap="none" lIns="0" tIns="0" rIns="0" bIns="0">
+            <a:spAutoFit/>
+          </a:bodyPr>
+          <a:lstStyle/>
+          <a:p>
+            <a:pPr algn="ctr"/>
+            <a:r>
+              <a:rPr sz="919" i="0" dirty="0">
+                <a:ln w="0"/>
+                <a:effectLst>
+                  <a:outerShdw blurRad="38100" dist="19050" dir="2700000" algn="tl" rotWithShape="0">
+                    <a:schemeClr val="dk1">
+                      <a:alpha val="40000"/>
+                    </a:schemeClr>
+                  </a:outerShdw>
+                </a:effectLst>
+                <a:latin typeface="Calibri"/>
+              </a:rPr>
+              <a:t>variables </a:t>
+            </a:r>
+            <a:r>
+              <a:rPr sz="919" i="0" dirty="0" err="1">
+                <a:ln w="0"/>
+                <a:effectLst>
+                  <a:outerShdw blurRad="38100" dist="19050" dir="2700000" algn="tl" rotWithShape="0">
+                    <a:schemeClr val="dk1">
+                      <a:alpha val="40000"/>
+                    </a:schemeClr>
+                  </a:outerShdw>
+                </a:effectLst>
+                <a:latin typeface="Calibri"/>
+              </a:rPr>
+              <a:t>numericas</a:t>
+            </a:r>
+            <a:r>
+              <a:rPr sz="919" i="0" dirty="0">
+                <a:ln w="0"/>
+                <a:effectLst>
+                  <a:outerShdw blurRad="38100" dist="19050" dir="2700000" algn="tl" rotWithShape="0">
+                    <a:schemeClr val="dk1">
+                      <a:alpha val="40000"/>
+                    </a:schemeClr>
+                  </a:outerShdw>
+                </a:effectLst>
+                <a:latin typeface="Calibri"/>
+              </a:rPr>
+              <a:t>
+con </a:t>
+            </a:r>
+            <a:r>
+              <a:rPr sz="919" i="0" dirty="0" err="1">
+                <a:ln w="0"/>
+                <a:effectLst>
+                  <a:outerShdw blurRad="38100" dist="19050" dir="2700000" algn="tl" rotWithShape="0">
+                    <a:schemeClr val="dk1">
+                      <a:alpha val="40000"/>
+                    </a:schemeClr>
+                  </a:outerShdw>
+                </a:effectLst>
+                <a:latin typeface="Calibri"/>
+              </a:rPr>
+              <a:t>valores</a:t>
+            </a:r>
+            <a:r>
+              <a:rPr sz="919" i="0" dirty="0">
+                <a:ln w="0"/>
+                <a:effectLst>
+                  <a:outerShdw blurRad="38100" dist="19050" dir="2700000" algn="tl" rotWithShape="0">
+                    <a:schemeClr val="dk1">
+                      <a:alpha val="40000"/>
+                    </a:schemeClr>
+                  </a:outerShdw>
+                </a:effectLst>
+                <a:latin typeface="Calibri"/>
+              </a:rPr>
+              <a:t> </a:t>
+            </a:r>
+            <a:r>
+              <a:rPr sz="919" i="0" dirty="0" err="1">
+                <a:ln w="0"/>
+                <a:effectLst>
+                  <a:outerShdw blurRad="38100" dist="19050" dir="2700000" algn="tl" rotWithShape="0">
+                    <a:schemeClr val="dk1">
+                      <a:alpha val="40000"/>
+                    </a:schemeClr>
+                  </a:outerShdw>
+                </a:effectLst>
+                <a:latin typeface="Calibri"/>
+              </a:rPr>
+              <a:t>faltantes</a:t>
+            </a:r>
+            <a:endParaRPr sz="919" i="0" dirty="0">
+              <a:ln w="0"/>
+              <a:effectLst>
+                <a:outerShdw blurRad="38100" dist="19050" dir="2700000" algn="tl" rotWithShape="0">
+                  <a:schemeClr val="dk1">
+                    <a:alpha val="40000"/>
+                  </a:schemeClr>
+                </a:outerShdw>
+              </a:effectLst>
+              <a:latin typeface="Calibri"/>
+            </a:endParaRPr>
+          </a:p>
+        </p:txBody>
+      </p:sp>
+      <p:sp>
+        <p:nvSpPr>
+          <p:cNvPr id="21" name="TextBox 20"/>
+          <p:cNvSpPr txBox="1"/>
+          <p:nvPr/>
+        </p:nvSpPr>
+        <p:spPr>
+          <a:xfrm>
+            <a:off x="7818120" y="1554480"/>
+            <a:ext cx="2011680" cy="365760"/>
+          </a:xfrm>
+          <a:prstGeom prst="rect">
+            <a:avLst/>
+          </a:prstGeom>
+          <a:noFill/>
+        </p:spPr>
+        <p:txBody>
+          <a:bodyPr wrap="none" lIns="0" tIns="0" rIns="0" bIns="0">
+            <a:spAutoFit/>
+          </a:bodyPr>
+          <a:lstStyle/>
+          <a:p>
+            <a:pPr algn="ctr"/>
+            <a:r>
+              <a:rPr sz="2500" b="1" i="0" dirty="0">
+                <a:solidFill>
+                  <a:srgbClr val="0E7C86"/>
+                </a:solidFill>
+                <a:latin typeface="Trebuchet MS"/>
+              </a:rPr>
+              <a:t>7</a:t>
             </a:r>
           </a:p>
         </p:txBody>
@@ -11183,7 +8982,7 @@
           <a:lstStyle/>
           <a:p>
             <a:pPr algn="ctr"/>
-            <a:endParaRPr/>
+            <a:endParaRPr dirty="0"/>
           </a:p>
         </p:txBody>
       </p:sp>
@@ -11195,7 +8994,7 @@
         </p:nvSpPr>
         <p:spPr>
           <a:xfrm>
-            <a:off x="10104120" y="1600200"/>
+            <a:off x="10090404" y="1719072"/>
             <a:ext cx="1417320" cy="201168"/>
           </a:xfrm>
           <a:prstGeom prst="rect">
@@ -11211,13 +9010,22 @@
           <a:p>
             <a:pPr algn="ctr"/>
             <a:r>
-              <a:rPr sz="1050" b="1" i="0">
+              <a:rPr sz="1050" b="1" i="0" dirty="0" err="1">
                 <a:solidFill>
                   <a:srgbClr val="0E7C86"/>
                 </a:solidFill>
                 <a:latin typeface="Trebuchet MS"/>
               </a:rPr>
-              <a:t>Dentro del fold</a:t>
+              <a:t>Dentro</a:t>
+            </a:r>
+            <a:r>
+              <a:rPr sz="1050" b="1" i="0" dirty="0">
+                <a:solidFill>
+                  <a:srgbClr val="0E7C86"/>
+                </a:solidFill>
+                <a:latin typeface="Trebuchet MS"/>
+              </a:rPr>
+              <a:t> del fold</a:t>
             </a:r>
           </a:p>
         </p:txBody>
@@ -11230,8 +9038,8 @@
         </p:nvSpPr>
         <p:spPr>
           <a:xfrm>
-            <a:off x="10076688" y="1901952"/>
-            <a:ext cx="1444752" cy="329184"/>
+            <a:off x="10272478" y="1993392"/>
+            <a:ext cx="1053173" cy="252120"/>
           </a:xfrm>
           <a:prstGeom prst="rect">
             <a:avLst/>
@@ -11246,14 +9054,59 @@
           <a:p>
             <a:pPr algn="ctr"/>
             <a:r>
-              <a:rPr sz="819" b="0" i="0">
+              <a:rPr lang="es-AR" sz="819" b="1" i="0" dirty="0">
                 <a:solidFill>
                   <a:srgbClr val="6A7A82"/>
                 </a:solidFill>
                 <a:latin typeface="Calibri"/>
               </a:rPr>
-              <a:t>imputacion y escalado
-se ajustan solo con train</a:t>
+              <a:t>Imputación</a:t>
+            </a:r>
+            <a:r>
+              <a:rPr sz="819" b="1" i="0" dirty="0">
+                <a:solidFill>
+                  <a:srgbClr val="6A7A82"/>
+                </a:solidFill>
+                <a:latin typeface="Calibri"/>
+              </a:rPr>
+              <a:t> y </a:t>
+            </a:r>
+            <a:r>
+              <a:rPr sz="819" b="1" i="0" dirty="0" err="1">
+                <a:solidFill>
+                  <a:srgbClr val="6A7A82"/>
+                </a:solidFill>
+                <a:latin typeface="Calibri"/>
+              </a:rPr>
+              <a:t>escalado</a:t>
+            </a:r>
+            <a:r>
+              <a:rPr sz="819" b="1" i="0" dirty="0">
+                <a:solidFill>
+                  <a:srgbClr val="6A7A82"/>
+                </a:solidFill>
+                <a:latin typeface="Calibri"/>
+              </a:rPr>
+              <a:t>
+se </a:t>
+            </a:r>
+            <a:r>
+              <a:rPr sz="819" b="1" i="0" dirty="0" err="1">
+                <a:solidFill>
+                  <a:srgbClr val="6A7A82"/>
+                </a:solidFill>
+                <a:latin typeface="Calibri"/>
+              </a:rPr>
+              <a:t>ajustan</a:t>
+            </a:r>
+            <a:r>
+              <a:rPr sz="819" b="1" i="0" dirty="0">
+                <a:solidFill>
+                  <a:srgbClr val="6A7A82"/>
+                </a:solidFill>
+                <a:latin typeface="Calibri"/>
+              </a:rPr>
+              <a:t> solo con train</a:t>
             </a:r>
           </a:p>
         </p:txBody>
@@ -11313,7 +9166,7 @@
         <p:spPr>
           <a:xfrm>
             <a:off x="777240" y="2834640"/>
-            <a:ext cx="4572000" cy="219456"/>
+            <a:ext cx="3685304" cy="180049"/>
           </a:xfrm>
           <a:prstGeom prst="rect">
             <a:avLst/>
@@ -11327,14 +9180,83 @@
           <a:lstStyle/>
           <a:p>
             <a:r>
-              <a:rPr sz="1170" b="1" i="0">
+              <a:rPr sz="1170" b="1" i="0" dirty="0" err="1">
                 <a:solidFill>
                   <a:srgbClr val="1F2D34"/>
                 </a:solidFill>
                 <a:latin typeface="Trebuchet MS"/>
               </a:rPr>
-              <a:t>Categorias semanticamente equivalentes detectadas</a:t>
-            </a:r>
+              <a:t>Categor</a:t>
+            </a:r>
+            <a:r>
+              <a:rPr lang="es-AR" sz="1170" b="1" i="0" dirty="0">
+                <a:solidFill>
+                  <a:srgbClr val="1F2D34"/>
+                </a:solidFill>
+                <a:latin typeface="Trebuchet MS"/>
+              </a:rPr>
+              <a:t>í</a:t>
+            </a:r>
+            <a:r>
+              <a:rPr sz="1170" b="1" i="0" dirty="0">
+                <a:solidFill>
+                  <a:srgbClr val="1F2D34"/>
+                </a:solidFill>
+                <a:latin typeface="Trebuchet MS"/>
+              </a:rPr>
+              <a:t>as </a:t>
+            </a:r>
+            <a:r>
+              <a:rPr sz="1170" b="1" i="0" dirty="0" err="1">
+                <a:solidFill>
+                  <a:srgbClr val="1F2D34"/>
+                </a:solidFill>
+                <a:latin typeface="Trebuchet MS"/>
+              </a:rPr>
+              <a:t>semanticamente</a:t>
+            </a:r>
+            <a:r>
+              <a:rPr sz="1170" b="1" i="0" dirty="0">
+                <a:solidFill>
+                  <a:srgbClr val="1F2D34"/>
+                </a:solidFill>
+                <a:latin typeface="Trebuchet MS"/>
+              </a:rPr>
+              <a:t> </a:t>
+            </a:r>
+            <a:r>
+              <a:rPr sz="1170" b="1" i="0" dirty="0" err="1">
+                <a:solidFill>
+                  <a:srgbClr val="1F2D34"/>
+                </a:solidFill>
+                <a:latin typeface="Trebuchet MS"/>
+              </a:rPr>
+              <a:t>equivalentes</a:t>
+            </a:r>
+            <a:r>
+              <a:rPr sz="1170" b="1" i="0" dirty="0">
+                <a:solidFill>
+                  <a:srgbClr val="1F2D34"/>
+                </a:solidFill>
+                <a:latin typeface="Trebuchet MS"/>
+              </a:rPr>
+              <a:t> </a:t>
+            </a:r>
+            <a:r>
+              <a:rPr sz="1170" b="1" i="0" dirty="0" err="1">
+                <a:solidFill>
+                  <a:srgbClr val="1F2D34"/>
+                </a:solidFill>
+                <a:latin typeface="Trebuchet MS"/>
+              </a:rPr>
+              <a:t>detectadas</a:t>
+            </a:r>
+            <a:endParaRPr sz="1170" b="1" i="0" dirty="0">
+              <a:solidFill>
+                <a:srgbClr val="1F2D34"/>
+              </a:solidFill>
+              <a:latin typeface="Trebuchet MS"/>
+            </a:endParaRPr>
           </a:p>
         </p:txBody>
       </p:sp>
@@ -11752,7 +9674,13 @@
           <p:cNvGraphicFramePr>
             <a:graphicFrameLocks noGrp="1"/>
           </p:cNvGraphicFramePr>
-          <p:nvPr/>
+          <p:nvPr>
+            <p:extLst>
+              <p:ext uri="{D42A27DB-BD31-4B8C-83A1-F6EECF244321}">
+                <p14:modId xmlns:p14="http://schemas.microsoft.com/office/powerpoint/2010/main" val="4057782116"/>
+              </p:ext>
+            </p:extLst>
+          </p:nvPr>
         </p:nvGraphicFramePr>
         <p:xfrm>
           <a:off x="548640" y="3977639"/>
@@ -11811,14 +9739,38 @@
                     <a:p>
                       <a:pPr algn="ctr"/>
                       <a:r>
-                        <a:rPr sz="1030" b="1">
+                        <a:rPr sz="1030" b="1" dirty="0">
                           <a:solidFill>
                             <a:srgbClr val="FFFFFF"/>
                           </a:solidFill>
                           <a:latin typeface="Trebuchet MS"/>
                         </a:rPr>
-                        <a:t>Metodo</a:t>
+                        <a:t>M</a:t>
                       </a:r>
+                      <a:r>
+                        <a:rPr lang="es-AR" sz="1030" b="1" dirty="0">
+                          <a:solidFill>
+                            <a:srgbClr val="FFFFFF"/>
+                          </a:solidFill>
+                          <a:latin typeface="Trebuchet MS"/>
+                        </a:rPr>
+                        <a:t>é</a:t>
+                      </a:r>
+                      <a:r>
+                        <a:rPr sz="1030" b="1" dirty="0" err="1">
+                          <a:solidFill>
+                            <a:srgbClr val="FFFFFF"/>
+                          </a:solidFill>
+                          <a:latin typeface="Trebuchet MS"/>
+                        </a:rPr>
+                        <a:t>todo</a:t>
+                      </a:r>
+                      <a:endParaRPr sz="1030" b="1" dirty="0">
+                        <a:solidFill>
+                          <a:srgbClr val="FFFFFF"/>
+                        </a:solidFill>
+                        <a:latin typeface="Trebuchet MS"/>
+                      </a:endParaRPr>
                     </a:p>
                   </a:txBody>
                   <a:tcPr marL="54864" marR="54864" marT="27432" marB="27432">
@@ -11978,7 +9930,7 @@
                     <a:p>
                       <a:pPr algn="ctr"/>
                       <a:r>
-                        <a:rPr sz="890" b="0">
+                        <a:rPr sz="890" b="0" dirty="0">
                           <a:solidFill>
                             <a:srgbClr val="1F2D34"/>
                           </a:solidFill>
@@ -12059,7 +10011,7 @@
         <p:spPr>
           <a:xfrm>
             <a:off x="7726679" y="4133087"/>
-            <a:ext cx="3474720" cy="228600"/>
+            <a:ext cx="947375" cy="176972"/>
           </a:xfrm>
           <a:prstGeom prst="rect">
             <a:avLst/>
@@ -12073,13 +10025,31 @@
           <a:lstStyle/>
           <a:p>
             <a:r>
-              <a:rPr sz="1150" b="1" i="0">
+              <a:rPr sz="1150" b="1" i="0" dirty="0" err="1">
                 <a:solidFill>
                   <a:srgbClr val="0E7C86"/>
                 </a:solidFill>
                 <a:latin typeface="Trebuchet MS"/>
               </a:rPr>
-              <a:t>Configuracion</a:t>
+              <a:t>Configuraci</a:t>
+            </a:r>
+            <a:r>
+              <a:rPr lang="es-AR" sz="1150" b="1" i="0" dirty="0" err="1">
+                <a:solidFill>
+                  <a:srgbClr val="0E7C86"/>
+                </a:solidFill>
+                <a:latin typeface="Trebuchet MS"/>
+              </a:rPr>
+              <a:t>ó</a:t>
+            </a:r>
+            <a:r>
+              <a:rPr sz="1150" b="1" i="0" dirty="0">
+                <a:solidFill>
+                  <a:srgbClr val="0E7C86"/>
+                </a:solidFill>
+                <a:latin typeface="Trebuchet MS"/>
+              </a:rPr>
+              <a:t>n</a:t>
             </a:r>
           </a:p>
         </p:txBody>
@@ -12093,7 +10063,7 @@
         <p:spPr>
           <a:xfrm>
             <a:off x="7726679" y="4462272"/>
-            <a:ext cx="3675887" cy="841248"/>
+            <a:ext cx="3842975" cy="738664"/>
           </a:xfrm>
           <a:prstGeom prst="rect">
             <a:avLst/>
@@ -12107,17 +10077,284 @@
           <a:lstStyle/>
           <a:p>
             <a:r>
-              <a:rPr sz="790" b="0" i="0">
+              <a:rPr sz="790" b="0" i="0" dirty="0">
                 <a:solidFill>
                   <a:srgbClr val="1F2D34"/>
                 </a:solidFill>
                 <a:latin typeface="Calibri"/>
               </a:rPr>
-              <a:t>- KNNImputer(n_neighbors=5, weights="distance")
-- Estandarizacion previa para modelos sensibles a escala
-- KNN vs. imputacion iterativa comparados por MAE simulado
-- KNN obtuvo menor MAE en las 5 variables evaluadas</a:t>
-            </a:r>
+              <a:t>- </a:t>
+            </a:r>
+            <a:r>
+              <a:rPr sz="1200" b="0" i="0" dirty="0" err="1">
+                <a:solidFill>
+                  <a:srgbClr val="1F2D34"/>
+                </a:solidFill>
+                <a:latin typeface="Calibri"/>
+              </a:rPr>
+              <a:t>KNNImputer</a:t>
+            </a:r>
+            <a:r>
+              <a:rPr sz="1200" b="0" i="0" dirty="0">
+                <a:solidFill>
+                  <a:srgbClr val="1F2D34"/>
+                </a:solidFill>
+                <a:latin typeface="Calibri"/>
+              </a:rPr>
+              <a:t>(</a:t>
+            </a:r>
+            <a:r>
+              <a:rPr sz="1200" b="0" i="0" dirty="0" err="1">
+                <a:solidFill>
+                  <a:srgbClr val="1F2D34"/>
+                </a:solidFill>
+                <a:latin typeface="Calibri"/>
+              </a:rPr>
+              <a:t>n_neighbors</a:t>
+            </a:r>
+            <a:r>
+              <a:rPr sz="1200" b="0" i="0" dirty="0">
+                <a:solidFill>
+                  <a:srgbClr val="1F2D34"/>
+                </a:solidFill>
+                <a:latin typeface="Calibri"/>
+              </a:rPr>
+              <a:t>=5, weights="distance")
+- </a:t>
+            </a:r>
+            <a:r>
+              <a:rPr sz="1200" b="0" i="0" dirty="0" err="1">
+                <a:solidFill>
+                  <a:srgbClr val="1F2D34"/>
+                </a:solidFill>
+                <a:latin typeface="Calibri"/>
+              </a:rPr>
+              <a:t>Estandarizacion</a:t>
+            </a:r>
+            <a:r>
+              <a:rPr sz="1200" b="0" i="0" dirty="0">
+                <a:solidFill>
+                  <a:srgbClr val="1F2D34"/>
+                </a:solidFill>
+                <a:latin typeface="Calibri"/>
+              </a:rPr>
+              <a:t> previa para </a:t>
+            </a:r>
+            <a:r>
+              <a:rPr sz="1200" b="0" i="0" dirty="0" err="1">
+                <a:solidFill>
+                  <a:srgbClr val="1F2D34"/>
+                </a:solidFill>
+                <a:latin typeface="Calibri"/>
+              </a:rPr>
+              <a:t>modelos</a:t>
+            </a:r>
+            <a:r>
+              <a:rPr sz="1200" b="0" i="0" dirty="0">
+                <a:solidFill>
+                  <a:srgbClr val="1F2D34"/>
+                </a:solidFill>
+                <a:latin typeface="Calibri"/>
+              </a:rPr>
+              <a:t> </a:t>
+            </a:r>
+            <a:r>
+              <a:rPr sz="1200" b="0" i="0" dirty="0" err="1">
+                <a:solidFill>
+                  <a:srgbClr val="1F2D34"/>
+                </a:solidFill>
+                <a:latin typeface="Calibri"/>
+              </a:rPr>
+              <a:t>sensibles</a:t>
+            </a:r>
+            <a:r>
+              <a:rPr sz="1200" b="0" i="0" dirty="0">
+                <a:solidFill>
+                  <a:srgbClr val="1F2D34"/>
+                </a:solidFill>
+                <a:latin typeface="Calibri"/>
+              </a:rPr>
+              <a:t> a </a:t>
+            </a:r>
+            <a:r>
+              <a:rPr sz="1200" b="0" i="0" dirty="0" err="1">
+                <a:solidFill>
+                  <a:srgbClr val="1F2D34"/>
+                </a:solidFill>
+                <a:latin typeface="Calibri"/>
+              </a:rPr>
+              <a:t>escala</a:t>
+            </a:r>
+            <a:r>
+              <a:rPr sz="1200" b="0" i="0" dirty="0">
+                <a:solidFill>
+                  <a:srgbClr val="1F2D34"/>
+                </a:solidFill>
+                <a:latin typeface="Calibri"/>
+              </a:rPr>
+              <a:t>
+- KNN vs. </a:t>
+            </a:r>
+            <a:r>
+              <a:rPr sz="1200" b="0" i="0" dirty="0" err="1">
+                <a:solidFill>
+                  <a:srgbClr val="1F2D34"/>
+                </a:solidFill>
+                <a:latin typeface="Calibri"/>
+              </a:rPr>
+              <a:t>imputacion</a:t>
+            </a:r>
+            <a:r>
+              <a:rPr sz="1200" b="0" i="0" dirty="0">
+                <a:solidFill>
+                  <a:srgbClr val="1F2D34"/>
+                </a:solidFill>
+                <a:latin typeface="Calibri"/>
+              </a:rPr>
+              <a:t> </a:t>
+            </a:r>
+            <a:r>
+              <a:rPr sz="1200" b="0" i="0" dirty="0" err="1">
+                <a:solidFill>
+                  <a:srgbClr val="1F2D34"/>
+                </a:solidFill>
+                <a:latin typeface="Calibri"/>
+              </a:rPr>
+              <a:t>iterativa</a:t>
+            </a:r>
+            <a:r>
+              <a:rPr sz="1200" b="0" i="0" dirty="0">
+                <a:solidFill>
+                  <a:srgbClr val="1F2D34"/>
+                </a:solidFill>
+                <a:latin typeface="Calibri"/>
+              </a:rPr>
+              <a:t> </a:t>
+            </a:r>
+            <a:r>
+              <a:rPr sz="1200" b="0" i="0" dirty="0" err="1">
+                <a:solidFill>
+                  <a:srgbClr val="1F2D34"/>
+                </a:solidFill>
+                <a:latin typeface="Calibri"/>
+              </a:rPr>
+              <a:t>comparados</a:t>
+            </a:r>
+            <a:r>
+              <a:rPr sz="1200" b="0" i="0" dirty="0">
+                <a:solidFill>
+                  <a:srgbClr val="1F2D34"/>
+                </a:solidFill>
+                <a:latin typeface="Calibri"/>
+              </a:rPr>
+              <a:t> </a:t>
+            </a:r>
+            <a:r>
+              <a:rPr sz="1200" b="0" i="0" dirty="0" err="1">
+                <a:solidFill>
+                  <a:srgbClr val="1F2D34"/>
+                </a:solidFill>
+                <a:latin typeface="Calibri"/>
+              </a:rPr>
+              <a:t>por</a:t>
+            </a:r>
+            <a:r>
+              <a:rPr sz="1200" b="0" i="0" dirty="0">
+                <a:solidFill>
+                  <a:srgbClr val="1F2D34"/>
+                </a:solidFill>
+                <a:latin typeface="Calibri"/>
+              </a:rPr>
+              <a:t> MAE </a:t>
+            </a:r>
+            <a:r>
+              <a:rPr sz="1200" b="0" i="0" dirty="0" err="1">
+                <a:solidFill>
+                  <a:srgbClr val="1F2D34"/>
+                </a:solidFill>
+                <a:latin typeface="Calibri"/>
+              </a:rPr>
+              <a:t>simulado</a:t>
+            </a:r>
+            <a:r>
+              <a:rPr sz="1200" b="0" i="0" dirty="0">
+                <a:solidFill>
+                  <a:srgbClr val="1F2D34"/>
+                </a:solidFill>
+                <a:latin typeface="Calibri"/>
+              </a:rPr>
+              <a:t>
+- KNN </a:t>
+            </a:r>
+            <a:r>
+              <a:rPr sz="1200" b="0" i="0" dirty="0" err="1">
+                <a:solidFill>
+                  <a:srgbClr val="1F2D34"/>
+                </a:solidFill>
+                <a:latin typeface="Calibri"/>
+              </a:rPr>
+              <a:t>obtuvo</a:t>
+            </a:r>
+            <a:r>
+              <a:rPr sz="1200" b="0" i="0" dirty="0">
+                <a:solidFill>
+                  <a:srgbClr val="1F2D34"/>
+                </a:solidFill>
+                <a:latin typeface="Calibri"/>
+              </a:rPr>
+              <a:t> </a:t>
+            </a:r>
+            <a:r>
+              <a:rPr sz="1200" b="0" i="0" dirty="0" err="1">
+                <a:solidFill>
+                  <a:srgbClr val="1F2D34"/>
+                </a:solidFill>
+                <a:latin typeface="Calibri"/>
+              </a:rPr>
+              <a:t>menor</a:t>
+            </a:r>
+            <a:r>
+              <a:rPr sz="1200" b="0" i="0" dirty="0">
+                <a:solidFill>
+                  <a:srgbClr val="1F2D34"/>
+                </a:solidFill>
+                <a:latin typeface="Calibri"/>
+              </a:rPr>
+              <a:t> MAE </a:t>
+            </a:r>
+            <a:r>
+              <a:rPr sz="1200" b="0" i="0" dirty="0" err="1">
+                <a:solidFill>
+                  <a:srgbClr val="1F2D34"/>
+                </a:solidFill>
+                <a:latin typeface="Calibri"/>
+              </a:rPr>
+              <a:t>en</a:t>
+            </a:r>
+            <a:r>
+              <a:rPr sz="1200" b="0" i="0" dirty="0">
+                <a:solidFill>
+                  <a:srgbClr val="1F2D34"/>
+                </a:solidFill>
+                <a:latin typeface="Calibri"/>
+              </a:rPr>
+              <a:t> las 5 variables </a:t>
+            </a:r>
+            <a:r>
+              <a:rPr sz="1200" b="0" i="0" dirty="0" err="1">
+                <a:solidFill>
+                  <a:srgbClr val="1F2D34"/>
+                </a:solidFill>
+                <a:latin typeface="Calibri"/>
+              </a:rPr>
+              <a:t>evaluadas</a:t>
+            </a:r>
+            <a:endParaRPr sz="790" b="0" i="0" dirty="0">
+              <a:solidFill>
+                <a:srgbClr val="1F2D34"/>
+              </a:solidFill>
+              <a:latin typeface="Calibri"/>
+            </a:endParaRPr>
           </a:p>
         </p:txBody>
       </p:sp>
@@ -12244,832 +10481,6 @@
 </file>
 
 <file path=ppt/slides/slide4.xml><?xml version="1.0" encoding="utf-8"?>
-<p:sld xmlns:a="http://schemas.openxmlformats.org/drawingml/2006/main" xmlns:r="http://schemas.openxmlformats.org/officeDocument/2006/relationships" xmlns:p="http://schemas.openxmlformats.org/presentationml/2006/main">
-  <p:cSld name="Slide 6">
-    <p:bg>
-      <p:bgPr>
-        <a:solidFill>
-          <a:srgbClr val="F5F8F9"/>
-        </a:solidFill>
-        <a:effectLst/>
-      </p:bgPr>
-    </p:bg>
-    <p:spTree>
-      <p:nvGrpSpPr>
-        <p:cNvPr id="1" name=""/>
-        <p:cNvGrpSpPr/>
-        <p:nvPr/>
-      </p:nvGrpSpPr>
-      <p:grpSpPr>
-        <a:xfrm>
-          <a:off x="0" y="0"/>
-          <a:ext cx="0" cy="0"/>
-          <a:chOff x="0" y="0"/>
-          <a:chExt cx="0" cy="0"/>
-        </a:xfrm>
-      </p:grpSpPr>
-      <p:sp>
-        <p:nvSpPr>
-          <p:cNvPr id="2" name="Shape 0"/>
-          <p:cNvSpPr/>
-          <p:nvPr/>
-        </p:nvSpPr>
-        <p:spPr>
-          <a:xfrm>
-            <a:off x="548640" y="457200"/>
-            <a:ext cx="566928" cy="566928"/>
-          </a:xfrm>
-          <a:prstGeom prst="roundRect">
-            <a:avLst>
-              <a:gd name="adj" fmla="val 16129"/>
-            </a:avLst>
-          </a:prstGeom>
-          <a:solidFill>
-            <a:srgbClr val="0E7C86"/>
-          </a:solidFill>
-          <a:ln/>
-        </p:spPr>
-        <p:txBody>
-          <a:bodyPr/>
-          <a:lstStyle/>
-          <a:p>
-            <a:endParaRPr/>
-          </a:p>
-        </p:txBody>
-      </p:sp>
-      <p:sp>
-        <p:nvSpPr>
-          <p:cNvPr id="3" name="Text 1"/>
-          <p:cNvSpPr/>
-          <p:nvPr/>
-        </p:nvSpPr>
-        <p:spPr>
-          <a:xfrm>
-            <a:off x="548640" y="457200"/>
-            <a:ext cx="566928" cy="566928"/>
-          </a:xfrm>
-          <a:prstGeom prst="rect">
-            <a:avLst/>
-          </a:prstGeom>
-          <a:noFill/>
-          <a:ln/>
-        </p:spPr>
-        <p:txBody>
-          <a:bodyPr wrap="square" lIns="0" tIns="0" rIns="0" bIns="0" rtlCol="0" anchor="ctr"/>
-          <a:lstStyle/>
-          <a:p>
-            <a:pPr marL="0" indent="0" algn="ctr">
-              <a:buNone/>
-            </a:pPr>
-            <a:r>
-              <a:rPr sz="1800" b="1">
-                <a:solidFill>
-                  <a:srgbClr val="FFFFFF"/>
-                </a:solidFill>
-                <a:latin typeface="Trebuchet MS"/>
-              </a:rPr>
-              <a:t>03</a:t>
-            </a:r>
-            <a:endParaRPr lang="en-US" sz="1800" dirty="0"/>
-          </a:p>
-        </p:txBody>
-      </p:sp>
-      <p:sp>
-        <p:nvSpPr>
-          <p:cNvPr id="4" name="Text 2"/>
-          <p:cNvSpPr/>
-          <p:nvPr/>
-        </p:nvSpPr>
-        <p:spPr>
-          <a:xfrm>
-            <a:off x="1280160" y="457200"/>
-            <a:ext cx="9144000" cy="256032"/>
-          </a:xfrm>
-          <a:prstGeom prst="rect">
-            <a:avLst/>
-          </a:prstGeom>
-          <a:noFill/>
-          <a:ln/>
-        </p:spPr>
-        <p:txBody>
-          <a:bodyPr wrap="square" lIns="0" tIns="0" rIns="0" bIns="0" rtlCol="0" anchor="ctr"/>
-          <a:lstStyle/>
-          <a:p>
-            <a:pPr marL="0" indent="0">
-              <a:buNone/>
-            </a:pPr>
-            <a:r>
-              <a:rPr lang="en-US" sz="1150" b="1" kern="0" spc="200" dirty="0">
-                <a:solidFill>
-                  <a:srgbClr val="0E7C86"/>
-                </a:solidFill>
-                <a:latin typeface="Trebuchet MS" pitchFamily="34" charset="0"/>
-                <a:ea typeface="Trebuchet MS" pitchFamily="34" charset="-122"/>
-                <a:cs typeface="Trebuchet MS" pitchFamily="34" charset="-120"/>
-              </a:rPr>
-              <a:t>ANALISIS EXPLORATORIO PARA MODELAR</a:t>
-            </a:r>
-            <a:endParaRPr lang="en-US" sz="1150" dirty="0"/>
-          </a:p>
-        </p:txBody>
-      </p:sp>
-      <p:sp>
-        <p:nvSpPr>
-          <p:cNvPr id="5" name="Text 3"/>
-          <p:cNvSpPr/>
-          <p:nvPr/>
-        </p:nvSpPr>
-        <p:spPr>
-          <a:xfrm>
-            <a:off x="1280160" y="694944"/>
-            <a:ext cx="10362895" cy="566928"/>
-          </a:xfrm>
-          <a:prstGeom prst="rect">
-            <a:avLst/>
-          </a:prstGeom>
-          <a:noFill/>
-          <a:ln/>
-        </p:spPr>
-        <p:txBody>
-          <a:bodyPr wrap="square" lIns="0" tIns="0" rIns="0" bIns="0" rtlCol="0" anchor="ctr"/>
-          <a:lstStyle/>
-          <a:p>
-            <a:pPr marL="0" indent="0">
-              <a:buNone/>
-            </a:pPr>
-            <a:r>
-              <a:rPr lang="en-US" sz="2700" b="1" dirty="0">
-                <a:solidFill>
-                  <a:srgbClr val="1F2D34"/>
-                </a:solidFill>
-                <a:latin typeface="Trebuchet MS" pitchFamily="34" charset="0"/>
-                <a:ea typeface="Trebuchet MS" pitchFamily="34" charset="-122"/>
-                <a:cs typeface="Trebuchet MS" pitchFamily="34" charset="-120"/>
-              </a:rPr>
-              <a:t>Hallazgos que influyeron en decisiones tecnicas</a:t>
-            </a:r>
-            <a:endParaRPr lang="en-US" sz="2700" dirty="0"/>
-          </a:p>
-        </p:txBody>
-      </p:sp>
-      <p:sp>
-        <p:nvSpPr>
-          <p:cNvPr id="6" name="Text 4"/>
-          <p:cNvSpPr/>
-          <p:nvPr/>
-        </p:nvSpPr>
-        <p:spPr>
-          <a:xfrm>
-            <a:off x="548640" y="6473952"/>
-            <a:ext cx="7315200" cy="274320"/>
-          </a:xfrm>
-          <a:prstGeom prst="rect">
-            <a:avLst/>
-          </a:prstGeom>
-          <a:noFill/>
-          <a:ln/>
-        </p:spPr>
-        <p:txBody>
-          <a:bodyPr wrap="square" lIns="0" tIns="0" rIns="0" bIns="0" rtlCol="0" anchor="ctr"/>
-          <a:lstStyle/>
-          <a:p>
-            <a:pPr marL="0" indent="0">
-              <a:buNone/>
-            </a:pPr>
-            <a:r>
-              <a:rPr lang="en-US" sz="900" dirty="0">
-                <a:solidFill>
-                  <a:srgbClr val="6A7A82"/>
-                </a:solidFill>
-                <a:latin typeface="Calibri" pitchFamily="34" charset="0"/>
-                <a:ea typeface="Calibri" pitchFamily="34" charset="-122"/>
-                <a:cs typeface="Calibri" pitchFamily="34" charset="-120"/>
-              </a:rPr>
-              <a:t>Pipeline de clasificacion de churn  ·  Grupo 1</a:t>
-            </a:r>
-            <a:endParaRPr lang="en-US" sz="900" dirty="0"/>
-          </a:p>
-        </p:txBody>
-      </p:sp>
-      <p:sp>
-        <p:nvSpPr>
-          <p:cNvPr id="7" name="Text 5"/>
-          <p:cNvSpPr/>
-          <p:nvPr/>
-        </p:nvSpPr>
-        <p:spPr>
-          <a:xfrm>
-            <a:off x="10545775" y="6473952"/>
-            <a:ext cx="1097280" cy="274320"/>
-          </a:xfrm>
-          <a:prstGeom prst="rect">
-            <a:avLst/>
-          </a:prstGeom>
-          <a:noFill/>
-          <a:ln/>
-        </p:spPr>
-        <p:txBody>
-          <a:bodyPr wrap="square" lIns="0" tIns="0" rIns="0" bIns="0" rtlCol="0" anchor="ctr"/>
-          <a:lstStyle/>
-          <a:p>
-            <a:pPr marL="0" indent="0" algn="r">
-              <a:buNone/>
-            </a:pPr>
-            <a:r>
-              <a:rPr sz="900">
-                <a:solidFill>
-                  <a:srgbClr val="6A7A82"/>
-                </a:solidFill>
-                <a:latin typeface="Calibri"/>
-              </a:rPr>
-              <a:t>3 / 11</a:t>
-            </a:r>
-            <a:endParaRPr lang="en-US" sz="900" dirty="0"/>
-          </a:p>
-        </p:txBody>
-      </p:sp>
-      <p:sp>
-        <p:nvSpPr>
-          <p:cNvPr id="8" name="Rectangle 7"/>
-          <p:cNvSpPr/>
-          <p:nvPr/>
-        </p:nvSpPr>
-        <p:spPr>
-          <a:xfrm>
-            <a:off x="548640" y="1627632"/>
-            <a:ext cx="3886200" cy="3520440"/>
-          </a:xfrm>
-          <a:prstGeom prst="rect">
-            <a:avLst/>
-          </a:prstGeom>
-          <a:solidFill>
-            <a:srgbClr val="FFFFFF"/>
-          </a:solidFill>
-          <a:ln w="12700">
-            <a:solidFill>
-              <a:srgbClr val="DCE6E9"/>
-            </a:solidFill>
-          </a:ln>
-        </p:spPr>
-        <p:style>
-          <a:lnRef idx="1">
-            <a:schemeClr val="accent1"/>
-          </a:lnRef>
-          <a:fillRef idx="3">
-            <a:schemeClr val="accent1"/>
-          </a:fillRef>
-          <a:effectRef idx="2">
-            <a:schemeClr val="accent1"/>
-          </a:effectRef>
-          <a:fontRef idx="minor">
-            <a:schemeClr val="lt1"/>
-          </a:fontRef>
-        </p:style>
-        <p:txBody>
-          <a:bodyPr rtlCol="0" anchor="ctr"/>
-          <a:lstStyle/>
-          <a:p>
-            <a:pPr algn="ctr"/>
-            <a:endParaRPr/>
-          </a:p>
-        </p:txBody>
-      </p:sp>
-      <p:sp>
-        <p:nvSpPr>
-          <p:cNvPr id="9" name="Oval 8"/>
-          <p:cNvSpPr/>
-          <p:nvPr/>
-        </p:nvSpPr>
-        <p:spPr>
-          <a:xfrm>
-            <a:off x="822960" y="1975104"/>
-            <a:ext cx="100584" cy="100584"/>
-          </a:xfrm>
-          <a:prstGeom prst="ellipse">
-            <a:avLst/>
-          </a:prstGeom>
-          <a:solidFill>
-            <a:srgbClr val="E8833A"/>
-          </a:solidFill>
-          <a:ln>
-            <a:solidFill>
-              <a:srgbClr val="E8833A"/>
-            </a:solidFill>
-          </a:ln>
-        </p:spPr>
-        <p:style>
-          <a:lnRef idx="1">
-            <a:schemeClr val="accent1"/>
-          </a:lnRef>
-          <a:fillRef idx="3">
-            <a:schemeClr val="accent1"/>
-          </a:fillRef>
-          <a:effectRef idx="2">
-            <a:schemeClr val="accent1"/>
-          </a:effectRef>
-          <a:fontRef idx="minor">
-            <a:schemeClr val="lt1"/>
-          </a:fontRef>
-        </p:style>
-        <p:txBody>
-          <a:bodyPr rtlCol="0" anchor="ctr"/>
-          <a:lstStyle/>
-          <a:p>
-            <a:pPr algn="ctr"/>
-            <a:endParaRPr/>
-          </a:p>
-        </p:txBody>
-      </p:sp>
-      <p:sp>
-        <p:nvSpPr>
-          <p:cNvPr id="10" name="TextBox 9"/>
-          <p:cNvSpPr txBox="1"/>
-          <p:nvPr/>
-        </p:nvSpPr>
-        <p:spPr>
-          <a:xfrm>
-            <a:off x="1078992" y="1901952"/>
-            <a:ext cx="3081528" cy="201168"/>
-          </a:xfrm>
-          <a:prstGeom prst="rect">
-            <a:avLst/>
-          </a:prstGeom>
-          <a:noFill/>
-        </p:spPr>
-        <p:txBody>
-          <a:bodyPr wrap="none" lIns="0" tIns="0" rIns="0" bIns="0">
-            <a:spAutoFit/>
-          </a:bodyPr>
-          <a:lstStyle/>
-          <a:p>
-            <a:r>
-              <a:rPr sz="1019" b="1">
-                <a:solidFill>
-                  <a:srgbClr val="1F2D34"/>
-                </a:solidFill>
-                <a:latin typeface="Calibri"/>
-              </a:rPr>
-              <a:t>Tenure  </a:t>
-            </a:r>
-            <a:r>
-              <a:rPr sz="730">
-                <a:solidFill>
-                  <a:srgbClr val="6A7A82"/>
-                </a:solidFill>
-                <a:latin typeface="Calibri"/>
-              </a:rPr>
-              <a:t>mayor diferencia entre clases</a:t>
-            </a:r>
-          </a:p>
-        </p:txBody>
-      </p:sp>
-      <p:sp>
-        <p:nvSpPr>
-          <p:cNvPr id="11" name="Oval 10"/>
-          <p:cNvSpPr/>
-          <p:nvPr/>
-        </p:nvSpPr>
-        <p:spPr>
-          <a:xfrm>
-            <a:off x="822960" y="2505456"/>
-            <a:ext cx="100584" cy="100584"/>
-          </a:xfrm>
-          <a:prstGeom prst="ellipse">
-            <a:avLst/>
-          </a:prstGeom>
-          <a:solidFill>
-            <a:srgbClr val="E8833A"/>
-          </a:solidFill>
-          <a:ln>
-            <a:solidFill>
-              <a:srgbClr val="E8833A"/>
-            </a:solidFill>
-          </a:ln>
-        </p:spPr>
-        <p:style>
-          <a:lnRef idx="1">
-            <a:schemeClr val="accent1"/>
-          </a:lnRef>
-          <a:fillRef idx="3">
-            <a:schemeClr val="accent1"/>
-          </a:fillRef>
-          <a:effectRef idx="2">
-            <a:schemeClr val="accent1"/>
-          </a:effectRef>
-          <a:fontRef idx="minor">
-            <a:schemeClr val="lt1"/>
-          </a:fontRef>
-        </p:style>
-        <p:txBody>
-          <a:bodyPr rtlCol="0" anchor="ctr"/>
-          <a:lstStyle/>
-          <a:p>
-            <a:pPr algn="ctr"/>
-            <a:endParaRPr/>
-          </a:p>
-        </p:txBody>
-      </p:sp>
-      <p:sp>
-        <p:nvSpPr>
-          <p:cNvPr id="12" name="TextBox 11"/>
-          <p:cNvSpPr txBox="1"/>
-          <p:nvPr/>
-        </p:nvSpPr>
-        <p:spPr>
-          <a:xfrm>
-            <a:off x="1078992" y="2432304"/>
-            <a:ext cx="3081528" cy="201168"/>
-          </a:xfrm>
-          <a:prstGeom prst="rect">
-            <a:avLst/>
-          </a:prstGeom>
-          <a:noFill/>
-        </p:spPr>
-        <p:txBody>
-          <a:bodyPr wrap="none" lIns="0" tIns="0" rIns="0" bIns="0">
-            <a:spAutoFit/>
-          </a:bodyPr>
-          <a:lstStyle/>
-          <a:p>
-            <a:r>
-              <a:rPr sz="1019" b="1">
-                <a:solidFill>
-                  <a:srgbClr val="1F2D34"/>
-                </a:solidFill>
-                <a:latin typeface="Calibri"/>
-              </a:rPr>
-              <a:t>Complain  </a:t>
-            </a:r>
-            <a:r>
-              <a:rPr sz="730">
-                <a:solidFill>
-                  <a:srgbClr val="6A7A82"/>
-                </a:solidFill>
-                <a:latin typeface="Calibri"/>
-              </a:rPr>
-              <a:t>fuerte asociacion, temporalidad no confirmada</a:t>
-            </a:r>
-          </a:p>
-        </p:txBody>
-      </p:sp>
-      <p:sp>
-        <p:nvSpPr>
-          <p:cNvPr id="13" name="Oval 12"/>
-          <p:cNvSpPr/>
-          <p:nvPr/>
-        </p:nvSpPr>
-        <p:spPr>
-          <a:xfrm>
-            <a:off x="822960" y="3035808"/>
-            <a:ext cx="100584" cy="100584"/>
-          </a:xfrm>
-          <a:prstGeom prst="ellipse">
-            <a:avLst/>
-          </a:prstGeom>
-          <a:solidFill>
-            <a:srgbClr val="E8833A"/>
-          </a:solidFill>
-          <a:ln>
-            <a:solidFill>
-              <a:srgbClr val="E8833A"/>
-            </a:solidFill>
-          </a:ln>
-        </p:spPr>
-        <p:style>
-          <a:lnRef idx="1">
-            <a:schemeClr val="accent1"/>
-          </a:lnRef>
-          <a:fillRef idx="3">
-            <a:schemeClr val="accent1"/>
-          </a:fillRef>
-          <a:effectRef idx="2">
-            <a:schemeClr val="accent1"/>
-          </a:effectRef>
-          <a:fontRef idx="minor">
-            <a:schemeClr val="lt1"/>
-          </a:fontRef>
-        </p:style>
-        <p:txBody>
-          <a:bodyPr rtlCol="0" anchor="ctr"/>
-          <a:lstStyle/>
-          <a:p>
-            <a:pPr algn="ctr"/>
-            <a:endParaRPr/>
-          </a:p>
-        </p:txBody>
-      </p:sp>
-      <p:sp>
-        <p:nvSpPr>
-          <p:cNvPr id="14" name="TextBox 13"/>
-          <p:cNvSpPr txBox="1"/>
-          <p:nvPr/>
-        </p:nvSpPr>
-        <p:spPr>
-          <a:xfrm>
-            <a:off x="1078992" y="2962656"/>
-            <a:ext cx="3081528" cy="201168"/>
-          </a:xfrm>
-          <a:prstGeom prst="rect">
-            <a:avLst/>
-          </a:prstGeom>
-          <a:noFill/>
-        </p:spPr>
-        <p:txBody>
-          <a:bodyPr wrap="none" lIns="0" tIns="0" rIns="0" bIns="0">
-            <a:spAutoFit/>
-          </a:bodyPr>
-          <a:lstStyle/>
-          <a:p>
-            <a:r>
-              <a:rPr sz="1019" b="1">
-                <a:solidFill>
-                  <a:srgbClr val="1F2D34"/>
-                </a:solidFill>
-                <a:latin typeface="Calibri"/>
-              </a:rPr>
-              <a:t>DaySinceLastOrder  </a:t>
-            </a:r>
-            <a:r>
-              <a:rPr sz="730">
-                <a:solidFill>
-                  <a:srgbClr val="6A7A82"/>
-                </a:solidFill>
-                <a:latin typeface="Calibri"/>
-              </a:rPr>
-              <a:t>relacion contraintuitiva, riesgo temporal</a:t>
-            </a:r>
-          </a:p>
-        </p:txBody>
-      </p:sp>
-      <p:sp>
-        <p:nvSpPr>
-          <p:cNvPr id="15" name="Oval 14"/>
-          <p:cNvSpPr/>
-          <p:nvPr/>
-        </p:nvSpPr>
-        <p:spPr>
-          <a:xfrm>
-            <a:off x="822960" y="3566160"/>
-            <a:ext cx="100584" cy="100584"/>
-          </a:xfrm>
-          <a:prstGeom prst="ellipse">
-            <a:avLst/>
-          </a:prstGeom>
-          <a:solidFill>
-            <a:srgbClr val="0E7C86"/>
-          </a:solidFill>
-          <a:ln>
-            <a:solidFill>
-              <a:srgbClr val="0E7C86"/>
-            </a:solidFill>
-          </a:ln>
-        </p:spPr>
-        <p:style>
-          <a:lnRef idx="1">
-            <a:schemeClr val="accent1"/>
-          </a:lnRef>
-          <a:fillRef idx="3">
-            <a:schemeClr val="accent1"/>
-          </a:fillRef>
-          <a:effectRef idx="2">
-            <a:schemeClr val="accent1"/>
-          </a:effectRef>
-          <a:fontRef idx="minor">
-            <a:schemeClr val="lt1"/>
-          </a:fontRef>
-        </p:style>
-        <p:txBody>
-          <a:bodyPr rtlCol="0" anchor="ctr"/>
-          <a:lstStyle/>
-          <a:p>
-            <a:pPr algn="ctr"/>
-            <a:endParaRPr/>
-          </a:p>
-        </p:txBody>
-      </p:sp>
-      <p:sp>
-        <p:nvSpPr>
-          <p:cNvPr id="16" name="TextBox 15"/>
-          <p:cNvSpPr txBox="1"/>
-          <p:nvPr/>
-        </p:nvSpPr>
-        <p:spPr>
-          <a:xfrm>
-            <a:off x="1078992" y="3493008"/>
-            <a:ext cx="3081528" cy="201168"/>
-          </a:xfrm>
-          <a:prstGeom prst="rect">
-            <a:avLst/>
-          </a:prstGeom>
-          <a:noFill/>
-        </p:spPr>
-        <p:txBody>
-          <a:bodyPr wrap="none" lIns="0" tIns="0" rIns="0" bIns="0">
-            <a:spAutoFit/>
-          </a:bodyPr>
-          <a:lstStyle/>
-          <a:p>
-            <a:r>
-              <a:rPr sz="1019" b="1">
-                <a:solidFill>
-                  <a:srgbClr val="1F2D34"/>
-                </a:solidFill>
-                <a:latin typeface="Calibri"/>
-              </a:rPr>
-              <a:t>CashbackAmount  </a:t>
-            </a:r>
-            <a:r>
-              <a:rPr sz="730">
-                <a:solidFill>
-                  <a:srgbClr val="6A7A82"/>
-                </a:solidFill>
-                <a:latin typeface="Calibri"/>
-              </a:rPr>
-              <a:t>asociacion relevante</a:t>
-            </a:r>
-          </a:p>
-        </p:txBody>
-      </p:sp>
-      <p:sp>
-        <p:nvSpPr>
-          <p:cNvPr id="17" name="Oval 16"/>
-          <p:cNvSpPr/>
-          <p:nvPr/>
-        </p:nvSpPr>
-        <p:spPr>
-          <a:xfrm>
-            <a:off x="822960" y="4096512"/>
-            <a:ext cx="100584" cy="100584"/>
-          </a:xfrm>
-          <a:prstGeom prst="ellipse">
-            <a:avLst/>
-          </a:prstGeom>
-          <a:solidFill>
-            <a:srgbClr val="0E7C86"/>
-          </a:solidFill>
-          <a:ln>
-            <a:solidFill>
-              <a:srgbClr val="0E7C86"/>
-            </a:solidFill>
-          </a:ln>
-        </p:spPr>
-        <p:style>
-          <a:lnRef idx="1">
-            <a:schemeClr val="accent1"/>
-          </a:lnRef>
-          <a:fillRef idx="3">
-            <a:schemeClr val="accent1"/>
-          </a:fillRef>
-          <a:effectRef idx="2">
-            <a:schemeClr val="accent1"/>
-          </a:effectRef>
-          <a:fontRef idx="minor">
-            <a:schemeClr val="lt1"/>
-          </a:fontRef>
-        </p:style>
-        <p:txBody>
-          <a:bodyPr rtlCol="0" anchor="ctr"/>
-          <a:lstStyle/>
-          <a:p>
-            <a:pPr algn="ctr"/>
-            <a:endParaRPr/>
-          </a:p>
-        </p:txBody>
-      </p:sp>
-      <p:sp>
-        <p:nvSpPr>
-          <p:cNvPr id="18" name="TextBox 17"/>
-          <p:cNvSpPr txBox="1"/>
-          <p:nvPr/>
-        </p:nvSpPr>
-        <p:spPr>
-          <a:xfrm>
-            <a:off x="1078992" y="4023360"/>
-            <a:ext cx="3081528" cy="201168"/>
-          </a:xfrm>
-          <a:prstGeom prst="rect">
-            <a:avLst/>
-          </a:prstGeom>
-          <a:noFill/>
-        </p:spPr>
-        <p:txBody>
-          <a:bodyPr wrap="none" lIns="0" tIns="0" rIns="0" bIns="0">
-            <a:spAutoFit/>
-          </a:bodyPr>
-          <a:lstStyle/>
-          <a:p>
-            <a:r>
-              <a:rPr sz="1019" b="1">
-                <a:solidFill>
-                  <a:srgbClr val="1F2D34"/>
-                </a:solidFill>
-                <a:latin typeface="Calibri"/>
-              </a:rPr>
-              <a:t>Categoricas  </a:t>
-            </a:r>
-            <a:r>
-              <a:rPr sz="730">
-                <a:solidFill>
-                  <a:srgbClr val="6A7A82"/>
-                </a:solidFill>
-                <a:latin typeface="Calibri"/>
-              </a:rPr>
-              <a:t>diferencias entre segmentos</a:t>
-            </a:r>
-          </a:p>
-        </p:txBody>
-      </p:sp>
-      <p:sp>
-        <p:nvSpPr>
-          <p:cNvPr id="19" name="TextBox 18"/>
-          <p:cNvSpPr txBox="1"/>
-          <p:nvPr/>
-        </p:nvSpPr>
-        <p:spPr>
-          <a:xfrm>
-            <a:off x="548640" y="5413248"/>
-            <a:ext cx="3886200" cy="228600"/>
-          </a:xfrm>
-          <a:prstGeom prst="rect">
-            <a:avLst/>
-          </a:prstGeom>
-          <a:noFill/>
-        </p:spPr>
-        <p:txBody>
-          <a:bodyPr wrap="none" lIns="0" tIns="0" rIns="0" bIns="0">
-            <a:spAutoFit/>
-          </a:bodyPr>
-          <a:lstStyle/>
-          <a:p>
-            <a:r>
-              <a:rPr sz="760" b="0" i="1">
-                <a:solidFill>
-                  <a:srgbClr val="0E7C86"/>
-                </a:solidFill>
-                <a:latin typeface="Calibri"/>
-              </a:rPr>
-              <a:t>Metodos: Mann-Whitney U / Chi-cuadrado / Rank-biserial / Cramer's V</a:t>
-            </a:r>
-          </a:p>
-        </p:txBody>
-      </p:sp>
-      <p:pic>
-        <p:nvPicPr>
-          <p:cNvPr id="20" name="Picture 19" descr="h1_tenure.png"/>
-          <p:cNvPicPr>
-            <a:picLocks noChangeAspect="1"/>
-          </p:cNvPicPr>
-          <p:nvPr/>
-        </p:nvPicPr>
-        <p:blipFill>
-          <a:blip r:embed="rId3"/>
-          <a:stretch>
-            <a:fillRect/>
-          </a:stretch>
-        </p:blipFill>
-        <p:spPr>
-          <a:xfrm>
-            <a:off x="5640973" y="1508760"/>
-            <a:ext cx="5040092" cy="2029968"/>
-          </a:xfrm>
-          <a:prstGeom prst="rect">
-            <a:avLst/>
-          </a:prstGeom>
-        </p:spPr>
-      </p:pic>
-      <p:pic>
-        <p:nvPicPr>
-          <p:cNvPr id="21" name="Picture 20" descr="h2_complain.png"/>
-          <p:cNvPicPr>
-            <a:picLocks noChangeAspect="1"/>
-          </p:cNvPicPr>
-          <p:nvPr/>
-        </p:nvPicPr>
-        <p:blipFill>
-          <a:blip r:embed="rId4"/>
-          <a:stretch>
-            <a:fillRect/>
-          </a:stretch>
-        </p:blipFill>
-        <p:spPr>
-          <a:xfrm>
-            <a:off x="5494199" y="3767328"/>
-            <a:ext cx="5333641" cy="2029968"/>
-          </a:xfrm>
-          <a:prstGeom prst="rect">
-            <a:avLst/>
-          </a:prstGeom>
-        </p:spPr>
-      </p:pic>
-    </p:spTree>
-  </p:cSld>
-  <p:clrMapOvr>
-    <a:masterClrMapping/>
-  </p:clrMapOvr>
-</p:sld>
-</file>
-
-<file path=ppt/slides/slide5.xml><?xml version="1.0" encoding="utf-8"?>
 <p:sld xmlns:a="http://schemas.openxmlformats.org/drawingml/2006/main" xmlns:r="http://schemas.openxmlformats.org/officeDocument/2006/relationships" xmlns:p="http://schemas.openxmlformats.org/presentationml/2006/main">
   <p:cSld name="Slide 7">
     <p:bg>
@@ -13148,13 +10559,22 @@
               <a:buNone/>
             </a:pPr>
             <a:r>
-              <a:rPr sz="1800" b="1">
+              <a:rPr sz="1800" b="1" dirty="0">
                 <a:solidFill>
                   <a:srgbClr val="FFFFFF"/>
                 </a:solidFill>
                 <a:latin typeface="Trebuchet MS"/>
               </a:rPr>
-              <a:t>04</a:t>
+              <a:t>0</a:t>
+            </a:r>
+            <a:r>
+              <a:rPr lang="es-AR" sz="1800" b="1" dirty="0">
+                <a:solidFill>
+                  <a:srgbClr val="FFFFFF"/>
+                </a:solidFill>
+                <a:latin typeface="Trebuchet MS"/>
+              </a:rPr>
+              <a:t>3</a:t>
             </a:r>
             <a:endParaRPr lang="en-US" sz="1800" dirty="0"/>
           </a:p>
@@ -14448,7 +11868,7 @@
 </p:sld>
 </file>
 
-<file path=ppt/slides/slide6.xml><?xml version="1.0" encoding="utf-8"?>
+<file path=ppt/slides/slide5.xml><?xml version="1.0" encoding="utf-8"?>
 <p:sld xmlns:a="http://schemas.openxmlformats.org/drawingml/2006/main" xmlns:r="http://schemas.openxmlformats.org/officeDocument/2006/relationships" xmlns:p="http://schemas.openxmlformats.org/presentationml/2006/main">
   <p:cSld name="Slide 8">
     <p:bg>
@@ -14527,13 +11947,22 @@
               <a:buNone/>
             </a:pPr>
             <a:r>
-              <a:rPr sz="1800" b="1">
+              <a:rPr sz="1800" b="1" dirty="0">
                 <a:solidFill>
                   <a:srgbClr val="FFFFFF"/>
                 </a:solidFill>
                 <a:latin typeface="Trebuchet MS"/>
               </a:rPr>
-              <a:t>05</a:t>
+              <a:t>0</a:t>
+            </a:r>
+            <a:r>
+              <a:rPr lang="es-AR" sz="1800" b="1" dirty="0">
+                <a:solidFill>
+                  <a:srgbClr val="FFFFFF"/>
+                </a:solidFill>
+                <a:latin typeface="Trebuchet MS"/>
+              </a:rPr>
+              <a:t>4</a:t>
             </a:r>
             <a:endParaRPr lang="en-US" sz="1800" dirty="0"/>
           </a:p>
@@ -15370,7 +12799,7 @@
 </p:sld>
 </file>
 
-<file path=ppt/slides/slide7.xml><?xml version="1.0" encoding="utf-8"?>
+<file path=ppt/slides/slide6.xml><?xml version="1.0" encoding="utf-8"?>
 <p:sld xmlns:a="http://schemas.openxmlformats.org/drawingml/2006/main" xmlns:r="http://schemas.openxmlformats.org/officeDocument/2006/relationships" xmlns:p="http://schemas.openxmlformats.org/presentationml/2006/main">
   <p:cSld name="Slide 10">
     <p:bg>
@@ -15449,13 +12878,22 @@
               <a:buNone/>
             </a:pPr>
             <a:r>
-              <a:rPr sz="1800" b="1">
+              <a:rPr sz="1800" b="1" dirty="0">
                 <a:solidFill>
                   <a:srgbClr val="FFFFFF"/>
                 </a:solidFill>
                 <a:latin typeface="Trebuchet MS"/>
               </a:rPr>
-              <a:t>06</a:t>
+              <a:t>0</a:t>
+            </a:r>
+            <a:r>
+              <a:rPr lang="es-AR" sz="1800" b="1" dirty="0">
+                <a:solidFill>
+                  <a:srgbClr val="FFFFFF"/>
+                </a:solidFill>
+                <a:latin typeface="Trebuchet MS"/>
+              </a:rPr>
+              <a:t>5</a:t>
             </a:r>
             <a:endParaRPr lang="en-US" sz="1800" dirty="0"/>
           </a:p>
@@ -16407,7 +13845,7 @@
 </p:sld>
 </file>
 
-<file path=ppt/slides/slide8.xml><?xml version="1.0" encoding="utf-8"?>
+<file path=ppt/slides/slide7.xml><?xml version="1.0" encoding="utf-8"?>
 <p:sld xmlns:a="http://schemas.openxmlformats.org/drawingml/2006/main" xmlns:r="http://schemas.openxmlformats.org/officeDocument/2006/relationships" xmlns:p="http://schemas.openxmlformats.org/presentationml/2006/main">
   <p:cSld name="Slide 11">
     <p:bg>
@@ -16486,13 +13924,22 @@
               <a:buNone/>
             </a:pPr>
             <a:r>
-              <a:rPr sz="1800" b="1">
+              <a:rPr sz="1800" b="1" dirty="0">
                 <a:solidFill>
                   <a:srgbClr val="FFFFFF"/>
                 </a:solidFill>
                 <a:latin typeface="Trebuchet MS"/>
               </a:rPr>
-              <a:t>07</a:t>
+              <a:t>0</a:t>
+            </a:r>
+            <a:r>
+              <a:rPr lang="es-AR" sz="1800" b="1" dirty="0">
+                <a:solidFill>
+                  <a:srgbClr val="FFFFFF"/>
+                </a:solidFill>
+                <a:latin typeface="Trebuchet MS"/>
+              </a:rPr>
+              <a:t>6</a:t>
             </a:r>
             <a:endParaRPr lang="en-US" sz="1800" dirty="0"/>
           </a:p>
@@ -17431,7 +14878,7 @@
 </p:sld>
 </file>
 
-<file path=ppt/slides/slide9.xml><?xml version="1.0" encoding="utf-8"?>
+<file path=ppt/slides/slide8.xml><?xml version="1.0" encoding="utf-8"?>
 <p:sld xmlns:a="http://schemas.openxmlformats.org/drawingml/2006/main" xmlns:r="http://schemas.openxmlformats.org/officeDocument/2006/relationships" xmlns:p="http://schemas.openxmlformats.org/presentationml/2006/main">
   <p:cSld name="Slide 12">
     <p:bg>
@@ -17510,13 +14957,22 @@
               <a:buNone/>
             </a:pPr>
             <a:r>
-              <a:rPr sz="1800" b="1">
+              <a:rPr sz="1800" b="1" dirty="0">
                 <a:solidFill>
                   <a:srgbClr val="FFFFFF"/>
                 </a:solidFill>
                 <a:latin typeface="Trebuchet MS"/>
               </a:rPr>
-              <a:t>08</a:t>
+              <a:t>0</a:t>
+            </a:r>
+            <a:r>
+              <a:rPr lang="es-AR" sz="1800" b="1" dirty="0">
+                <a:solidFill>
+                  <a:srgbClr val="FFFFFF"/>
+                </a:solidFill>
+                <a:latin typeface="Trebuchet MS"/>
+              </a:rPr>
+              <a:t>7</a:t>
             </a:r>
             <a:endParaRPr lang="en-US" sz="1800" dirty="0"/>
           </a:p>
@@ -19929,6 +17385,2506 @@
                 <a:cs typeface="Calibri" pitchFamily="34" charset="-120"/>
               </a:rPr>
               <a:t>Excluir Complain y DaySinceLastOrder por temporalidad no garantizada. Medido sobre RF por ser el modelo mas reactivo a ambas.</a:t>
+            </a:r>
+            <a:endParaRPr lang="en-US" sz="1150" dirty="0"/>
+          </a:p>
+        </p:txBody>
+      </p:sp>
+    </p:spTree>
+  </p:cSld>
+  <p:clrMapOvr>
+    <a:masterClrMapping/>
+  </p:clrMapOvr>
+</p:sld>
+</file>
+
+<file path=ppt/slides/slide9.xml><?xml version="1.0" encoding="utf-8"?>
+<p:sld xmlns:a="http://schemas.openxmlformats.org/drawingml/2006/main" xmlns:r="http://schemas.openxmlformats.org/officeDocument/2006/relationships" xmlns:p="http://schemas.openxmlformats.org/presentationml/2006/main">
+  <p:cSld name="Slide 13">
+    <p:bg>
+      <p:bgPr>
+        <a:solidFill>
+          <a:srgbClr val="F5F8F9"/>
+        </a:solidFill>
+        <a:effectLst/>
+      </p:bgPr>
+    </p:bg>
+    <p:spTree>
+      <p:nvGrpSpPr>
+        <p:cNvPr id="1" name=""/>
+        <p:cNvGrpSpPr/>
+        <p:nvPr/>
+      </p:nvGrpSpPr>
+      <p:grpSpPr>
+        <a:xfrm>
+          <a:off x="0" y="0"/>
+          <a:ext cx="0" cy="0"/>
+          <a:chOff x="0" y="0"/>
+          <a:chExt cx="0" cy="0"/>
+        </a:xfrm>
+      </p:grpSpPr>
+      <p:sp>
+        <p:nvSpPr>
+          <p:cNvPr id="2" name="Shape 0"/>
+          <p:cNvSpPr/>
+          <p:nvPr/>
+        </p:nvSpPr>
+        <p:spPr>
+          <a:xfrm>
+            <a:off x="548640" y="457200"/>
+            <a:ext cx="566928" cy="566928"/>
+          </a:xfrm>
+          <a:prstGeom prst="roundRect">
+            <a:avLst>
+              <a:gd name="adj" fmla="val 16129"/>
+            </a:avLst>
+          </a:prstGeom>
+          <a:solidFill>
+            <a:srgbClr val="0E7C86"/>
+          </a:solidFill>
+          <a:ln/>
+        </p:spPr>
+        <p:txBody>
+          <a:bodyPr/>
+          <a:lstStyle/>
+          <a:p>
+            <a:endParaRPr/>
+          </a:p>
+        </p:txBody>
+      </p:sp>
+      <p:sp>
+        <p:nvSpPr>
+          <p:cNvPr id="3" name="Text 1"/>
+          <p:cNvSpPr/>
+          <p:nvPr/>
+        </p:nvSpPr>
+        <p:spPr>
+          <a:xfrm>
+            <a:off x="548640" y="457200"/>
+            <a:ext cx="566928" cy="566928"/>
+          </a:xfrm>
+          <a:prstGeom prst="rect">
+            <a:avLst/>
+          </a:prstGeom>
+          <a:noFill/>
+          <a:ln/>
+        </p:spPr>
+        <p:txBody>
+          <a:bodyPr wrap="square" lIns="0" tIns="0" rIns="0" bIns="0" rtlCol="0" anchor="ctr"/>
+          <a:lstStyle/>
+          <a:p>
+            <a:pPr marL="0" indent="0" algn="ctr">
+              <a:buNone/>
+            </a:pPr>
+            <a:r>
+              <a:rPr sz="1800" b="1" dirty="0">
+                <a:solidFill>
+                  <a:srgbClr val="FFFFFF"/>
+                </a:solidFill>
+                <a:latin typeface="Trebuchet MS"/>
+              </a:rPr>
+              <a:t>0</a:t>
+            </a:r>
+            <a:r>
+              <a:rPr lang="es-AR" sz="1800" b="1" dirty="0">
+                <a:solidFill>
+                  <a:srgbClr val="FFFFFF"/>
+                </a:solidFill>
+                <a:latin typeface="Trebuchet MS"/>
+              </a:rPr>
+              <a:t>8</a:t>
+            </a:r>
+            <a:endParaRPr lang="en-US" sz="1800" dirty="0"/>
+          </a:p>
+        </p:txBody>
+      </p:sp>
+      <p:sp>
+        <p:nvSpPr>
+          <p:cNvPr id="4" name="Text 2"/>
+          <p:cNvSpPr/>
+          <p:nvPr/>
+        </p:nvSpPr>
+        <p:spPr>
+          <a:xfrm>
+            <a:off x="1280160" y="457200"/>
+            <a:ext cx="9144000" cy="256032"/>
+          </a:xfrm>
+          <a:prstGeom prst="rect">
+            <a:avLst/>
+          </a:prstGeom>
+          <a:noFill/>
+          <a:ln/>
+        </p:spPr>
+        <p:txBody>
+          <a:bodyPr wrap="square" lIns="0" tIns="0" rIns="0" bIns="0" rtlCol="0" anchor="ctr"/>
+          <a:lstStyle/>
+          <a:p>
+            <a:pPr marL="0" indent="0">
+              <a:buNone/>
+            </a:pPr>
+            <a:r>
+              <a:rPr lang="en-US" sz="1150" b="1" kern="0" spc="200" dirty="0">
+                <a:solidFill>
+                  <a:srgbClr val="0E7C86"/>
+                </a:solidFill>
+                <a:latin typeface="Trebuchet MS" pitchFamily="34" charset="0"/>
+                <a:ea typeface="Trebuchet MS" pitchFamily="34" charset="-122"/>
+                <a:cs typeface="Trebuchet MS" pitchFamily="34" charset="-120"/>
+              </a:rPr>
+              <a:t>COMPARACION DE MODELOS</a:t>
+            </a:r>
+            <a:endParaRPr lang="en-US" sz="1150" dirty="0"/>
+          </a:p>
+        </p:txBody>
+      </p:sp>
+      <p:sp>
+        <p:nvSpPr>
+          <p:cNvPr id="5" name="Text 3"/>
+          <p:cNvSpPr/>
+          <p:nvPr/>
+        </p:nvSpPr>
+        <p:spPr>
+          <a:xfrm>
+            <a:off x="1280160" y="694944"/>
+            <a:ext cx="10362895" cy="566928"/>
+          </a:xfrm>
+          <a:prstGeom prst="rect">
+            <a:avLst/>
+          </a:prstGeom>
+          <a:noFill/>
+          <a:ln/>
+        </p:spPr>
+        <p:txBody>
+          <a:bodyPr wrap="square" lIns="0" tIns="0" rIns="0" bIns="0" rtlCol="0" anchor="ctr"/>
+          <a:lstStyle/>
+          <a:p>
+            <a:pPr marL="0" indent="0">
+              <a:buNone/>
+            </a:pPr>
+            <a:r>
+              <a:rPr lang="en-US" sz="2700" b="1" dirty="0">
+                <a:solidFill>
+                  <a:srgbClr val="1F2D34"/>
+                </a:solidFill>
+                <a:latin typeface="Trebuchet MS" pitchFamily="34" charset="0"/>
+                <a:ea typeface="Trebuchet MS" pitchFamily="34" charset="-122"/>
+                <a:cs typeface="Trebuchet MS" pitchFamily="34" charset="-120"/>
+              </a:rPr>
+              <a:t>Fuera de fold, modelos tuneados, umbral 0,50</a:t>
+            </a:r>
+            <a:endParaRPr lang="en-US" sz="2700" dirty="0"/>
+          </a:p>
+        </p:txBody>
+      </p:sp>
+      <p:sp>
+        <p:nvSpPr>
+          <p:cNvPr id="6" name="Text 4"/>
+          <p:cNvSpPr/>
+          <p:nvPr/>
+        </p:nvSpPr>
+        <p:spPr>
+          <a:xfrm>
+            <a:off x="548640" y="6473952"/>
+            <a:ext cx="7315200" cy="274320"/>
+          </a:xfrm>
+          <a:prstGeom prst="rect">
+            <a:avLst/>
+          </a:prstGeom>
+          <a:noFill/>
+          <a:ln/>
+        </p:spPr>
+        <p:txBody>
+          <a:bodyPr wrap="square" lIns="0" tIns="0" rIns="0" bIns="0" rtlCol="0" anchor="ctr"/>
+          <a:lstStyle/>
+          <a:p>
+            <a:pPr marL="0" indent="0">
+              <a:buNone/>
+            </a:pPr>
+            <a:r>
+              <a:rPr lang="en-US" sz="900" dirty="0">
+                <a:solidFill>
+                  <a:srgbClr val="6A7A82"/>
+                </a:solidFill>
+                <a:latin typeface="Calibri" pitchFamily="34" charset="0"/>
+                <a:ea typeface="Calibri" pitchFamily="34" charset="-122"/>
+                <a:cs typeface="Calibri" pitchFamily="34" charset="-120"/>
+              </a:rPr>
+              <a:t>Pipeline de clasificacion de churn  ·  Grupo 1</a:t>
+            </a:r>
+            <a:endParaRPr lang="en-US" sz="900" dirty="0"/>
+          </a:p>
+        </p:txBody>
+      </p:sp>
+      <p:sp>
+        <p:nvSpPr>
+          <p:cNvPr id="7" name="Text 5"/>
+          <p:cNvSpPr/>
+          <p:nvPr/>
+        </p:nvSpPr>
+        <p:spPr>
+          <a:xfrm>
+            <a:off x="10545775" y="6473952"/>
+            <a:ext cx="1097280" cy="274320"/>
+          </a:xfrm>
+          <a:prstGeom prst="rect">
+            <a:avLst/>
+          </a:prstGeom>
+          <a:noFill/>
+          <a:ln/>
+        </p:spPr>
+        <p:txBody>
+          <a:bodyPr wrap="square" lIns="0" tIns="0" rIns="0" bIns="0" rtlCol="0" anchor="ctr"/>
+          <a:lstStyle/>
+          <a:p>
+            <a:pPr marL="0" indent="0" algn="r">
+              <a:buNone/>
+            </a:pPr>
+            <a:r>
+              <a:rPr sz="900">
+                <a:solidFill>
+                  <a:srgbClr val="6A7A82"/>
+                </a:solidFill>
+                <a:latin typeface="Calibri"/>
+              </a:rPr>
+              <a:t>9 / 11</a:t>
+            </a:r>
+            <a:endParaRPr lang="en-US" sz="900" dirty="0"/>
+          </a:p>
+        </p:txBody>
+      </p:sp>
+      <p:graphicFrame>
+        <p:nvGraphicFramePr>
+          <p:cNvPr id="14" name="Table 0"/>
+          <p:cNvGraphicFramePr>
+            <a:graphicFrameLocks noGrp="1"/>
+          </p:cNvGraphicFramePr>
+          <p:nvPr>
+            <p:extLst>
+              <p:ext uri="{D42A27DB-BD31-4B8C-83A1-F6EECF244321}">
+                <p14:modId xmlns:p14="http://schemas.microsoft.com/office/powerpoint/2010/main" val="489474477"/>
+              </p:ext>
+            </p:extLst>
+          </p:nvPr>
+        </p:nvGraphicFramePr>
+        <p:xfrm>
+          <a:off x="548640" y="1828800"/>
+          <a:ext cx="5486400" cy="2377440"/>
+        </p:xfrm>
+        <a:graphic>
+          <a:graphicData uri="http://schemas.openxmlformats.org/drawingml/2006/table">
+            <a:tbl>
+              <a:tblPr/>
+              <a:tblGrid>
+                <a:gridCol w="1783080">
+                  <a:extLst>
+                    <a:ext uri="{9D8B030D-6E8A-4147-A177-3AD203B41FA5}">
+                      <a16:colId xmlns:a16="http://schemas.microsoft.com/office/drawing/2014/main" val="20000"/>
+                    </a:ext>
+                  </a:extLst>
+                </a:gridCol>
+                <a:gridCol w="749808">
+                  <a:extLst>
+                    <a:ext uri="{9D8B030D-6E8A-4147-A177-3AD203B41FA5}">
+                      <a16:colId xmlns:a16="http://schemas.microsoft.com/office/drawing/2014/main" val="20001"/>
+                    </a:ext>
+                  </a:extLst>
+                </a:gridCol>
+                <a:gridCol w="749808">
+                  <a:extLst>
+                    <a:ext uri="{9D8B030D-6E8A-4147-A177-3AD203B41FA5}">
+                      <a16:colId xmlns:a16="http://schemas.microsoft.com/office/drawing/2014/main" val="20002"/>
+                    </a:ext>
+                  </a:extLst>
+                </a:gridCol>
+                <a:gridCol w="841248">
+                  <a:extLst>
+                    <a:ext uri="{9D8B030D-6E8A-4147-A177-3AD203B41FA5}">
+                      <a16:colId xmlns:a16="http://schemas.microsoft.com/office/drawing/2014/main" val="20003"/>
+                    </a:ext>
+                  </a:extLst>
+                </a:gridCol>
+                <a:gridCol w="713232">
+                  <a:extLst>
+                    <a:ext uri="{9D8B030D-6E8A-4147-A177-3AD203B41FA5}">
+                      <a16:colId xmlns:a16="http://schemas.microsoft.com/office/drawing/2014/main" val="20004"/>
+                    </a:ext>
+                  </a:extLst>
+                </a:gridCol>
+                <a:gridCol w="649224">
+                  <a:extLst>
+                    <a:ext uri="{9D8B030D-6E8A-4147-A177-3AD203B41FA5}">
+                      <a16:colId xmlns:a16="http://schemas.microsoft.com/office/drawing/2014/main" val="20005"/>
+                    </a:ext>
+                  </a:extLst>
+                </a:gridCol>
+              </a:tblGrid>
+              <a:tr h="475488">
+                <a:tc>
+                  <a:txBody>
+                    <a:bodyPr/>
+                    <a:lstStyle/>
+                    <a:p>
+                      <a:pPr marL="0" indent="0" algn="ctr">
+                        <a:buNone/>
+                      </a:pPr>
+                      <a:r>
+                        <a:rPr lang="en-US" sz="1200" b="1" dirty="0">
+                          <a:solidFill>
+                            <a:srgbClr val="FFFFFF"/>
+                          </a:solidFill>
+                          <a:latin typeface="Trebuchet MS" pitchFamily="34" charset="0"/>
+                          <a:ea typeface="Trebuchet MS" pitchFamily="34" charset="-122"/>
+                          <a:cs typeface="Trebuchet MS" pitchFamily="34" charset="-120"/>
+                        </a:rPr>
+                        <a:t>Modelo</a:t>
+                      </a:r>
+                      <a:endParaRPr lang="en-US" sz="1200" dirty="0">
+                        <a:latin typeface="Trebuchet MS" charset="0"/>
+                        <a:ea typeface="Trebuchet MS" charset="0"/>
+                        <a:cs typeface="Trebuchet MS" charset="0"/>
+                      </a:endParaRPr>
+                    </a:p>
+                  </a:txBody>
+                  <a:tcPr anchor="ctr">
+                    <a:lnL w="12700" cap="flat" cmpd="sng" algn="ctr">
+                      <a:solidFill>
+                        <a:srgbClr val="DCE6E9"/>
+                      </a:solidFill>
+                      <a:prstDash val="solid"/>
+                      <a:round/>
+                      <a:headEnd type="none" w="med" len="med"/>
+                      <a:tailEnd type="none" w="med" len="med"/>
+                    </a:lnL>
+                    <a:lnR w="12700" cap="flat" cmpd="sng" algn="ctr">
+                      <a:solidFill>
+                        <a:srgbClr val="DCE6E9"/>
+                      </a:solidFill>
+                      <a:prstDash val="solid"/>
+                      <a:round/>
+                      <a:headEnd type="none" w="med" len="med"/>
+                      <a:tailEnd type="none" w="med" len="med"/>
+                    </a:lnR>
+                    <a:lnT w="12700" cap="flat" cmpd="sng" algn="ctr">
+                      <a:solidFill>
+                        <a:srgbClr val="DCE6E9"/>
+                      </a:solidFill>
+                      <a:prstDash val="solid"/>
+                      <a:round/>
+                      <a:headEnd type="none" w="med" len="med"/>
+                      <a:tailEnd type="none" w="med" len="med"/>
+                    </a:lnT>
+                    <a:lnB w="12700" cap="flat" cmpd="sng" algn="ctr">
+                      <a:solidFill>
+                        <a:srgbClr val="DCE6E9"/>
+                      </a:solidFill>
+                      <a:prstDash val="solid"/>
+                      <a:round/>
+                      <a:headEnd type="none" w="med" len="med"/>
+                      <a:tailEnd type="none" w="med" len="med"/>
+                    </a:lnB>
+                    <a:solidFill>
+                      <a:srgbClr val="0E7C86"/>
+                    </a:solidFill>
+                  </a:tcPr>
+                </a:tc>
+                <a:tc>
+                  <a:txBody>
+                    <a:bodyPr/>
+                    <a:lstStyle/>
+                    <a:p>
+                      <a:pPr marL="0" indent="0" algn="ctr">
+                        <a:buNone/>
+                      </a:pPr>
+                      <a:r>
+                        <a:rPr lang="en-US" sz="1200" b="1" dirty="0">
+                          <a:solidFill>
+                            <a:srgbClr val="FFFFFF"/>
+                          </a:solidFill>
+                          <a:latin typeface="Trebuchet MS" pitchFamily="34" charset="0"/>
+                          <a:ea typeface="Trebuchet MS" pitchFamily="34" charset="-122"/>
+                          <a:cs typeface="Trebuchet MS" pitchFamily="34" charset="-120"/>
+                        </a:rPr>
+                        <a:t>F2</a:t>
+                      </a:r>
+                      <a:endParaRPr lang="en-US" sz="1200" dirty="0">
+                        <a:latin typeface="Trebuchet MS" charset="0"/>
+                        <a:ea typeface="Trebuchet MS" charset="0"/>
+                        <a:cs typeface="Trebuchet MS" charset="0"/>
+                      </a:endParaRPr>
+                    </a:p>
+                  </a:txBody>
+                  <a:tcPr anchor="ctr">
+                    <a:lnL w="12700" cap="flat" cmpd="sng" algn="ctr">
+                      <a:solidFill>
+                        <a:srgbClr val="DCE6E9"/>
+                      </a:solidFill>
+                      <a:prstDash val="solid"/>
+                      <a:round/>
+                      <a:headEnd type="none" w="med" len="med"/>
+                      <a:tailEnd type="none" w="med" len="med"/>
+                    </a:lnL>
+                    <a:lnR w="12700" cap="flat" cmpd="sng" algn="ctr">
+                      <a:solidFill>
+                        <a:srgbClr val="DCE6E9"/>
+                      </a:solidFill>
+                      <a:prstDash val="solid"/>
+                      <a:round/>
+                      <a:headEnd type="none" w="med" len="med"/>
+                      <a:tailEnd type="none" w="med" len="med"/>
+                    </a:lnR>
+                    <a:lnT w="12700" cap="flat" cmpd="sng" algn="ctr">
+                      <a:solidFill>
+                        <a:srgbClr val="DCE6E9"/>
+                      </a:solidFill>
+                      <a:prstDash val="solid"/>
+                      <a:round/>
+                      <a:headEnd type="none" w="med" len="med"/>
+                      <a:tailEnd type="none" w="med" len="med"/>
+                    </a:lnT>
+                    <a:lnB w="12700" cap="flat" cmpd="sng" algn="ctr">
+                      <a:solidFill>
+                        <a:srgbClr val="DCE6E9"/>
+                      </a:solidFill>
+                      <a:prstDash val="solid"/>
+                      <a:round/>
+                      <a:headEnd type="none" w="med" len="med"/>
+                      <a:tailEnd type="none" w="med" len="med"/>
+                    </a:lnB>
+                    <a:solidFill>
+                      <a:srgbClr val="0E7C86"/>
+                    </a:solidFill>
+                  </a:tcPr>
+                </a:tc>
+                <a:tc>
+                  <a:txBody>
+                    <a:bodyPr/>
+                    <a:lstStyle/>
+                    <a:p>
+                      <a:pPr marL="0" indent="0" algn="ctr">
+                        <a:buNone/>
+                      </a:pPr>
+                      <a:r>
+                        <a:rPr lang="en-US" sz="1200" b="1" dirty="0">
+                          <a:solidFill>
+                            <a:srgbClr val="FFFFFF"/>
+                          </a:solidFill>
+                          <a:latin typeface="Trebuchet MS" pitchFamily="34" charset="0"/>
+                          <a:ea typeface="Trebuchet MS" pitchFamily="34" charset="-122"/>
+                          <a:cs typeface="Trebuchet MS" pitchFamily="34" charset="-120"/>
+                        </a:rPr>
+                        <a:t>Recall</a:t>
+                      </a:r>
+                      <a:endParaRPr lang="en-US" sz="1200" dirty="0">
+                        <a:latin typeface="Trebuchet MS" charset="0"/>
+                        <a:ea typeface="Trebuchet MS" charset="0"/>
+                        <a:cs typeface="Trebuchet MS" charset="0"/>
+                      </a:endParaRPr>
+                    </a:p>
+                  </a:txBody>
+                  <a:tcPr anchor="ctr">
+                    <a:lnL w="12700" cap="flat" cmpd="sng" algn="ctr">
+                      <a:solidFill>
+                        <a:srgbClr val="DCE6E9"/>
+                      </a:solidFill>
+                      <a:prstDash val="solid"/>
+                      <a:round/>
+                      <a:headEnd type="none" w="med" len="med"/>
+                      <a:tailEnd type="none" w="med" len="med"/>
+                    </a:lnL>
+                    <a:lnR w="12700" cap="flat" cmpd="sng" algn="ctr">
+                      <a:solidFill>
+                        <a:srgbClr val="DCE6E9"/>
+                      </a:solidFill>
+                      <a:prstDash val="solid"/>
+                      <a:round/>
+                      <a:headEnd type="none" w="med" len="med"/>
+                      <a:tailEnd type="none" w="med" len="med"/>
+                    </a:lnR>
+                    <a:lnT w="12700" cap="flat" cmpd="sng" algn="ctr">
+                      <a:solidFill>
+                        <a:srgbClr val="DCE6E9"/>
+                      </a:solidFill>
+                      <a:prstDash val="solid"/>
+                      <a:round/>
+                      <a:headEnd type="none" w="med" len="med"/>
+                      <a:tailEnd type="none" w="med" len="med"/>
+                    </a:lnT>
+                    <a:lnB w="12700" cap="flat" cmpd="sng" algn="ctr">
+                      <a:solidFill>
+                        <a:srgbClr val="DCE6E9"/>
+                      </a:solidFill>
+                      <a:prstDash val="solid"/>
+                      <a:round/>
+                      <a:headEnd type="none" w="med" len="med"/>
+                      <a:tailEnd type="none" w="med" len="med"/>
+                    </a:lnB>
+                    <a:solidFill>
+                      <a:srgbClr val="0E7C86"/>
+                    </a:solidFill>
+                  </a:tcPr>
+                </a:tc>
+                <a:tc>
+                  <a:txBody>
+                    <a:bodyPr/>
+                    <a:lstStyle/>
+                    <a:p>
+                      <a:pPr marL="0" indent="0" algn="ctr">
+                        <a:buNone/>
+                      </a:pPr>
+                      <a:r>
+                        <a:rPr lang="en-US" sz="1200" b="1" dirty="0">
+                          <a:solidFill>
+                            <a:srgbClr val="FFFFFF"/>
+                          </a:solidFill>
+                          <a:latin typeface="Trebuchet MS" pitchFamily="34" charset="0"/>
+                          <a:ea typeface="Trebuchet MS" pitchFamily="34" charset="-122"/>
+                          <a:cs typeface="Trebuchet MS" pitchFamily="34" charset="-120"/>
+                        </a:rPr>
+                        <a:t>Precision</a:t>
+                      </a:r>
+                      <a:endParaRPr lang="en-US" sz="1200" dirty="0">
+                        <a:latin typeface="Trebuchet MS" charset="0"/>
+                        <a:ea typeface="Trebuchet MS" charset="0"/>
+                        <a:cs typeface="Trebuchet MS" charset="0"/>
+                      </a:endParaRPr>
+                    </a:p>
+                  </a:txBody>
+                  <a:tcPr anchor="ctr">
+                    <a:lnL w="12700" cap="flat" cmpd="sng" algn="ctr">
+                      <a:solidFill>
+                        <a:srgbClr val="DCE6E9"/>
+                      </a:solidFill>
+                      <a:prstDash val="solid"/>
+                      <a:round/>
+                      <a:headEnd type="none" w="med" len="med"/>
+                      <a:tailEnd type="none" w="med" len="med"/>
+                    </a:lnL>
+                    <a:lnR w="12700" cap="flat" cmpd="sng" algn="ctr">
+                      <a:solidFill>
+                        <a:srgbClr val="DCE6E9"/>
+                      </a:solidFill>
+                      <a:prstDash val="solid"/>
+                      <a:round/>
+                      <a:headEnd type="none" w="med" len="med"/>
+                      <a:tailEnd type="none" w="med" len="med"/>
+                    </a:lnR>
+                    <a:lnT w="12700" cap="flat" cmpd="sng" algn="ctr">
+                      <a:solidFill>
+                        <a:srgbClr val="DCE6E9"/>
+                      </a:solidFill>
+                      <a:prstDash val="solid"/>
+                      <a:round/>
+                      <a:headEnd type="none" w="med" len="med"/>
+                      <a:tailEnd type="none" w="med" len="med"/>
+                    </a:lnT>
+                    <a:lnB w="12700" cap="flat" cmpd="sng" algn="ctr">
+                      <a:solidFill>
+                        <a:srgbClr val="DCE6E9"/>
+                      </a:solidFill>
+                      <a:prstDash val="solid"/>
+                      <a:round/>
+                      <a:headEnd type="none" w="med" len="med"/>
+                      <a:tailEnd type="none" w="med" len="med"/>
+                    </a:lnB>
+                    <a:solidFill>
+                      <a:srgbClr val="0E7C86"/>
+                    </a:solidFill>
+                  </a:tcPr>
+                </a:tc>
+                <a:tc>
+                  <a:txBody>
+                    <a:bodyPr/>
+                    <a:lstStyle/>
+                    <a:p>
+                      <a:pPr marL="0" indent="0" algn="ctr">
+                        <a:buNone/>
+                      </a:pPr>
+                      <a:r>
+                        <a:rPr lang="en-US" sz="1200" b="1" dirty="0">
+                          <a:solidFill>
+                            <a:srgbClr val="FFFFFF"/>
+                          </a:solidFill>
+                          <a:latin typeface="Trebuchet MS" pitchFamily="34" charset="0"/>
+                          <a:ea typeface="Trebuchet MS" pitchFamily="34" charset="-122"/>
+                          <a:cs typeface="Trebuchet MS" pitchFamily="34" charset="-120"/>
+                        </a:rPr>
+                        <a:t>PR-AUC</a:t>
+                      </a:r>
+                      <a:endParaRPr lang="en-US" sz="1200" dirty="0">
+                        <a:latin typeface="Trebuchet MS" charset="0"/>
+                        <a:ea typeface="Trebuchet MS" charset="0"/>
+                        <a:cs typeface="Trebuchet MS" charset="0"/>
+                      </a:endParaRPr>
+                    </a:p>
+                  </a:txBody>
+                  <a:tcPr anchor="ctr">
+                    <a:lnL w="12700" cap="flat" cmpd="sng" algn="ctr">
+                      <a:solidFill>
+                        <a:srgbClr val="DCE6E9"/>
+                      </a:solidFill>
+                      <a:prstDash val="solid"/>
+                      <a:round/>
+                      <a:headEnd type="none" w="med" len="med"/>
+                      <a:tailEnd type="none" w="med" len="med"/>
+                    </a:lnL>
+                    <a:lnR w="12700" cap="flat" cmpd="sng" algn="ctr">
+                      <a:solidFill>
+                        <a:srgbClr val="DCE6E9"/>
+                      </a:solidFill>
+                      <a:prstDash val="solid"/>
+                      <a:round/>
+                      <a:headEnd type="none" w="med" len="med"/>
+                      <a:tailEnd type="none" w="med" len="med"/>
+                    </a:lnR>
+                    <a:lnT w="12700" cap="flat" cmpd="sng" algn="ctr">
+                      <a:solidFill>
+                        <a:srgbClr val="DCE6E9"/>
+                      </a:solidFill>
+                      <a:prstDash val="solid"/>
+                      <a:round/>
+                      <a:headEnd type="none" w="med" len="med"/>
+                      <a:tailEnd type="none" w="med" len="med"/>
+                    </a:lnT>
+                    <a:lnB w="12700" cap="flat" cmpd="sng" algn="ctr">
+                      <a:solidFill>
+                        <a:srgbClr val="DCE6E9"/>
+                      </a:solidFill>
+                      <a:prstDash val="solid"/>
+                      <a:round/>
+                      <a:headEnd type="none" w="med" len="med"/>
+                      <a:tailEnd type="none" w="med" len="med"/>
+                    </a:lnB>
+                    <a:solidFill>
+                      <a:srgbClr val="0E7C86"/>
+                    </a:solidFill>
+                  </a:tcPr>
+                </a:tc>
+                <a:tc>
+                  <a:txBody>
+                    <a:bodyPr/>
+                    <a:lstStyle/>
+                    <a:p>
+                      <a:pPr marL="0" indent="0" algn="ctr">
+                        <a:buNone/>
+                      </a:pPr>
+                      <a:r>
+                        <a:rPr lang="en-US" sz="1200" b="1" dirty="0">
+                          <a:solidFill>
+                            <a:srgbClr val="FFFFFF"/>
+                          </a:solidFill>
+                          <a:latin typeface="Trebuchet MS" pitchFamily="34" charset="0"/>
+                          <a:ea typeface="Trebuchet MS" pitchFamily="34" charset="-122"/>
+                          <a:cs typeface="Trebuchet MS" pitchFamily="34" charset="-120"/>
+                        </a:rPr>
+                        <a:t>ROC-AUC</a:t>
+                      </a:r>
+                      <a:endParaRPr lang="en-US" sz="1200" dirty="0">
+                        <a:latin typeface="Trebuchet MS" charset="0"/>
+                        <a:ea typeface="Trebuchet MS" charset="0"/>
+                        <a:cs typeface="Trebuchet MS" charset="0"/>
+                      </a:endParaRPr>
+                    </a:p>
+                  </a:txBody>
+                  <a:tcPr anchor="ctr">
+                    <a:lnL w="12700" cap="flat" cmpd="sng" algn="ctr">
+                      <a:solidFill>
+                        <a:srgbClr val="DCE6E9"/>
+                      </a:solidFill>
+                      <a:prstDash val="solid"/>
+                      <a:round/>
+                      <a:headEnd type="none" w="med" len="med"/>
+                      <a:tailEnd type="none" w="med" len="med"/>
+                    </a:lnL>
+                    <a:lnR w="12700" cap="flat" cmpd="sng" algn="ctr">
+                      <a:solidFill>
+                        <a:srgbClr val="DCE6E9"/>
+                      </a:solidFill>
+                      <a:prstDash val="solid"/>
+                      <a:round/>
+                      <a:headEnd type="none" w="med" len="med"/>
+                      <a:tailEnd type="none" w="med" len="med"/>
+                    </a:lnR>
+                    <a:lnT w="12700" cap="flat" cmpd="sng" algn="ctr">
+                      <a:solidFill>
+                        <a:srgbClr val="DCE6E9"/>
+                      </a:solidFill>
+                      <a:prstDash val="solid"/>
+                      <a:round/>
+                      <a:headEnd type="none" w="med" len="med"/>
+                      <a:tailEnd type="none" w="med" len="med"/>
+                    </a:lnT>
+                    <a:lnB w="12700" cap="flat" cmpd="sng" algn="ctr">
+                      <a:solidFill>
+                        <a:srgbClr val="DCE6E9"/>
+                      </a:solidFill>
+                      <a:prstDash val="solid"/>
+                      <a:round/>
+                      <a:headEnd type="none" w="med" len="med"/>
+                      <a:tailEnd type="none" w="med" len="med"/>
+                    </a:lnB>
+                    <a:solidFill>
+                      <a:srgbClr val="0E7C86"/>
+                    </a:solidFill>
+                  </a:tcPr>
+                </a:tc>
+                <a:extLst>
+                  <a:ext uri="{0D108BD9-81ED-4DB2-BD59-A6C34878D82A}">
+                    <a16:rowId xmlns:a16="http://schemas.microsoft.com/office/drawing/2014/main" val="10000"/>
+                  </a:ext>
+                </a:extLst>
+              </a:tr>
+              <a:tr h="475488">
+                <a:tc>
+                  <a:txBody>
+                    <a:bodyPr/>
+                    <a:lstStyle/>
+                    <a:p>
+                      <a:pPr marL="0" indent="0" algn="l">
+                        <a:buNone/>
+                      </a:pPr>
+                      <a:r>
+                        <a:rPr lang="en-US" sz="1200" dirty="0">
+                          <a:solidFill>
+                            <a:srgbClr val="6A7A82"/>
+                          </a:solidFill>
+                          <a:latin typeface="Calibri" pitchFamily="34" charset="0"/>
+                          <a:ea typeface="Calibri" pitchFamily="34" charset="-122"/>
+                          <a:cs typeface="Calibri" pitchFamily="34" charset="-120"/>
+                        </a:rPr>
+                        <a:t>Dummy</a:t>
+                      </a:r>
+                      <a:endParaRPr lang="en-US" sz="1200" dirty="0">
+                        <a:latin typeface="Calibri" charset="0"/>
+                        <a:ea typeface="Calibri" charset="0"/>
+                        <a:cs typeface="Calibri" charset="0"/>
+                      </a:endParaRPr>
+                    </a:p>
+                  </a:txBody>
+                  <a:tcPr anchor="ctr">
+                    <a:lnL w="12700" cap="flat" cmpd="sng" algn="ctr">
+                      <a:solidFill>
+                        <a:srgbClr val="DCE6E9"/>
+                      </a:solidFill>
+                      <a:prstDash val="solid"/>
+                      <a:round/>
+                      <a:headEnd type="none" w="med" len="med"/>
+                      <a:tailEnd type="none" w="med" len="med"/>
+                    </a:lnL>
+                    <a:lnR w="12700" cap="flat" cmpd="sng" algn="ctr">
+                      <a:solidFill>
+                        <a:srgbClr val="DCE6E9"/>
+                      </a:solidFill>
+                      <a:prstDash val="solid"/>
+                      <a:round/>
+                      <a:headEnd type="none" w="med" len="med"/>
+                      <a:tailEnd type="none" w="med" len="med"/>
+                    </a:lnR>
+                    <a:lnT w="12700" cap="flat" cmpd="sng" algn="ctr">
+                      <a:solidFill>
+                        <a:srgbClr val="DCE6E9"/>
+                      </a:solidFill>
+                      <a:prstDash val="solid"/>
+                      <a:round/>
+                      <a:headEnd type="none" w="med" len="med"/>
+                      <a:tailEnd type="none" w="med" len="med"/>
+                    </a:lnT>
+                    <a:lnB w="12700" cap="flat" cmpd="sng" algn="ctr">
+                      <a:solidFill>
+                        <a:srgbClr val="DCE6E9"/>
+                      </a:solidFill>
+                      <a:prstDash val="solid"/>
+                      <a:round/>
+                      <a:headEnd type="none" w="med" len="med"/>
+                      <a:tailEnd type="none" w="med" len="med"/>
+                    </a:lnB>
+                    <a:solidFill>
+                      <a:srgbClr val="FFFFFF"/>
+                    </a:solidFill>
+                  </a:tcPr>
+                </a:tc>
+                <a:tc>
+                  <a:txBody>
+                    <a:bodyPr/>
+                    <a:lstStyle/>
+                    <a:p>
+                      <a:pPr marL="0" indent="0" algn="ctr">
+                        <a:buNone/>
+                      </a:pPr>
+                      <a:r>
+                        <a:rPr lang="en-US" sz="1200" dirty="0">
+                          <a:solidFill>
+                            <a:srgbClr val="1F2D34"/>
+                          </a:solidFill>
+                          <a:latin typeface="Calibri" pitchFamily="34" charset="0"/>
+                          <a:ea typeface="Calibri" pitchFamily="34" charset="-122"/>
+                          <a:cs typeface="Calibri" pitchFamily="34" charset="-120"/>
+                        </a:rPr>
+                        <a:t>0,000</a:t>
+                      </a:r>
+                      <a:endParaRPr lang="en-US" sz="1200" dirty="0">
+                        <a:latin typeface="Calibri" charset="0"/>
+                        <a:ea typeface="Calibri" charset="0"/>
+                        <a:cs typeface="Calibri" charset="0"/>
+                      </a:endParaRPr>
+                    </a:p>
+                  </a:txBody>
+                  <a:tcPr anchor="ctr">
+                    <a:lnL w="12700" cap="flat" cmpd="sng" algn="ctr">
+                      <a:solidFill>
+                        <a:srgbClr val="DCE6E9"/>
+                      </a:solidFill>
+                      <a:prstDash val="solid"/>
+                      <a:round/>
+                      <a:headEnd type="none" w="med" len="med"/>
+                      <a:tailEnd type="none" w="med" len="med"/>
+                    </a:lnL>
+                    <a:lnR w="12700" cap="flat" cmpd="sng" algn="ctr">
+                      <a:solidFill>
+                        <a:srgbClr val="DCE6E9"/>
+                      </a:solidFill>
+                      <a:prstDash val="solid"/>
+                      <a:round/>
+                      <a:headEnd type="none" w="med" len="med"/>
+                      <a:tailEnd type="none" w="med" len="med"/>
+                    </a:lnR>
+                    <a:lnT w="12700" cap="flat" cmpd="sng" algn="ctr">
+                      <a:solidFill>
+                        <a:srgbClr val="DCE6E9"/>
+                      </a:solidFill>
+                      <a:prstDash val="solid"/>
+                      <a:round/>
+                      <a:headEnd type="none" w="med" len="med"/>
+                      <a:tailEnd type="none" w="med" len="med"/>
+                    </a:lnT>
+                    <a:lnB w="12700" cap="flat" cmpd="sng" algn="ctr">
+                      <a:solidFill>
+                        <a:srgbClr val="DCE6E9"/>
+                      </a:solidFill>
+                      <a:prstDash val="solid"/>
+                      <a:round/>
+                      <a:headEnd type="none" w="med" len="med"/>
+                      <a:tailEnd type="none" w="med" len="med"/>
+                    </a:lnB>
+                    <a:solidFill>
+                      <a:srgbClr val="FFFFFF"/>
+                    </a:solidFill>
+                  </a:tcPr>
+                </a:tc>
+                <a:tc>
+                  <a:txBody>
+                    <a:bodyPr/>
+                    <a:lstStyle/>
+                    <a:p>
+                      <a:pPr marL="0" indent="0" algn="ctr">
+                        <a:buNone/>
+                      </a:pPr>
+                      <a:r>
+                        <a:rPr lang="en-US" sz="1200" dirty="0">
+                          <a:solidFill>
+                            <a:srgbClr val="1F2D34"/>
+                          </a:solidFill>
+                          <a:latin typeface="Calibri" pitchFamily="34" charset="0"/>
+                          <a:ea typeface="Calibri" pitchFamily="34" charset="-122"/>
+                          <a:cs typeface="Calibri" pitchFamily="34" charset="-120"/>
+                        </a:rPr>
+                        <a:t>0,000</a:t>
+                      </a:r>
+                      <a:endParaRPr lang="en-US" sz="1200" dirty="0">
+                        <a:latin typeface="Calibri" charset="0"/>
+                        <a:ea typeface="Calibri" charset="0"/>
+                        <a:cs typeface="Calibri" charset="0"/>
+                      </a:endParaRPr>
+                    </a:p>
+                  </a:txBody>
+                  <a:tcPr anchor="ctr">
+                    <a:lnL w="12700" cap="flat" cmpd="sng" algn="ctr">
+                      <a:solidFill>
+                        <a:srgbClr val="DCE6E9"/>
+                      </a:solidFill>
+                      <a:prstDash val="solid"/>
+                      <a:round/>
+                      <a:headEnd type="none" w="med" len="med"/>
+                      <a:tailEnd type="none" w="med" len="med"/>
+                    </a:lnL>
+                    <a:lnR w="12700" cap="flat" cmpd="sng" algn="ctr">
+                      <a:solidFill>
+                        <a:srgbClr val="DCE6E9"/>
+                      </a:solidFill>
+                      <a:prstDash val="solid"/>
+                      <a:round/>
+                      <a:headEnd type="none" w="med" len="med"/>
+                      <a:tailEnd type="none" w="med" len="med"/>
+                    </a:lnR>
+                    <a:lnT w="12700" cap="flat" cmpd="sng" algn="ctr">
+                      <a:solidFill>
+                        <a:srgbClr val="DCE6E9"/>
+                      </a:solidFill>
+                      <a:prstDash val="solid"/>
+                      <a:round/>
+                      <a:headEnd type="none" w="med" len="med"/>
+                      <a:tailEnd type="none" w="med" len="med"/>
+                    </a:lnT>
+                    <a:lnB w="12700" cap="flat" cmpd="sng" algn="ctr">
+                      <a:solidFill>
+                        <a:srgbClr val="DCE6E9"/>
+                      </a:solidFill>
+                      <a:prstDash val="solid"/>
+                      <a:round/>
+                      <a:headEnd type="none" w="med" len="med"/>
+                      <a:tailEnd type="none" w="med" len="med"/>
+                    </a:lnB>
+                    <a:solidFill>
+                      <a:srgbClr val="FFFFFF"/>
+                    </a:solidFill>
+                  </a:tcPr>
+                </a:tc>
+                <a:tc>
+                  <a:txBody>
+                    <a:bodyPr/>
+                    <a:lstStyle/>
+                    <a:p>
+                      <a:pPr marL="0" indent="0" algn="ctr">
+                        <a:buNone/>
+                      </a:pPr>
+                      <a:r>
+                        <a:rPr lang="en-US" sz="1200" dirty="0">
+                          <a:solidFill>
+                            <a:srgbClr val="1F2D34"/>
+                          </a:solidFill>
+                          <a:latin typeface="Calibri" pitchFamily="34" charset="0"/>
+                          <a:ea typeface="Calibri" pitchFamily="34" charset="-122"/>
+                          <a:cs typeface="Calibri" pitchFamily="34" charset="-120"/>
+                        </a:rPr>
+                        <a:t>0,000</a:t>
+                      </a:r>
+                      <a:endParaRPr lang="en-US" sz="1200" dirty="0">
+                        <a:latin typeface="Calibri" charset="0"/>
+                        <a:ea typeface="Calibri" charset="0"/>
+                        <a:cs typeface="Calibri" charset="0"/>
+                      </a:endParaRPr>
+                    </a:p>
+                  </a:txBody>
+                  <a:tcPr anchor="ctr">
+                    <a:lnL w="12700" cap="flat" cmpd="sng" algn="ctr">
+                      <a:solidFill>
+                        <a:srgbClr val="DCE6E9"/>
+                      </a:solidFill>
+                      <a:prstDash val="solid"/>
+                      <a:round/>
+                      <a:headEnd type="none" w="med" len="med"/>
+                      <a:tailEnd type="none" w="med" len="med"/>
+                    </a:lnL>
+                    <a:lnR w="12700" cap="flat" cmpd="sng" algn="ctr">
+                      <a:solidFill>
+                        <a:srgbClr val="DCE6E9"/>
+                      </a:solidFill>
+                      <a:prstDash val="solid"/>
+                      <a:round/>
+                      <a:headEnd type="none" w="med" len="med"/>
+                      <a:tailEnd type="none" w="med" len="med"/>
+                    </a:lnR>
+                    <a:lnT w="12700" cap="flat" cmpd="sng" algn="ctr">
+                      <a:solidFill>
+                        <a:srgbClr val="DCE6E9"/>
+                      </a:solidFill>
+                      <a:prstDash val="solid"/>
+                      <a:round/>
+                      <a:headEnd type="none" w="med" len="med"/>
+                      <a:tailEnd type="none" w="med" len="med"/>
+                    </a:lnT>
+                    <a:lnB w="12700" cap="flat" cmpd="sng" algn="ctr">
+                      <a:solidFill>
+                        <a:srgbClr val="DCE6E9"/>
+                      </a:solidFill>
+                      <a:prstDash val="solid"/>
+                      <a:round/>
+                      <a:headEnd type="none" w="med" len="med"/>
+                      <a:tailEnd type="none" w="med" len="med"/>
+                    </a:lnB>
+                    <a:solidFill>
+                      <a:srgbClr val="FFFFFF"/>
+                    </a:solidFill>
+                  </a:tcPr>
+                </a:tc>
+                <a:tc>
+                  <a:txBody>
+                    <a:bodyPr/>
+                    <a:lstStyle/>
+                    <a:p>
+                      <a:pPr marL="0" indent="0" algn="ctr">
+                        <a:buNone/>
+                      </a:pPr>
+                      <a:r>
+                        <a:rPr lang="en-US" sz="1200" dirty="0">
+                          <a:solidFill>
+                            <a:srgbClr val="1F2D34"/>
+                          </a:solidFill>
+                          <a:latin typeface="Calibri" pitchFamily="34" charset="0"/>
+                          <a:ea typeface="Calibri" pitchFamily="34" charset="-122"/>
+                          <a:cs typeface="Calibri" pitchFamily="34" charset="-120"/>
+                        </a:rPr>
+                        <a:t>0,168</a:t>
+                      </a:r>
+                      <a:endParaRPr lang="en-US" sz="1200" dirty="0">
+                        <a:latin typeface="Calibri" charset="0"/>
+                        <a:ea typeface="Calibri" charset="0"/>
+                        <a:cs typeface="Calibri" charset="0"/>
+                      </a:endParaRPr>
+                    </a:p>
+                  </a:txBody>
+                  <a:tcPr anchor="ctr">
+                    <a:lnL w="12700" cap="flat" cmpd="sng" algn="ctr">
+                      <a:solidFill>
+                        <a:srgbClr val="DCE6E9"/>
+                      </a:solidFill>
+                      <a:prstDash val="solid"/>
+                      <a:round/>
+                      <a:headEnd type="none" w="med" len="med"/>
+                      <a:tailEnd type="none" w="med" len="med"/>
+                    </a:lnL>
+                    <a:lnR w="12700" cap="flat" cmpd="sng" algn="ctr">
+                      <a:solidFill>
+                        <a:srgbClr val="DCE6E9"/>
+                      </a:solidFill>
+                      <a:prstDash val="solid"/>
+                      <a:round/>
+                      <a:headEnd type="none" w="med" len="med"/>
+                      <a:tailEnd type="none" w="med" len="med"/>
+                    </a:lnR>
+                    <a:lnT w="12700" cap="flat" cmpd="sng" algn="ctr">
+                      <a:solidFill>
+                        <a:srgbClr val="DCE6E9"/>
+                      </a:solidFill>
+                      <a:prstDash val="solid"/>
+                      <a:round/>
+                      <a:headEnd type="none" w="med" len="med"/>
+                      <a:tailEnd type="none" w="med" len="med"/>
+                    </a:lnT>
+                    <a:lnB w="12700" cap="flat" cmpd="sng" algn="ctr">
+                      <a:solidFill>
+                        <a:srgbClr val="DCE6E9"/>
+                      </a:solidFill>
+                      <a:prstDash val="solid"/>
+                      <a:round/>
+                      <a:headEnd type="none" w="med" len="med"/>
+                      <a:tailEnd type="none" w="med" len="med"/>
+                    </a:lnB>
+                    <a:solidFill>
+                      <a:srgbClr val="FFFFFF"/>
+                    </a:solidFill>
+                  </a:tcPr>
+                </a:tc>
+                <a:tc>
+                  <a:txBody>
+                    <a:bodyPr/>
+                    <a:lstStyle/>
+                    <a:p>
+                      <a:pPr marL="0" indent="0" algn="ctr">
+                        <a:buNone/>
+                      </a:pPr>
+                      <a:r>
+                        <a:rPr lang="en-US" sz="1200" dirty="0">
+                          <a:solidFill>
+                            <a:srgbClr val="1F2D34"/>
+                          </a:solidFill>
+                          <a:latin typeface="Calibri" pitchFamily="34" charset="0"/>
+                          <a:ea typeface="Calibri" pitchFamily="34" charset="-122"/>
+                          <a:cs typeface="Calibri" pitchFamily="34" charset="-120"/>
+                        </a:rPr>
+                        <a:t>0,500</a:t>
+                      </a:r>
+                      <a:endParaRPr lang="en-US" sz="1200" dirty="0">
+                        <a:latin typeface="Calibri" charset="0"/>
+                        <a:ea typeface="Calibri" charset="0"/>
+                        <a:cs typeface="Calibri" charset="0"/>
+                      </a:endParaRPr>
+                    </a:p>
+                  </a:txBody>
+                  <a:tcPr anchor="ctr">
+                    <a:lnL w="12700" cap="flat" cmpd="sng" algn="ctr">
+                      <a:solidFill>
+                        <a:srgbClr val="DCE6E9"/>
+                      </a:solidFill>
+                      <a:prstDash val="solid"/>
+                      <a:round/>
+                      <a:headEnd type="none" w="med" len="med"/>
+                      <a:tailEnd type="none" w="med" len="med"/>
+                    </a:lnL>
+                    <a:lnR w="12700" cap="flat" cmpd="sng" algn="ctr">
+                      <a:solidFill>
+                        <a:srgbClr val="DCE6E9"/>
+                      </a:solidFill>
+                      <a:prstDash val="solid"/>
+                      <a:round/>
+                      <a:headEnd type="none" w="med" len="med"/>
+                      <a:tailEnd type="none" w="med" len="med"/>
+                    </a:lnR>
+                    <a:lnT w="12700" cap="flat" cmpd="sng" algn="ctr">
+                      <a:solidFill>
+                        <a:srgbClr val="DCE6E9"/>
+                      </a:solidFill>
+                      <a:prstDash val="solid"/>
+                      <a:round/>
+                      <a:headEnd type="none" w="med" len="med"/>
+                      <a:tailEnd type="none" w="med" len="med"/>
+                    </a:lnT>
+                    <a:lnB w="12700" cap="flat" cmpd="sng" algn="ctr">
+                      <a:solidFill>
+                        <a:srgbClr val="DCE6E9"/>
+                      </a:solidFill>
+                      <a:prstDash val="solid"/>
+                      <a:round/>
+                      <a:headEnd type="none" w="med" len="med"/>
+                      <a:tailEnd type="none" w="med" len="med"/>
+                    </a:lnB>
+                    <a:solidFill>
+                      <a:srgbClr val="FFFFFF"/>
+                    </a:solidFill>
+                  </a:tcPr>
+                </a:tc>
+                <a:extLst>
+                  <a:ext uri="{0D108BD9-81ED-4DB2-BD59-A6C34878D82A}">
+                    <a16:rowId xmlns:a16="http://schemas.microsoft.com/office/drawing/2014/main" val="10001"/>
+                  </a:ext>
+                </a:extLst>
+              </a:tr>
+              <a:tr h="475488">
+                <a:tc>
+                  <a:txBody>
+                    <a:bodyPr/>
+                    <a:lstStyle/>
+                    <a:p>
+                      <a:pPr marL="0" indent="0" algn="l">
+                        <a:buNone/>
+                      </a:pPr>
+                      <a:r>
+                        <a:rPr lang="en-US" sz="1200" kern="1200" dirty="0">
+                          <a:solidFill>
+                            <a:srgbClr val="6A7A82"/>
+                          </a:solidFill>
+                          <a:latin typeface="Calibri" pitchFamily="34" charset="0"/>
+                          <a:ea typeface="Calibri" pitchFamily="34" charset="-122"/>
+                          <a:cs typeface="Calibri" pitchFamily="34" charset="-120"/>
+                        </a:rPr>
+                        <a:t>Regresion logistica</a:t>
+                      </a:r>
+                    </a:p>
+                  </a:txBody>
+                  <a:tcPr anchor="ctr">
+                    <a:lnL w="12700" cap="flat" cmpd="sng" algn="ctr">
+                      <a:solidFill>
+                        <a:srgbClr val="DCE6E9"/>
+                      </a:solidFill>
+                      <a:prstDash val="solid"/>
+                      <a:round/>
+                      <a:headEnd type="none" w="med" len="med"/>
+                      <a:tailEnd type="none" w="med" len="med"/>
+                    </a:lnL>
+                    <a:lnR w="12700" cap="flat" cmpd="sng" algn="ctr">
+                      <a:solidFill>
+                        <a:srgbClr val="DCE6E9"/>
+                      </a:solidFill>
+                      <a:prstDash val="solid"/>
+                      <a:round/>
+                      <a:headEnd type="none" w="med" len="med"/>
+                      <a:tailEnd type="none" w="med" len="med"/>
+                    </a:lnR>
+                    <a:lnT w="12700" cap="flat" cmpd="sng" algn="ctr">
+                      <a:solidFill>
+                        <a:srgbClr val="DCE6E9"/>
+                      </a:solidFill>
+                      <a:prstDash val="solid"/>
+                      <a:round/>
+                      <a:headEnd type="none" w="med" len="med"/>
+                      <a:tailEnd type="none" w="med" len="med"/>
+                    </a:lnT>
+                    <a:lnB w="12700" cap="flat" cmpd="sng" algn="ctr">
+                      <a:solidFill>
+                        <a:srgbClr val="DCE6E9"/>
+                      </a:solidFill>
+                      <a:prstDash val="solid"/>
+                      <a:round/>
+                      <a:headEnd type="none" w="med" len="med"/>
+                      <a:tailEnd type="none" w="med" len="med"/>
+                    </a:lnB>
+                    <a:solidFill>
+                      <a:srgbClr val="FFFFFF"/>
+                    </a:solidFill>
+                  </a:tcPr>
+                </a:tc>
+                <a:tc>
+                  <a:txBody>
+                    <a:bodyPr/>
+                    <a:lstStyle/>
+                    <a:p>
+                      <a:pPr marL="0" indent="0" algn="ctr">
+                        <a:buNone/>
+                      </a:pPr>
+                      <a:r>
+                        <a:rPr lang="en-US" sz="1200" kern="1200" dirty="0">
+                          <a:solidFill>
+                            <a:srgbClr val="1F2D34"/>
+                          </a:solidFill>
+                          <a:latin typeface="Calibri" pitchFamily="34" charset="0"/>
+                          <a:ea typeface="Calibri" pitchFamily="34" charset="-122"/>
+                          <a:cs typeface="Calibri" pitchFamily="34" charset="-120"/>
+                        </a:rPr>
+                        <a:t>0,688</a:t>
+                      </a:r>
+                    </a:p>
+                  </a:txBody>
+                  <a:tcPr anchor="ctr">
+                    <a:lnL w="12700" cap="flat" cmpd="sng" algn="ctr">
+                      <a:solidFill>
+                        <a:srgbClr val="DCE6E9"/>
+                      </a:solidFill>
+                      <a:prstDash val="solid"/>
+                      <a:round/>
+                      <a:headEnd type="none" w="med" len="med"/>
+                      <a:tailEnd type="none" w="med" len="med"/>
+                    </a:lnL>
+                    <a:lnR w="12700" cap="flat" cmpd="sng" algn="ctr">
+                      <a:solidFill>
+                        <a:srgbClr val="DCE6E9"/>
+                      </a:solidFill>
+                      <a:prstDash val="solid"/>
+                      <a:round/>
+                      <a:headEnd type="none" w="med" len="med"/>
+                      <a:tailEnd type="none" w="med" len="med"/>
+                    </a:lnR>
+                    <a:lnT w="12700" cap="flat" cmpd="sng" algn="ctr">
+                      <a:solidFill>
+                        <a:srgbClr val="DCE6E9"/>
+                      </a:solidFill>
+                      <a:prstDash val="solid"/>
+                      <a:round/>
+                      <a:headEnd type="none" w="med" len="med"/>
+                      <a:tailEnd type="none" w="med" len="med"/>
+                    </a:lnT>
+                    <a:lnB w="12700" cap="flat" cmpd="sng" algn="ctr">
+                      <a:solidFill>
+                        <a:srgbClr val="DCE6E9"/>
+                      </a:solidFill>
+                      <a:prstDash val="solid"/>
+                      <a:round/>
+                      <a:headEnd type="none" w="med" len="med"/>
+                      <a:tailEnd type="none" w="med" len="med"/>
+                    </a:lnB>
+                    <a:solidFill>
+                      <a:srgbClr val="FFFFFF"/>
+                    </a:solidFill>
+                  </a:tcPr>
+                </a:tc>
+                <a:tc>
+                  <a:txBody>
+                    <a:bodyPr/>
+                    <a:lstStyle/>
+                    <a:p>
+                      <a:pPr marL="0" indent="0" algn="ctr">
+                        <a:buNone/>
+                      </a:pPr>
+                      <a:r>
+                        <a:rPr lang="en-US" sz="1200" kern="1200" dirty="0">
+                          <a:solidFill>
+                            <a:srgbClr val="1F2D34"/>
+                          </a:solidFill>
+                          <a:latin typeface="Calibri" pitchFamily="34" charset="0"/>
+                          <a:ea typeface="Calibri" pitchFamily="34" charset="-122"/>
+                          <a:cs typeface="Calibri" pitchFamily="34" charset="-120"/>
+                        </a:rPr>
+                        <a:t>0,809</a:t>
+                      </a:r>
+                    </a:p>
+                  </a:txBody>
+                  <a:tcPr anchor="ctr">
+                    <a:lnL w="12700" cap="flat" cmpd="sng" algn="ctr">
+                      <a:solidFill>
+                        <a:srgbClr val="DCE6E9"/>
+                      </a:solidFill>
+                      <a:prstDash val="solid"/>
+                      <a:round/>
+                      <a:headEnd type="none" w="med" len="med"/>
+                      <a:tailEnd type="none" w="med" len="med"/>
+                    </a:lnL>
+                    <a:lnR w="12700" cap="flat" cmpd="sng" algn="ctr">
+                      <a:solidFill>
+                        <a:srgbClr val="DCE6E9"/>
+                      </a:solidFill>
+                      <a:prstDash val="solid"/>
+                      <a:round/>
+                      <a:headEnd type="none" w="med" len="med"/>
+                      <a:tailEnd type="none" w="med" len="med"/>
+                    </a:lnR>
+                    <a:lnT w="12700" cap="flat" cmpd="sng" algn="ctr">
+                      <a:solidFill>
+                        <a:srgbClr val="DCE6E9"/>
+                      </a:solidFill>
+                      <a:prstDash val="solid"/>
+                      <a:round/>
+                      <a:headEnd type="none" w="med" len="med"/>
+                      <a:tailEnd type="none" w="med" len="med"/>
+                    </a:lnT>
+                    <a:lnB w="12700" cap="flat" cmpd="sng" algn="ctr">
+                      <a:solidFill>
+                        <a:srgbClr val="DCE6E9"/>
+                      </a:solidFill>
+                      <a:prstDash val="solid"/>
+                      <a:round/>
+                      <a:headEnd type="none" w="med" len="med"/>
+                      <a:tailEnd type="none" w="med" len="med"/>
+                    </a:lnB>
+                    <a:solidFill>
+                      <a:srgbClr val="FFFFFF"/>
+                    </a:solidFill>
+                  </a:tcPr>
+                </a:tc>
+                <a:tc>
+                  <a:txBody>
+                    <a:bodyPr/>
+                    <a:lstStyle/>
+                    <a:p>
+                      <a:pPr marL="0" indent="0" algn="ctr">
+                        <a:buNone/>
+                      </a:pPr>
+                      <a:r>
+                        <a:rPr lang="en-US" sz="1200" dirty="0">
+                          <a:solidFill>
+                            <a:srgbClr val="1F2D34"/>
+                          </a:solidFill>
+                          <a:latin typeface="Calibri" pitchFamily="34" charset="0"/>
+                          <a:ea typeface="Calibri" pitchFamily="34" charset="-122"/>
+                          <a:cs typeface="Calibri" pitchFamily="34" charset="-120"/>
+                        </a:rPr>
+                        <a:t>0,431</a:t>
+                      </a:r>
+                      <a:endParaRPr lang="en-US" sz="1200" dirty="0">
+                        <a:latin typeface="Calibri" charset="0"/>
+                        <a:ea typeface="Calibri" charset="0"/>
+                        <a:cs typeface="Calibri" charset="0"/>
+                      </a:endParaRPr>
+                    </a:p>
+                  </a:txBody>
+                  <a:tcPr anchor="ctr">
+                    <a:lnL w="12700" cap="flat" cmpd="sng" algn="ctr">
+                      <a:solidFill>
+                        <a:srgbClr val="DCE6E9"/>
+                      </a:solidFill>
+                      <a:prstDash val="solid"/>
+                      <a:round/>
+                      <a:headEnd type="none" w="med" len="med"/>
+                      <a:tailEnd type="none" w="med" len="med"/>
+                    </a:lnL>
+                    <a:lnR w="12700" cap="flat" cmpd="sng" algn="ctr">
+                      <a:solidFill>
+                        <a:srgbClr val="DCE6E9"/>
+                      </a:solidFill>
+                      <a:prstDash val="solid"/>
+                      <a:round/>
+                      <a:headEnd type="none" w="med" len="med"/>
+                      <a:tailEnd type="none" w="med" len="med"/>
+                    </a:lnR>
+                    <a:lnT w="12700" cap="flat" cmpd="sng" algn="ctr">
+                      <a:solidFill>
+                        <a:srgbClr val="DCE6E9"/>
+                      </a:solidFill>
+                      <a:prstDash val="solid"/>
+                      <a:round/>
+                      <a:headEnd type="none" w="med" len="med"/>
+                      <a:tailEnd type="none" w="med" len="med"/>
+                    </a:lnT>
+                    <a:lnB w="12700" cap="flat" cmpd="sng" algn="ctr">
+                      <a:solidFill>
+                        <a:srgbClr val="DCE6E9"/>
+                      </a:solidFill>
+                      <a:prstDash val="solid"/>
+                      <a:round/>
+                      <a:headEnd type="none" w="med" len="med"/>
+                      <a:tailEnd type="none" w="med" len="med"/>
+                    </a:lnB>
+                    <a:solidFill>
+                      <a:srgbClr val="FFFFFF"/>
+                    </a:solidFill>
+                  </a:tcPr>
+                </a:tc>
+                <a:tc>
+                  <a:txBody>
+                    <a:bodyPr/>
+                    <a:lstStyle/>
+                    <a:p>
+                      <a:pPr marL="0" indent="0" algn="ctr">
+                        <a:buNone/>
+                      </a:pPr>
+                      <a:r>
+                        <a:rPr lang="en-US" sz="1200" dirty="0">
+                          <a:solidFill>
+                            <a:srgbClr val="1F2D34"/>
+                          </a:solidFill>
+                          <a:latin typeface="Calibri" pitchFamily="34" charset="0"/>
+                          <a:ea typeface="Calibri" pitchFamily="34" charset="-122"/>
+                          <a:cs typeface="Calibri" pitchFamily="34" charset="-120"/>
+                        </a:rPr>
+                        <a:t>0,609</a:t>
+                      </a:r>
+                      <a:endParaRPr lang="en-US" sz="1200" dirty="0">
+                        <a:latin typeface="Calibri" charset="0"/>
+                        <a:ea typeface="Calibri" charset="0"/>
+                        <a:cs typeface="Calibri" charset="0"/>
+                      </a:endParaRPr>
+                    </a:p>
+                  </a:txBody>
+                  <a:tcPr anchor="ctr">
+                    <a:lnL w="12700" cap="flat" cmpd="sng" algn="ctr">
+                      <a:solidFill>
+                        <a:srgbClr val="DCE6E9"/>
+                      </a:solidFill>
+                      <a:prstDash val="solid"/>
+                      <a:round/>
+                      <a:headEnd type="none" w="med" len="med"/>
+                      <a:tailEnd type="none" w="med" len="med"/>
+                    </a:lnL>
+                    <a:lnR w="12700" cap="flat" cmpd="sng" algn="ctr">
+                      <a:solidFill>
+                        <a:srgbClr val="DCE6E9"/>
+                      </a:solidFill>
+                      <a:prstDash val="solid"/>
+                      <a:round/>
+                      <a:headEnd type="none" w="med" len="med"/>
+                      <a:tailEnd type="none" w="med" len="med"/>
+                    </a:lnR>
+                    <a:lnT w="12700" cap="flat" cmpd="sng" algn="ctr">
+                      <a:solidFill>
+                        <a:srgbClr val="DCE6E9"/>
+                      </a:solidFill>
+                      <a:prstDash val="solid"/>
+                      <a:round/>
+                      <a:headEnd type="none" w="med" len="med"/>
+                      <a:tailEnd type="none" w="med" len="med"/>
+                    </a:lnT>
+                    <a:lnB w="12700" cap="flat" cmpd="sng" algn="ctr">
+                      <a:solidFill>
+                        <a:srgbClr val="DCE6E9"/>
+                      </a:solidFill>
+                      <a:prstDash val="solid"/>
+                      <a:round/>
+                      <a:headEnd type="none" w="med" len="med"/>
+                      <a:tailEnd type="none" w="med" len="med"/>
+                    </a:lnB>
+                    <a:solidFill>
+                      <a:srgbClr val="FFFFFF"/>
+                    </a:solidFill>
+                  </a:tcPr>
+                </a:tc>
+                <a:tc>
+                  <a:txBody>
+                    <a:bodyPr/>
+                    <a:lstStyle/>
+                    <a:p>
+                      <a:pPr marL="0" indent="0" algn="ctr">
+                        <a:buNone/>
+                      </a:pPr>
+                      <a:r>
+                        <a:rPr lang="en-US" sz="1200" dirty="0">
+                          <a:solidFill>
+                            <a:srgbClr val="1F2D34"/>
+                          </a:solidFill>
+                          <a:latin typeface="Calibri" pitchFamily="34" charset="0"/>
+                          <a:ea typeface="Calibri" pitchFamily="34" charset="-122"/>
+                          <a:cs typeface="Calibri" pitchFamily="34" charset="-120"/>
+                        </a:rPr>
+                        <a:t>0,868</a:t>
+                      </a:r>
+                      <a:endParaRPr lang="en-US" sz="1200" dirty="0">
+                        <a:latin typeface="Calibri" charset="0"/>
+                        <a:ea typeface="Calibri" charset="0"/>
+                        <a:cs typeface="Calibri" charset="0"/>
+                      </a:endParaRPr>
+                    </a:p>
+                  </a:txBody>
+                  <a:tcPr anchor="ctr">
+                    <a:lnL w="12700" cap="flat" cmpd="sng" algn="ctr">
+                      <a:solidFill>
+                        <a:srgbClr val="DCE6E9"/>
+                      </a:solidFill>
+                      <a:prstDash val="solid"/>
+                      <a:round/>
+                      <a:headEnd type="none" w="med" len="med"/>
+                      <a:tailEnd type="none" w="med" len="med"/>
+                    </a:lnL>
+                    <a:lnR w="12700" cap="flat" cmpd="sng" algn="ctr">
+                      <a:solidFill>
+                        <a:srgbClr val="DCE6E9"/>
+                      </a:solidFill>
+                      <a:prstDash val="solid"/>
+                      <a:round/>
+                      <a:headEnd type="none" w="med" len="med"/>
+                      <a:tailEnd type="none" w="med" len="med"/>
+                    </a:lnR>
+                    <a:lnT w="12700" cap="flat" cmpd="sng" algn="ctr">
+                      <a:solidFill>
+                        <a:srgbClr val="DCE6E9"/>
+                      </a:solidFill>
+                      <a:prstDash val="solid"/>
+                      <a:round/>
+                      <a:headEnd type="none" w="med" len="med"/>
+                      <a:tailEnd type="none" w="med" len="med"/>
+                    </a:lnT>
+                    <a:lnB w="12700" cap="flat" cmpd="sng" algn="ctr">
+                      <a:solidFill>
+                        <a:srgbClr val="DCE6E9"/>
+                      </a:solidFill>
+                      <a:prstDash val="solid"/>
+                      <a:round/>
+                      <a:headEnd type="none" w="med" len="med"/>
+                      <a:tailEnd type="none" w="med" len="med"/>
+                    </a:lnB>
+                    <a:solidFill>
+                      <a:srgbClr val="FFFFFF"/>
+                    </a:solidFill>
+                  </a:tcPr>
+                </a:tc>
+                <a:extLst>
+                  <a:ext uri="{0D108BD9-81ED-4DB2-BD59-A6C34878D82A}">
+                    <a16:rowId xmlns:a16="http://schemas.microsoft.com/office/drawing/2014/main" val="10002"/>
+                  </a:ext>
+                </a:extLst>
+              </a:tr>
+              <a:tr h="475488">
+                <a:tc>
+                  <a:txBody>
+                    <a:bodyPr/>
+                    <a:lstStyle/>
+                    <a:p>
+                      <a:pPr marL="0" indent="0" algn="l">
+                        <a:buNone/>
+                      </a:pPr>
+                      <a:r>
+                        <a:rPr lang="en-US" sz="1200" dirty="0">
+                          <a:solidFill>
+                            <a:srgbClr val="1F2D34"/>
+                          </a:solidFill>
+                          <a:latin typeface="Calibri" pitchFamily="34" charset="0"/>
+                          <a:ea typeface="Calibri" pitchFamily="34" charset="-122"/>
+                          <a:cs typeface="Calibri" pitchFamily="34" charset="-120"/>
+                        </a:rPr>
+                        <a:t>Arbol de decision</a:t>
+                      </a:r>
+                      <a:endParaRPr lang="en-US" sz="1200" dirty="0">
+                        <a:latin typeface="Calibri" charset="0"/>
+                        <a:ea typeface="Calibri" charset="0"/>
+                        <a:cs typeface="Calibri" charset="0"/>
+                      </a:endParaRPr>
+                    </a:p>
+                  </a:txBody>
+                  <a:tcPr anchor="ctr">
+                    <a:lnL w="12700" cap="flat" cmpd="sng" algn="ctr">
+                      <a:solidFill>
+                        <a:srgbClr val="DCE6E9"/>
+                      </a:solidFill>
+                      <a:prstDash val="solid"/>
+                      <a:round/>
+                      <a:headEnd type="none" w="med" len="med"/>
+                      <a:tailEnd type="none" w="med" len="med"/>
+                    </a:lnL>
+                    <a:lnR w="12700" cap="flat" cmpd="sng" algn="ctr">
+                      <a:solidFill>
+                        <a:srgbClr val="DCE6E9"/>
+                      </a:solidFill>
+                      <a:prstDash val="solid"/>
+                      <a:round/>
+                      <a:headEnd type="none" w="med" len="med"/>
+                      <a:tailEnd type="none" w="med" len="med"/>
+                    </a:lnR>
+                    <a:lnT w="12700" cap="flat" cmpd="sng" algn="ctr">
+                      <a:solidFill>
+                        <a:srgbClr val="DCE6E9"/>
+                      </a:solidFill>
+                      <a:prstDash val="solid"/>
+                      <a:round/>
+                      <a:headEnd type="none" w="med" len="med"/>
+                      <a:tailEnd type="none" w="med" len="med"/>
+                    </a:lnT>
+                    <a:lnB w="12700" cap="flat" cmpd="sng" algn="ctr">
+                      <a:solidFill>
+                        <a:srgbClr val="DCE6E9"/>
+                      </a:solidFill>
+                      <a:prstDash val="solid"/>
+                      <a:round/>
+                      <a:headEnd type="none" w="med" len="med"/>
+                      <a:tailEnd type="none" w="med" len="med"/>
+                    </a:lnB>
+                    <a:solidFill>
+                      <a:srgbClr val="FFFFFF"/>
+                    </a:solidFill>
+                  </a:tcPr>
+                </a:tc>
+                <a:tc>
+                  <a:txBody>
+                    <a:bodyPr/>
+                    <a:lstStyle/>
+                    <a:p>
+                      <a:pPr marL="0" indent="0" algn="ctr">
+                        <a:buNone/>
+                      </a:pPr>
+                      <a:r>
+                        <a:rPr lang="en-US" sz="1200" dirty="0">
+                          <a:solidFill>
+                            <a:srgbClr val="1F2D34"/>
+                          </a:solidFill>
+                          <a:latin typeface="Calibri" pitchFamily="34" charset="0"/>
+                          <a:ea typeface="Calibri" pitchFamily="34" charset="-122"/>
+                          <a:cs typeface="Calibri" pitchFamily="34" charset="-120"/>
+                        </a:rPr>
+                        <a:t>0,669</a:t>
+                      </a:r>
+                      <a:endParaRPr lang="en-US" sz="1200" dirty="0">
+                        <a:latin typeface="Calibri" charset="0"/>
+                        <a:ea typeface="Calibri" charset="0"/>
+                        <a:cs typeface="Calibri" charset="0"/>
+                      </a:endParaRPr>
+                    </a:p>
+                  </a:txBody>
+                  <a:tcPr anchor="ctr">
+                    <a:lnL w="12700" cap="flat" cmpd="sng" algn="ctr">
+                      <a:solidFill>
+                        <a:srgbClr val="DCE6E9"/>
+                      </a:solidFill>
+                      <a:prstDash val="solid"/>
+                      <a:round/>
+                      <a:headEnd type="none" w="med" len="med"/>
+                      <a:tailEnd type="none" w="med" len="med"/>
+                    </a:lnL>
+                    <a:lnR w="12700" cap="flat" cmpd="sng" algn="ctr">
+                      <a:solidFill>
+                        <a:srgbClr val="DCE6E9"/>
+                      </a:solidFill>
+                      <a:prstDash val="solid"/>
+                      <a:round/>
+                      <a:headEnd type="none" w="med" len="med"/>
+                      <a:tailEnd type="none" w="med" len="med"/>
+                    </a:lnR>
+                    <a:lnT w="12700" cap="flat" cmpd="sng" algn="ctr">
+                      <a:solidFill>
+                        <a:srgbClr val="DCE6E9"/>
+                      </a:solidFill>
+                      <a:prstDash val="solid"/>
+                      <a:round/>
+                      <a:headEnd type="none" w="med" len="med"/>
+                      <a:tailEnd type="none" w="med" len="med"/>
+                    </a:lnT>
+                    <a:lnB w="12700" cap="flat" cmpd="sng" algn="ctr">
+                      <a:solidFill>
+                        <a:srgbClr val="DCE6E9"/>
+                      </a:solidFill>
+                      <a:prstDash val="solid"/>
+                      <a:round/>
+                      <a:headEnd type="none" w="med" len="med"/>
+                      <a:tailEnd type="none" w="med" len="med"/>
+                    </a:lnB>
+                    <a:solidFill>
+                      <a:srgbClr val="FFFFFF"/>
+                    </a:solidFill>
+                  </a:tcPr>
+                </a:tc>
+                <a:tc>
+                  <a:txBody>
+                    <a:bodyPr/>
+                    <a:lstStyle/>
+                    <a:p>
+                      <a:pPr marL="0" indent="0" algn="ctr">
+                        <a:buNone/>
+                      </a:pPr>
+                      <a:r>
+                        <a:rPr lang="en-US" sz="1200" dirty="0">
+                          <a:solidFill>
+                            <a:srgbClr val="1F2D34"/>
+                          </a:solidFill>
+                          <a:latin typeface="Calibri" pitchFamily="34" charset="0"/>
+                          <a:ea typeface="Calibri" pitchFamily="34" charset="-122"/>
+                          <a:cs typeface="Calibri" pitchFamily="34" charset="-120"/>
+                        </a:rPr>
+                        <a:t>0,780</a:t>
+                      </a:r>
+                      <a:endParaRPr lang="en-US" sz="1200" dirty="0">
+                        <a:latin typeface="Calibri" charset="0"/>
+                        <a:ea typeface="Calibri" charset="0"/>
+                        <a:cs typeface="Calibri" charset="0"/>
+                      </a:endParaRPr>
+                    </a:p>
+                  </a:txBody>
+                  <a:tcPr anchor="ctr">
+                    <a:lnL w="12700" cap="flat" cmpd="sng" algn="ctr">
+                      <a:solidFill>
+                        <a:srgbClr val="DCE6E9"/>
+                      </a:solidFill>
+                      <a:prstDash val="solid"/>
+                      <a:round/>
+                      <a:headEnd type="none" w="med" len="med"/>
+                      <a:tailEnd type="none" w="med" len="med"/>
+                    </a:lnL>
+                    <a:lnR w="12700" cap="flat" cmpd="sng" algn="ctr">
+                      <a:solidFill>
+                        <a:srgbClr val="DCE6E9"/>
+                      </a:solidFill>
+                      <a:prstDash val="solid"/>
+                      <a:round/>
+                      <a:headEnd type="none" w="med" len="med"/>
+                      <a:tailEnd type="none" w="med" len="med"/>
+                    </a:lnR>
+                    <a:lnT w="12700" cap="flat" cmpd="sng" algn="ctr">
+                      <a:solidFill>
+                        <a:srgbClr val="DCE6E9"/>
+                      </a:solidFill>
+                      <a:prstDash val="solid"/>
+                      <a:round/>
+                      <a:headEnd type="none" w="med" len="med"/>
+                      <a:tailEnd type="none" w="med" len="med"/>
+                    </a:lnT>
+                    <a:lnB w="12700" cap="flat" cmpd="sng" algn="ctr">
+                      <a:solidFill>
+                        <a:srgbClr val="DCE6E9"/>
+                      </a:solidFill>
+                      <a:prstDash val="solid"/>
+                      <a:round/>
+                      <a:headEnd type="none" w="med" len="med"/>
+                      <a:tailEnd type="none" w="med" len="med"/>
+                    </a:lnB>
+                    <a:solidFill>
+                      <a:srgbClr val="FFFFFF"/>
+                    </a:solidFill>
+                  </a:tcPr>
+                </a:tc>
+                <a:tc>
+                  <a:txBody>
+                    <a:bodyPr/>
+                    <a:lstStyle/>
+                    <a:p>
+                      <a:pPr marL="0" indent="0" algn="ctr">
+                        <a:buNone/>
+                      </a:pPr>
+                      <a:r>
+                        <a:rPr lang="en-US" sz="1200" dirty="0">
+                          <a:solidFill>
+                            <a:srgbClr val="1F2D34"/>
+                          </a:solidFill>
+                          <a:latin typeface="Calibri" pitchFamily="34" charset="0"/>
+                          <a:ea typeface="Calibri" pitchFamily="34" charset="-122"/>
+                          <a:cs typeface="Calibri" pitchFamily="34" charset="-120"/>
+                        </a:rPr>
+                        <a:t>0,427</a:t>
+                      </a:r>
+                      <a:endParaRPr lang="en-US" sz="1200" dirty="0">
+                        <a:latin typeface="Calibri" charset="0"/>
+                        <a:ea typeface="Calibri" charset="0"/>
+                        <a:cs typeface="Calibri" charset="0"/>
+                      </a:endParaRPr>
+                    </a:p>
+                  </a:txBody>
+                  <a:tcPr anchor="ctr">
+                    <a:lnL w="12700" cap="flat" cmpd="sng" algn="ctr">
+                      <a:solidFill>
+                        <a:srgbClr val="DCE6E9"/>
+                      </a:solidFill>
+                      <a:prstDash val="solid"/>
+                      <a:round/>
+                      <a:headEnd type="none" w="med" len="med"/>
+                      <a:tailEnd type="none" w="med" len="med"/>
+                    </a:lnL>
+                    <a:lnR w="12700" cap="flat" cmpd="sng" algn="ctr">
+                      <a:solidFill>
+                        <a:srgbClr val="DCE6E9"/>
+                      </a:solidFill>
+                      <a:prstDash val="solid"/>
+                      <a:round/>
+                      <a:headEnd type="none" w="med" len="med"/>
+                      <a:tailEnd type="none" w="med" len="med"/>
+                    </a:lnR>
+                    <a:lnT w="12700" cap="flat" cmpd="sng" algn="ctr">
+                      <a:solidFill>
+                        <a:srgbClr val="DCE6E9"/>
+                      </a:solidFill>
+                      <a:prstDash val="solid"/>
+                      <a:round/>
+                      <a:headEnd type="none" w="med" len="med"/>
+                      <a:tailEnd type="none" w="med" len="med"/>
+                    </a:lnT>
+                    <a:lnB w="12700" cap="flat" cmpd="sng" algn="ctr">
+                      <a:solidFill>
+                        <a:srgbClr val="DCE6E9"/>
+                      </a:solidFill>
+                      <a:prstDash val="solid"/>
+                      <a:round/>
+                      <a:headEnd type="none" w="med" len="med"/>
+                      <a:tailEnd type="none" w="med" len="med"/>
+                    </a:lnB>
+                    <a:solidFill>
+                      <a:srgbClr val="FFFFFF"/>
+                    </a:solidFill>
+                  </a:tcPr>
+                </a:tc>
+                <a:tc>
+                  <a:txBody>
+                    <a:bodyPr/>
+                    <a:lstStyle/>
+                    <a:p>
+                      <a:pPr marL="0" indent="0" algn="ctr">
+                        <a:buNone/>
+                      </a:pPr>
+                      <a:r>
+                        <a:rPr lang="en-US" sz="1200" dirty="0">
+                          <a:solidFill>
+                            <a:srgbClr val="1F2D34"/>
+                          </a:solidFill>
+                          <a:latin typeface="Calibri" pitchFamily="34" charset="0"/>
+                          <a:ea typeface="Calibri" pitchFamily="34" charset="-122"/>
+                          <a:cs typeface="Calibri" pitchFamily="34" charset="-120"/>
+                        </a:rPr>
+                        <a:t>0,579</a:t>
+                      </a:r>
+                      <a:endParaRPr lang="en-US" sz="1200" dirty="0">
+                        <a:latin typeface="Calibri" charset="0"/>
+                        <a:ea typeface="Calibri" charset="0"/>
+                        <a:cs typeface="Calibri" charset="0"/>
+                      </a:endParaRPr>
+                    </a:p>
+                  </a:txBody>
+                  <a:tcPr anchor="ctr">
+                    <a:lnL w="12700" cap="flat" cmpd="sng" algn="ctr">
+                      <a:solidFill>
+                        <a:srgbClr val="DCE6E9"/>
+                      </a:solidFill>
+                      <a:prstDash val="solid"/>
+                      <a:round/>
+                      <a:headEnd type="none" w="med" len="med"/>
+                      <a:tailEnd type="none" w="med" len="med"/>
+                    </a:lnL>
+                    <a:lnR w="12700" cap="flat" cmpd="sng" algn="ctr">
+                      <a:solidFill>
+                        <a:srgbClr val="DCE6E9"/>
+                      </a:solidFill>
+                      <a:prstDash val="solid"/>
+                      <a:round/>
+                      <a:headEnd type="none" w="med" len="med"/>
+                      <a:tailEnd type="none" w="med" len="med"/>
+                    </a:lnR>
+                    <a:lnT w="12700" cap="flat" cmpd="sng" algn="ctr">
+                      <a:solidFill>
+                        <a:srgbClr val="DCE6E9"/>
+                      </a:solidFill>
+                      <a:prstDash val="solid"/>
+                      <a:round/>
+                      <a:headEnd type="none" w="med" len="med"/>
+                      <a:tailEnd type="none" w="med" len="med"/>
+                    </a:lnT>
+                    <a:lnB w="12700" cap="flat" cmpd="sng" algn="ctr">
+                      <a:solidFill>
+                        <a:srgbClr val="DCE6E9"/>
+                      </a:solidFill>
+                      <a:prstDash val="solid"/>
+                      <a:round/>
+                      <a:headEnd type="none" w="med" len="med"/>
+                      <a:tailEnd type="none" w="med" len="med"/>
+                    </a:lnB>
+                    <a:solidFill>
+                      <a:srgbClr val="FFFFFF"/>
+                    </a:solidFill>
+                  </a:tcPr>
+                </a:tc>
+                <a:tc>
+                  <a:txBody>
+                    <a:bodyPr/>
+                    <a:lstStyle/>
+                    <a:p>
+                      <a:pPr marL="0" indent="0" algn="ctr">
+                        <a:buNone/>
+                      </a:pPr>
+                      <a:r>
+                        <a:rPr lang="en-US" sz="1200" dirty="0">
+                          <a:solidFill>
+                            <a:srgbClr val="1F2D34"/>
+                          </a:solidFill>
+                          <a:latin typeface="Calibri" pitchFamily="34" charset="0"/>
+                          <a:ea typeface="Calibri" pitchFamily="34" charset="-122"/>
+                          <a:cs typeface="Calibri" pitchFamily="34" charset="-120"/>
+                        </a:rPr>
+                        <a:t>0,855</a:t>
+                      </a:r>
+                      <a:endParaRPr lang="en-US" sz="1200" dirty="0">
+                        <a:latin typeface="Calibri" charset="0"/>
+                        <a:ea typeface="Calibri" charset="0"/>
+                        <a:cs typeface="Calibri" charset="0"/>
+                      </a:endParaRPr>
+                    </a:p>
+                  </a:txBody>
+                  <a:tcPr anchor="ctr">
+                    <a:lnL w="12700" cap="flat" cmpd="sng" algn="ctr">
+                      <a:solidFill>
+                        <a:srgbClr val="DCE6E9"/>
+                      </a:solidFill>
+                      <a:prstDash val="solid"/>
+                      <a:round/>
+                      <a:headEnd type="none" w="med" len="med"/>
+                      <a:tailEnd type="none" w="med" len="med"/>
+                    </a:lnL>
+                    <a:lnR w="12700" cap="flat" cmpd="sng" algn="ctr">
+                      <a:solidFill>
+                        <a:srgbClr val="DCE6E9"/>
+                      </a:solidFill>
+                      <a:prstDash val="solid"/>
+                      <a:round/>
+                      <a:headEnd type="none" w="med" len="med"/>
+                      <a:tailEnd type="none" w="med" len="med"/>
+                    </a:lnR>
+                    <a:lnT w="12700" cap="flat" cmpd="sng" algn="ctr">
+                      <a:solidFill>
+                        <a:srgbClr val="DCE6E9"/>
+                      </a:solidFill>
+                      <a:prstDash val="solid"/>
+                      <a:round/>
+                      <a:headEnd type="none" w="med" len="med"/>
+                      <a:tailEnd type="none" w="med" len="med"/>
+                    </a:lnT>
+                    <a:lnB w="12700" cap="flat" cmpd="sng" algn="ctr">
+                      <a:solidFill>
+                        <a:srgbClr val="DCE6E9"/>
+                      </a:solidFill>
+                      <a:prstDash val="solid"/>
+                      <a:round/>
+                      <a:headEnd type="none" w="med" len="med"/>
+                      <a:tailEnd type="none" w="med" len="med"/>
+                    </a:lnB>
+                    <a:solidFill>
+                      <a:srgbClr val="FFFFFF"/>
+                    </a:solidFill>
+                  </a:tcPr>
+                </a:tc>
+                <a:extLst>
+                  <a:ext uri="{0D108BD9-81ED-4DB2-BD59-A6C34878D82A}">
+                    <a16:rowId xmlns:a16="http://schemas.microsoft.com/office/drawing/2014/main" val="10003"/>
+                  </a:ext>
+                </a:extLst>
+              </a:tr>
+              <a:tr h="475488">
+                <a:tc>
+                  <a:txBody>
+                    <a:bodyPr/>
+                    <a:lstStyle/>
+                    <a:p>
+                      <a:pPr marL="0" indent="0" algn="l" defTabSz="914400" rtl="0" eaLnBrk="1" latinLnBrk="0" hangingPunct="1">
+                        <a:buNone/>
+                      </a:pPr>
+                      <a:r>
+                        <a:rPr lang="en-US" sz="1200" b="1" kern="1200" dirty="0">
+                          <a:solidFill>
+                            <a:srgbClr val="0E7C86"/>
+                          </a:solidFill>
+                          <a:latin typeface="Calibri" pitchFamily="34" charset="0"/>
+                          <a:ea typeface="Calibri" pitchFamily="34" charset="-122"/>
+                          <a:cs typeface="Calibri" pitchFamily="34" charset="-120"/>
+                        </a:rPr>
+                        <a:t>Random Forest</a:t>
+                      </a:r>
+                    </a:p>
+                  </a:txBody>
+                  <a:tcPr anchor="ctr">
+                    <a:lnL w="12700" cap="flat" cmpd="sng" algn="ctr">
+                      <a:solidFill>
+                        <a:srgbClr val="DCE6E9"/>
+                      </a:solidFill>
+                      <a:prstDash val="solid"/>
+                      <a:round/>
+                      <a:headEnd type="none" w="med" len="med"/>
+                      <a:tailEnd type="none" w="med" len="med"/>
+                    </a:lnL>
+                    <a:lnR w="12700" cap="flat" cmpd="sng" algn="ctr">
+                      <a:solidFill>
+                        <a:srgbClr val="DCE6E9"/>
+                      </a:solidFill>
+                      <a:prstDash val="solid"/>
+                      <a:round/>
+                      <a:headEnd type="none" w="med" len="med"/>
+                      <a:tailEnd type="none" w="med" len="med"/>
+                    </a:lnR>
+                    <a:lnT w="12700" cap="flat" cmpd="sng" algn="ctr">
+                      <a:solidFill>
+                        <a:srgbClr val="DCE6E9"/>
+                      </a:solidFill>
+                      <a:prstDash val="solid"/>
+                      <a:round/>
+                      <a:headEnd type="none" w="med" len="med"/>
+                      <a:tailEnd type="none" w="med" len="med"/>
+                    </a:lnT>
+                    <a:lnB w="12700" cap="flat" cmpd="sng" algn="ctr">
+                      <a:solidFill>
+                        <a:srgbClr val="DCE6E9"/>
+                      </a:solidFill>
+                      <a:prstDash val="solid"/>
+                      <a:round/>
+                      <a:headEnd type="none" w="med" len="med"/>
+                      <a:tailEnd type="none" w="med" len="med"/>
+                    </a:lnB>
+                    <a:solidFill>
+                      <a:srgbClr val="FFFFFF"/>
+                    </a:solidFill>
+                  </a:tcPr>
+                </a:tc>
+                <a:tc>
+                  <a:txBody>
+                    <a:bodyPr/>
+                    <a:lstStyle/>
+                    <a:p>
+                      <a:pPr marL="0" indent="0" algn="ctr">
+                        <a:buNone/>
+                      </a:pPr>
+                      <a:r>
+                        <a:rPr lang="en-US" sz="1200" b="1" dirty="0">
+                          <a:solidFill>
+                            <a:srgbClr val="1F2D34"/>
+                          </a:solidFill>
+                          <a:latin typeface="Calibri" pitchFamily="34" charset="0"/>
+                          <a:ea typeface="Calibri" pitchFamily="34" charset="-122"/>
+                          <a:cs typeface="Calibri" pitchFamily="34" charset="-120"/>
+                        </a:rPr>
+                        <a:t>0,698</a:t>
+                      </a:r>
+                      <a:endParaRPr lang="en-US" sz="1200" b="1" dirty="0">
+                        <a:latin typeface="Calibri" charset="0"/>
+                        <a:ea typeface="Calibri" charset="0"/>
+                        <a:cs typeface="Calibri" charset="0"/>
+                      </a:endParaRPr>
+                    </a:p>
+                  </a:txBody>
+                  <a:tcPr anchor="ctr">
+                    <a:lnL w="12700" cap="flat" cmpd="sng" algn="ctr">
+                      <a:solidFill>
+                        <a:srgbClr val="DCE6E9"/>
+                      </a:solidFill>
+                      <a:prstDash val="solid"/>
+                      <a:round/>
+                      <a:headEnd type="none" w="med" len="med"/>
+                      <a:tailEnd type="none" w="med" len="med"/>
+                    </a:lnL>
+                    <a:lnR w="12700" cap="flat" cmpd="sng" algn="ctr">
+                      <a:solidFill>
+                        <a:srgbClr val="DCE6E9"/>
+                      </a:solidFill>
+                      <a:prstDash val="solid"/>
+                      <a:round/>
+                      <a:headEnd type="none" w="med" len="med"/>
+                      <a:tailEnd type="none" w="med" len="med"/>
+                    </a:lnR>
+                    <a:lnT w="12700" cap="flat" cmpd="sng" algn="ctr">
+                      <a:solidFill>
+                        <a:srgbClr val="DCE6E9"/>
+                      </a:solidFill>
+                      <a:prstDash val="solid"/>
+                      <a:round/>
+                      <a:headEnd type="none" w="med" len="med"/>
+                      <a:tailEnd type="none" w="med" len="med"/>
+                    </a:lnT>
+                    <a:lnB w="12700" cap="flat" cmpd="sng" algn="ctr">
+                      <a:solidFill>
+                        <a:srgbClr val="DCE6E9"/>
+                      </a:solidFill>
+                      <a:prstDash val="solid"/>
+                      <a:round/>
+                      <a:headEnd type="none" w="med" len="med"/>
+                      <a:tailEnd type="none" w="med" len="med"/>
+                    </a:lnB>
+                    <a:solidFill>
+                      <a:srgbClr val="FFFFFF"/>
+                    </a:solidFill>
+                  </a:tcPr>
+                </a:tc>
+                <a:tc>
+                  <a:txBody>
+                    <a:bodyPr/>
+                    <a:lstStyle/>
+                    <a:p>
+                      <a:pPr marL="0" indent="0" algn="ctr">
+                        <a:buNone/>
+                      </a:pPr>
+                      <a:r>
+                        <a:rPr lang="en-US" sz="1200" b="0" dirty="0">
+                          <a:solidFill>
+                            <a:srgbClr val="1F2D34"/>
+                          </a:solidFill>
+                          <a:latin typeface="Calibri" pitchFamily="34" charset="0"/>
+                          <a:ea typeface="Calibri" pitchFamily="34" charset="-122"/>
+                          <a:cs typeface="Calibri" pitchFamily="34" charset="-120"/>
+                        </a:rPr>
+                        <a:t>0,707</a:t>
+                      </a:r>
+                      <a:endParaRPr lang="en-US" sz="1200" b="0" dirty="0">
+                        <a:latin typeface="Calibri" charset="0"/>
+                        <a:ea typeface="Calibri" charset="0"/>
+                        <a:cs typeface="Calibri" charset="0"/>
+                      </a:endParaRPr>
+                    </a:p>
+                  </a:txBody>
+                  <a:tcPr anchor="ctr">
+                    <a:lnL w="12700" cap="flat" cmpd="sng" algn="ctr">
+                      <a:solidFill>
+                        <a:srgbClr val="DCE6E9"/>
+                      </a:solidFill>
+                      <a:prstDash val="solid"/>
+                      <a:round/>
+                      <a:headEnd type="none" w="med" len="med"/>
+                      <a:tailEnd type="none" w="med" len="med"/>
+                    </a:lnL>
+                    <a:lnR w="12700" cap="flat" cmpd="sng" algn="ctr">
+                      <a:solidFill>
+                        <a:srgbClr val="DCE6E9"/>
+                      </a:solidFill>
+                      <a:prstDash val="solid"/>
+                      <a:round/>
+                      <a:headEnd type="none" w="med" len="med"/>
+                      <a:tailEnd type="none" w="med" len="med"/>
+                    </a:lnR>
+                    <a:lnT w="12700" cap="flat" cmpd="sng" algn="ctr">
+                      <a:solidFill>
+                        <a:srgbClr val="DCE6E9"/>
+                      </a:solidFill>
+                      <a:prstDash val="solid"/>
+                      <a:round/>
+                      <a:headEnd type="none" w="med" len="med"/>
+                      <a:tailEnd type="none" w="med" len="med"/>
+                    </a:lnT>
+                    <a:lnB w="12700" cap="flat" cmpd="sng" algn="ctr">
+                      <a:solidFill>
+                        <a:srgbClr val="DCE6E9"/>
+                      </a:solidFill>
+                      <a:prstDash val="solid"/>
+                      <a:round/>
+                      <a:headEnd type="none" w="med" len="med"/>
+                      <a:tailEnd type="none" w="med" len="med"/>
+                    </a:lnB>
+                    <a:solidFill>
+                      <a:srgbClr val="FFFFFF"/>
+                    </a:solidFill>
+                  </a:tcPr>
+                </a:tc>
+                <a:tc>
+                  <a:txBody>
+                    <a:bodyPr/>
+                    <a:lstStyle/>
+                    <a:p>
+                      <a:pPr marL="0" indent="0" algn="ctr">
+                        <a:buNone/>
+                      </a:pPr>
+                      <a:r>
+                        <a:rPr lang="en-US" sz="1200" b="1" dirty="0">
+                          <a:solidFill>
+                            <a:srgbClr val="1F2D34"/>
+                          </a:solidFill>
+                          <a:latin typeface="Calibri" pitchFamily="34" charset="0"/>
+                          <a:ea typeface="Calibri" pitchFamily="34" charset="-122"/>
+                          <a:cs typeface="Calibri" pitchFamily="34" charset="-120"/>
+                        </a:rPr>
+                        <a:t>0,662</a:t>
+                      </a:r>
+                      <a:endParaRPr lang="en-US" sz="1200" dirty="0">
+                        <a:latin typeface="Calibri" charset="0"/>
+                        <a:ea typeface="Calibri" charset="0"/>
+                        <a:cs typeface="Calibri" charset="0"/>
+                      </a:endParaRPr>
+                    </a:p>
+                  </a:txBody>
+                  <a:tcPr anchor="ctr">
+                    <a:lnL w="12700" cap="flat" cmpd="sng" algn="ctr">
+                      <a:solidFill>
+                        <a:srgbClr val="DCE6E9"/>
+                      </a:solidFill>
+                      <a:prstDash val="solid"/>
+                      <a:round/>
+                      <a:headEnd type="none" w="med" len="med"/>
+                      <a:tailEnd type="none" w="med" len="med"/>
+                    </a:lnL>
+                    <a:lnR w="12700" cap="flat" cmpd="sng" algn="ctr">
+                      <a:solidFill>
+                        <a:srgbClr val="DCE6E9"/>
+                      </a:solidFill>
+                      <a:prstDash val="solid"/>
+                      <a:round/>
+                      <a:headEnd type="none" w="med" len="med"/>
+                      <a:tailEnd type="none" w="med" len="med"/>
+                    </a:lnR>
+                    <a:lnT w="12700" cap="flat" cmpd="sng" algn="ctr">
+                      <a:solidFill>
+                        <a:srgbClr val="DCE6E9"/>
+                      </a:solidFill>
+                      <a:prstDash val="solid"/>
+                      <a:round/>
+                      <a:headEnd type="none" w="med" len="med"/>
+                      <a:tailEnd type="none" w="med" len="med"/>
+                    </a:lnT>
+                    <a:lnB w="12700" cap="flat" cmpd="sng" algn="ctr">
+                      <a:solidFill>
+                        <a:srgbClr val="DCE6E9"/>
+                      </a:solidFill>
+                      <a:prstDash val="solid"/>
+                      <a:round/>
+                      <a:headEnd type="none" w="med" len="med"/>
+                      <a:tailEnd type="none" w="med" len="med"/>
+                    </a:lnB>
+                    <a:solidFill>
+                      <a:srgbClr val="FFFFFF"/>
+                    </a:solidFill>
+                  </a:tcPr>
+                </a:tc>
+                <a:tc>
+                  <a:txBody>
+                    <a:bodyPr/>
+                    <a:lstStyle/>
+                    <a:p>
+                      <a:pPr marL="0" indent="0" algn="ctr">
+                        <a:buNone/>
+                      </a:pPr>
+                      <a:r>
+                        <a:rPr lang="en-US" sz="1200" b="1" dirty="0">
+                          <a:solidFill>
+                            <a:srgbClr val="1F2D34"/>
+                          </a:solidFill>
+                          <a:latin typeface="Calibri" pitchFamily="34" charset="0"/>
+                          <a:ea typeface="Calibri" pitchFamily="34" charset="-122"/>
+                          <a:cs typeface="Calibri" pitchFamily="34" charset="-120"/>
+                        </a:rPr>
+                        <a:t>0,768</a:t>
+                      </a:r>
+                      <a:endParaRPr lang="en-US" sz="1200" dirty="0">
+                        <a:latin typeface="Calibri" charset="0"/>
+                        <a:ea typeface="Calibri" charset="0"/>
+                        <a:cs typeface="Calibri" charset="0"/>
+                      </a:endParaRPr>
+                    </a:p>
+                  </a:txBody>
+                  <a:tcPr anchor="ctr">
+                    <a:lnL w="12700" cap="flat" cmpd="sng" algn="ctr">
+                      <a:solidFill>
+                        <a:srgbClr val="DCE6E9"/>
+                      </a:solidFill>
+                      <a:prstDash val="solid"/>
+                      <a:round/>
+                      <a:headEnd type="none" w="med" len="med"/>
+                      <a:tailEnd type="none" w="med" len="med"/>
+                    </a:lnL>
+                    <a:lnR w="12700" cap="flat" cmpd="sng" algn="ctr">
+                      <a:solidFill>
+                        <a:srgbClr val="DCE6E9"/>
+                      </a:solidFill>
+                      <a:prstDash val="solid"/>
+                      <a:round/>
+                      <a:headEnd type="none" w="med" len="med"/>
+                      <a:tailEnd type="none" w="med" len="med"/>
+                    </a:lnR>
+                    <a:lnT w="12700" cap="flat" cmpd="sng" algn="ctr">
+                      <a:solidFill>
+                        <a:srgbClr val="DCE6E9"/>
+                      </a:solidFill>
+                      <a:prstDash val="solid"/>
+                      <a:round/>
+                      <a:headEnd type="none" w="med" len="med"/>
+                      <a:tailEnd type="none" w="med" len="med"/>
+                    </a:lnT>
+                    <a:lnB w="12700" cap="flat" cmpd="sng" algn="ctr">
+                      <a:solidFill>
+                        <a:srgbClr val="DCE6E9"/>
+                      </a:solidFill>
+                      <a:prstDash val="solid"/>
+                      <a:round/>
+                      <a:headEnd type="none" w="med" len="med"/>
+                      <a:tailEnd type="none" w="med" len="med"/>
+                    </a:lnB>
+                    <a:solidFill>
+                      <a:srgbClr val="FFFFFF"/>
+                    </a:solidFill>
+                  </a:tcPr>
+                </a:tc>
+                <a:tc>
+                  <a:txBody>
+                    <a:bodyPr/>
+                    <a:lstStyle/>
+                    <a:p>
+                      <a:pPr marL="0" indent="0" algn="ctr">
+                        <a:buNone/>
+                      </a:pPr>
+                      <a:r>
+                        <a:rPr lang="en-US" sz="1200" b="1" dirty="0">
+                          <a:solidFill>
+                            <a:srgbClr val="1F2D34"/>
+                          </a:solidFill>
+                          <a:latin typeface="Calibri" pitchFamily="34" charset="0"/>
+                          <a:ea typeface="Calibri" pitchFamily="34" charset="-122"/>
+                          <a:cs typeface="Calibri" pitchFamily="34" charset="-120"/>
+                        </a:rPr>
+                        <a:t>0,936</a:t>
+                      </a:r>
+                      <a:endParaRPr lang="en-US" sz="1200" dirty="0">
+                        <a:latin typeface="Calibri" charset="0"/>
+                        <a:ea typeface="Calibri" charset="0"/>
+                        <a:cs typeface="Calibri" charset="0"/>
+                      </a:endParaRPr>
+                    </a:p>
+                  </a:txBody>
+                  <a:tcPr anchor="ctr">
+                    <a:lnL w="12700" cap="flat" cmpd="sng" algn="ctr">
+                      <a:solidFill>
+                        <a:srgbClr val="DCE6E9"/>
+                      </a:solidFill>
+                      <a:prstDash val="solid"/>
+                      <a:round/>
+                      <a:headEnd type="none" w="med" len="med"/>
+                      <a:tailEnd type="none" w="med" len="med"/>
+                    </a:lnL>
+                    <a:lnR w="12700" cap="flat" cmpd="sng" algn="ctr">
+                      <a:solidFill>
+                        <a:srgbClr val="DCE6E9"/>
+                      </a:solidFill>
+                      <a:prstDash val="solid"/>
+                      <a:round/>
+                      <a:headEnd type="none" w="med" len="med"/>
+                      <a:tailEnd type="none" w="med" len="med"/>
+                    </a:lnR>
+                    <a:lnT w="12700" cap="flat" cmpd="sng" algn="ctr">
+                      <a:solidFill>
+                        <a:srgbClr val="DCE6E9"/>
+                      </a:solidFill>
+                      <a:prstDash val="solid"/>
+                      <a:round/>
+                      <a:headEnd type="none" w="med" len="med"/>
+                      <a:tailEnd type="none" w="med" len="med"/>
+                    </a:lnT>
+                    <a:lnB w="12700" cap="flat" cmpd="sng" algn="ctr">
+                      <a:solidFill>
+                        <a:srgbClr val="DCE6E9"/>
+                      </a:solidFill>
+                      <a:prstDash val="solid"/>
+                      <a:round/>
+                      <a:headEnd type="none" w="med" len="med"/>
+                      <a:tailEnd type="none" w="med" len="med"/>
+                    </a:lnB>
+                    <a:solidFill>
+                      <a:srgbClr val="FFFFFF"/>
+                    </a:solidFill>
+                  </a:tcPr>
+                </a:tc>
+                <a:extLst>
+                  <a:ext uri="{0D108BD9-81ED-4DB2-BD59-A6C34878D82A}">
+                    <a16:rowId xmlns:a16="http://schemas.microsoft.com/office/drawing/2014/main" val="10004"/>
+                  </a:ext>
+                </a:extLst>
+              </a:tr>
+            </a:tbl>
+          </a:graphicData>
+        </a:graphic>
+      </p:graphicFrame>
+      <p:pic>
+        <p:nvPicPr>
+          <p:cNvPr id="9" name="Image 0" descr="C:\Users\ftamaki\Documents\ITBA\1C2026\IA\TP_IA_aplicada_a_negocios_churn_Grupo1\reports\figures\final_model_comparison_cv.png"/>
+          <p:cNvPicPr>
+            <a:picLocks noChangeAspect="1"/>
+          </p:cNvPicPr>
+          <p:nvPr/>
+        </p:nvPicPr>
+        <p:blipFill>
+          <a:blip r:embed="rId3"/>
+          <a:stretch>
+            <a:fillRect/>
+          </a:stretch>
+        </p:blipFill>
+        <p:spPr>
+          <a:xfrm>
+            <a:off x="6860061" y="1737360"/>
+            <a:ext cx="4275270" cy="3291840"/>
+          </a:xfrm>
+          <a:prstGeom prst="rect">
+            <a:avLst/>
+          </a:prstGeom>
+        </p:spPr>
+      </p:pic>
+      <p:sp>
+        <p:nvSpPr>
+          <p:cNvPr id="10" name="Shape 6"/>
+          <p:cNvSpPr/>
+          <p:nvPr/>
+        </p:nvSpPr>
+        <p:spPr>
+          <a:xfrm>
+            <a:off x="548640" y="4343400"/>
+            <a:ext cx="5486400" cy="914400"/>
+          </a:xfrm>
+          <a:prstGeom prst="rect">
+            <a:avLst/>
+          </a:prstGeom>
+          <a:solidFill>
+            <a:srgbClr val="FFFFFF"/>
+          </a:solidFill>
+          <a:ln w="12700">
+            <a:solidFill>
+              <a:srgbClr val="DCE6E9"/>
+            </a:solidFill>
+            <a:prstDash val="solid"/>
+          </a:ln>
+          <a:effectLst>
+            <a:outerShdw blurRad="114300" dist="38100" dir="5400000" algn="bl" rotWithShape="0">
+              <a:srgbClr val="0E2A38">
+                <a:alpha val="13000"/>
+              </a:srgbClr>
+            </a:outerShdw>
+          </a:effectLst>
+        </p:spPr>
+        <p:txBody>
+          <a:bodyPr/>
+          <a:lstStyle/>
+          <a:p>
+            <a:endParaRPr/>
+          </a:p>
+        </p:txBody>
+      </p:sp>
+      <p:sp>
+        <p:nvSpPr>
+          <p:cNvPr id="11" name="Text 7"/>
+          <p:cNvSpPr/>
+          <p:nvPr/>
+        </p:nvSpPr>
+        <p:spPr>
+          <a:xfrm>
+            <a:off x="822960" y="4343400"/>
+            <a:ext cx="5074920" cy="914400"/>
+          </a:xfrm>
+          <a:prstGeom prst="rect">
+            <a:avLst/>
+          </a:prstGeom>
+          <a:noFill/>
+          <a:ln/>
+        </p:spPr>
+        <p:txBody>
+          <a:bodyPr wrap="square" lIns="0" tIns="0" rIns="0" bIns="0" rtlCol="0" anchor="ctr"/>
+          <a:lstStyle/>
+          <a:p>
+            <a:pPr marL="0" indent="0">
+              <a:buNone/>
+            </a:pPr>
+            <a:r>
+              <a:rPr lang="en-US" sz="1150" b="1" dirty="0">
+                <a:solidFill>
+                  <a:srgbClr val="0E7C86"/>
+                </a:solidFill>
+                <a:latin typeface="Calibri" pitchFamily="34" charset="0"/>
+                <a:ea typeface="Calibri" pitchFamily="34" charset="-122"/>
+                <a:cs typeface="Calibri" pitchFamily="34" charset="-120"/>
+              </a:rPr>
+              <a:t>Seleccion   </a:t>
+            </a:r>
+            <a:r>
+              <a:rPr lang="en-US" sz="1150" dirty="0">
+                <a:solidFill>
+                  <a:srgbClr val="1F2D34"/>
+                </a:solidFill>
+                <a:latin typeface="Calibri" pitchFamily="34" charset="0"/>
+                <a:ea typeface="Calibri" pitchFamily="34" charset="-122"/>
+                <a:cs typeface="Calibri" pitchFamily="34" charset="-120"/>
+              </a:rPr>
+              <a:t>Random Forest tuneado. Criterio primario F2 (el mas alto fuera de fold). A igual recall genera la mitad de falsas alertas que la logistica. La logistica queda como baseline interpretable.</a:t>
             </a:r>
             <a:endParaRPr lang="en-US" sz="1150" dirty="0"/>
           </a:p>

--- a/presentacion_tecnica_churn.pptx
+++ b/presentacion_tecnica_churn.pptx
@@ -7246,24 +7246,34 @@
           <a:ln/>
         </p:spPr>
         <p:txBody>
-          <a:bodyPr wrap="square" lIns="0" tIns="0" rIns="0" bIns="0" rtlCol="0" anchor="ctr"/>
+          <a:bodyPr wrap="square" lIns="0" tIns="0" rIns="0" bIns="0" rtlCol="0" anchor="t"/>
           <a:lstStyle/>
           <a:p>
             <a:pPr marL="0" indent="0" algn="ctr">
               <a:buNone/>
             </a:pPr>
             <a:r>
-              <a:rPr lang="en-US" sz="1200" dirty="0">
+              <a:rPr sz="1200" b="0">
                 <a:solidFill>
                   <a:srgbClr val="6A7A82"/>
                 </a:solidFill>
-                <a:latin typeface="Calibri" pitchFamily="34" charset="0"/>
-                <a:ea typeface="Calibri" pitchFamily="34" charset="-122"/>
-                <a:cs typeface="Calibri" pitchFamily="34" charset="-120"/>
-              </a:rPr>
-              <a:t>columnas (18 predictoras)</a:t>
+                <a:latin typeface="Calibri"/>
+              </a:rPr>
+              <a:t>columnas totales</a:t>
             </a:r>
             <a:endParaRPr lang="en-US" sz="1200" dirty="0"/>
+          </a:p>
+          <a:p>
+            <a:pPr algn="ctr"/>
+            <a:r>
+              <a:rPr sz="1050" b="0">
+                <a:solidFill>
+                  <a:srgbClr val="6A7A82"/>
+                </a:solidFill>
+                <a:latin typeface="Calibri"/>
+              </a:rPr>
+              <a:t>18 explicativas + ID + target</a:t>
+            </a:r>
           </a:p>
         </p:txBody>
       </p:sp>
@@ -7995,49 +8005,13 @@
               <a:buNone/>
             </a:pPr>
             <a:r>
-              <a:rPr sz="1150" b="1" dirty="0">
+              <a:rPr sz="1150" b="1">
                 <a:solidFill>
                   <a:srgbClr val="0E7C86"/>
                 </a:solidFill>
                 <a:latin typeface="Trebuchet MS"/>
               </a:rPr>
-              <a:t>AUDITOR</a:t>
-            </a:r>
-            <a:r>
-              <a:rPr lang="es-AR" sz="1150" b="1" dirty="0">
-                <a:solidFill>
-                  <a:srgbClr val="0E7C86"/>
-                </a:solidFill>
-                <a:latin typeface="Trebuchet MS"/>
-              </a:rPr>
-              <a:t>Í</a:t>
-            </a:r>
-            <a:r>
-              <a:rPr sz="1150" b="1" dirty="0">
-                <a:solidFill>
-                  <a:srgbClr val="0E7C86"/>
-                </a:solidFill>
-                <a:latin typeface="Trebuchet MS"/>
-              </a:rPr>
-              <a:t>A DE CALIDAD E IMPUTACI</a:t>
-            </a:r>
-            <a:r>
-              <a:rPr lang="es-AR" sz="1150" b="1" dirty="0" err="1">
-                <a:solidFill>
-                  <a:srgbClr val="0E7C86"/>
-                </a:solidFill>
-                <a:latin typeface="Trebuchet MS"/>
-              </a:rPr>
-              <a:t>Ó</a:t>
-            </a:r>
-            <a:r>
-              <a:rPr sz="1150" b="1" dirty="0">
-                <a:solidFill>
-                  <a:srgbClr val="0E7C86"/>
-                </a:solidFill>
-                <a:latin typeface="Trebuchet MS"/>
-              </a:rPr>
-              <a:t>N</a:t>
+              <a:t>AUDITORÍA, IMPUTACIÓN Y OUTLIERS</a:t>
             </a:r>
             <a:endParaRPr lang="en-US" sz="1150" dirty="0"/>
           </a:p>
@@ -8068,112 +8042,13 @@
               <a:buNone/>
             </a:pPr>
             <a:r>
-              <a:rPr sz="2600" b="1" dirty="0" err="1">
+              <a:rPr sz="2550" b="1">
                 <a:solidFill>
                   <a:srgbClr val="1F2D34"/>
                 </a:solidFill>
                 <a:latin typeface="Trebuchet MS"/>
               </a:rPr>
-              <a:t>Nulos</a:t>
-            </a:r>
-            <a:r>
-              <a:rPr sz="2600" b="1" dirty="0">
-                <a:solidFill>
-                  <a:srgbClr val="1F2D34"/>
-                </a:solidFill>
-                <a:latin typeface="Trebuchet MS"/>
-              </a:rPr>
-              <a:t>, </a:t>
-            </a:r>
-            <a:r>
-              <a:rPr sz="2600" b="1" dirty="0" err="1">
-                <a:solidFill>
-                  <a:srgbClr val="1F2D34"/>
-                </a:solidFill>
-                <a:latin typeface="Trebuchet MS"/>
-              </a:rPr>
-              <a:t>duplicados</a:t>
-            </a:r>
-            <a:r>
-              <a:rPr sz="2600" b="1" dirty="0">
-                <a:solidFill>
-                  <a:srgbClr val="1F2D34"/>
-                </a:solidFill>
-                <a:latin typeface="Trebuchet MS"/>
-              </a:rPr>
-              <a:t>, </a:t>
-            </a:r>
-            <a:r>
-              <a:rPr sz="2600" b="1" dirty="0" err="1">
-                <a:solidFill>
-                  <a:srgbClr val="1F2D34"/>
-                </a:solidFill>
-                <a:latin typeface="Trebuchet MS"/>
-              </a:rPr>
-              <a:t>categor</a:t>
-            </a:r>
-            <a:r>
-              <a:rPr lang="es-AR" sz="2600" b="1" dirty="0">
-                <a:solidFill>
-                  <a:srgbClr val="1F2D34"/>
-                </a:solidFill>
-                <a:latin typeface="Trebuchet MS"/>
-              </a:rPr>
-              <a:t>í</a:t>
-            </a:r>
-            <a:r>
-              <a:rPr sz="2600" b="1" dirty="0">
-                <a:solidFill>
-                  <a:srgbClr val="1F2D34"/>
-                </a:solidFill>
-                <a:latin typeface="Trebuchet MS"/>
-              </a:rPr>
-              <a:t>as </a:t>
-            </a:r>
-            <a:r>
-              <a:rPr sz="2600" b="1" dirty="0" err="1">
-                <a:solidFill>
-                  <a:srgbClr val="1F2D34"/>
-                </a:solidFill>
-                <a:latin typeface="Trebuchet MS"/>
-              </a:rPr>
-              <a:t>equivalentes</a:t>
-            </a:r>
-            <a:r>
-              <a:rPr sz="2600" b="1" dirty="0">
-                <a:solidFill>
-                  <a:srgbClr val="1F2D34"/>
-                </a:solidFill>
-                <a:latin typeface="Trebuchet MS"/>
-              </a:rPr>
-              <a:t> e </a:t>
-            </a:r>
-            <a:r>
-              <a:rPr sz="2600" b="1" dirty="0" err="1">
-                <a:solidFill>
-                  <a:srgbClr val="1F2D34"/>
-                </a:solidFill>
-                <a:latin typeface="Trebuchet MS"/>
-              </a:rPr>
-              <a:t>imputaci</a:t>
-            </a:r>
-            <a:r>
-              <a:rPr lang="es-AR" sz="2600" b="1" dirty="0" err="1">
-                <a:solidFill>
-                  <a:srgbClr val="1F2D34"/>
-                </a:solidFill>
-                <a:latin typeface="Trebuchet MS"/>
-              </a:rPr>
-              <a:t>ó</a:t>
-            </a:r>
-            <a:r>
-              <a:rPr sz="2600" b="1" dirty="0">
-                <a:solidFill>
-                  <a:srgbClr val="1F2D34"/>
-                </a:solidFill>
-                <a:latin typeface="Trebuchet MS"/>
-              </a:rPr>
-              <a:t>n</a:t>
+              <a:t>Nulos, duplicados, categorías equivalentes, imputación y outliers</a:t>
             </a:r>
             <a:endParaRPr lang="en-US" sz="2700" dirty="0"/>
           </a:p>
@@ -8360,13 +8235,13 @@
           <a:p>
             <a:pPr algn="ctr"/>
             <a:r>
-              <a:rPr sz="940" b="1" i="0">
+              <a:rPr sz="940" b="1">
                 <a:solidFill>
                   <a:srgbClr val="1F2D34"/>
                 </a:solidFill>
                 <a:latin typeface="Calibri"/>
               </a:rPr>
-              <a:t>filas con algun nulo</a:t>
+              <a:t>filas con exactamente un nulo</a:t>
             </a:r>
           </a:p>
         </p:txBody>
@@ -8395,40 +8270,13 @@
           <a:p>
             <a:pPr algn="ctr"/>
             <a:r>
-              <a:rPr sz="840" b="0" i="0" dirty="0" err="1">
+              <a:rPr sz="840" b="0">
                 <a:solidFill>
                   <a:srgbClr val="6A7A82"/>
                 </a:solidFill>
                 <a:latin typeface="Calibri"/>
               </a:rPr>
-              <a:t>exactamente</a:t>
-            </a:r>
-            <a:r>
-              <a:rPr sz="840" b="0" i="0" dirty="0">
-                <a:solidFill>
-                  <a:srgbClr val="6A7A82"/>
-                </a:solidFill>
-                <a:latin typeface="Calibri"/>
-              </a:rPr>
-              <a:t> 1 </a:t>
-            </a:r>
-            <a:r>
-              <a:rPr sz="840" b="0" i="0" dirty="0" err="1">
-                <a:solidFill>
-                  <a:srgbClr val="6A7A82"/>
-                </a:solidFill>
-                <a:latin typeface="Calibri"/>
-              </a:rPr>
-              <a:t>faltante</a:t>
-            </a:r>
-            <a:r>
-              <a:rPr sz="840" b="0" i="0" dirty="0">
-                <a:solidFill>
-                  <a:srgbClr val="6A7A82"/>
-                </a:solidFill>
-                <a:latin typeface="Calibri"/>
-              </a:rPr>
-              <a:t> c/u</a:t>
+              <a:t>1 faltante por fila</a:t>
             </a:r>
           </a:p>
         </p:txBody>
@@ -9668,294 +9516,6 @@
           </a:p>
         </p:txBody>
       </p:sp>
-      <p:graphicFrame>
-        <p:nvGraphicFramePr>
-          <p:cNvPr id="40" name="Table 39"/>
-          <p:cNvGraphicFramePr>
-            <a:graphicFrameLocks noGrp="1"/>
-          </p:cNvGraphicFramePr>
-          <p:nvPr>
-            <p:extLst>
-              <p:ext uri="{D42A27DB-BD31-4B8C-83A1-F6EECF244321}">
-                <p14:modId xmlns:p14="http://schemas.microsoft.com/office/powerpoint/2010/main" val="4057782116"/>
-              </p:ext>
-            </p:extLst>
-          </p:nvPr>
-        </p:nvGraphicFramePr>
-        <p:xfrm>
-          <a:off x="548640" y="3977639"/>
-          <a:ext cx="6629400" cy="1572768"/>
-        </p:xfrm>
-        <a:graphic>
-          <a:graphicData uri="http://schemas.openxmlformats.org/drawingml/2006/table">
-            <a:tbl>
-              <a:tblPr firstRow="1" bandRow="1">
-                <a:tableStyleId>{5C22544A-7EE6-4342-B048-85BDC9FD1C3A}</a:tableStyleId>
-              </a:tblPr>
-              <a:tblGrid>
-                <a:gridCol w="4709160">
-                  <a:extLst>
-                    <a:ext uri="{9D8B030D-6E8A-4147-A177-3AD203B41FA5}">
-                      <a16:colId xmlns:a16="http://schemas.microsoft.com/office/drawing/2014/main" val="20000"/>
-                    </a:ext>
-                  </a:extLst>
-                </a:gridCol>
-                <a:gridCol w="1920240">
-                  <a:extLst>
-                    <a:ext uri="{9D8B030D-6E8A-4147-A177-3AD203B41FA5}">
-                      <a16:colId xmlns:a16="http://schemas.microsoft.com/office/drawing/2014/main" val="20001"/>
-                    </a:ext>
-                  </a:extLst>
-                </a:gridCol>
-              </a:tblGrid>
-              <a:tr h="393192">
-                <a:tc>
-                  <a:txBody>
-                    <a:bodyPr/>
-                    <a:lstStyle/>
-                    <a:p>
-                      <a:pPr algn="ctr"/>
-                      <a:r>
-                        <a:rPr sz="1030" b="1">
-                          <a:solidFill>
-                            <a:srgbClr val="FFFFFF"/>
-                          </a:solidFill>
-                          <a:latin typeface="Trebuchet MS"/>
-                        </a:rPr>
-                        <a:t>Variables</a:t>
-                      </a:r>
-                    </a:p>
-                  </a:txBody>
-                  <a:tcPr marL="54864" marR="54864" marT="27432" marB="27432">
-                    <a:solidFill>
-                      <a:srgbClr val="0E7C86"/>
-                    </a:solidFill>
-                  </a:tcPr>
-                </a:tc>
-                <a:tc>
-                  <a:txBody>
-                    <a:bodyPr/>
-                    <a:lstStyle/>
-                    <a:p>
-                      <a:pPr algn="ctr"/>
-                      <a:r>
-                        <a:rPr sz="1030" b="1" dirty="0">
-                          <a:solidFill>
-                            <a:srgbClr val="FFFFFF"/>
-                          </a:solidFill>
-                          <a:latin typeface="Trebuchet MS"/>
-                        </a:rPr>
-                        <a:t>M</a:t>
-                      </a:r>
-                      <a:r>
-                        <a:rPr lang="es-AR" sz="1030" b="1" dirty="0">
-                          <a:solidFill>
-                            <a:srgbClr val="FFFFFF"/>
-                          </a:solidFill>
-                          <a:latin typeface="Trebuchet MS"/>
-                        </a:rPr>
-                        <a:t>é</a:t>
-                      </a:r>
-                      <a:r>
-                        <a:rPr sz="1030" b="1" dirty="0" err="1">
-                          <a:solidFill>
-                            <a:srgbClr val="FFFFFF"/>
-                          </a:solidFill>
-                          <a:latin typeface="Trebuchet MS"/>
-                        </a:rPr>
-                        <a:t>todo</a:t>
-                      </a:r>
-                      <a:endParaRPr sz="1030" b="1" dirty="0">
-                        <a:solidFill>
-                          <a:srgbClr val="FFFFFF"/>
-                        </a:solidFill>
-                        <a:latin typeface="Trebuchet MS"/>
-                      </a:endParaRPr>
-                    </a:p>
-                  </a:txBody>
-                  <a:tcPr marL="54864" marR="54864" marT="27432" marB="27432">
-                    <a:solidFill>
-                      <a:srgbClr val="0E7C86"/>
-                    </a:solidFill>
-                  </a:tcPr>
-                </a:tc>
-                <a:extLst>
-                  <a:ext uri="{0D108BD9-81ED-4DB2-BD59-A6C34878D82A}">
-                    <a16:rowId xmlns:a16="http://schemas.microsoft.com/office/drawing/2014/main" val="10000"/>
-                  </a:ext>
-                </a:extLst>
-              </a:tr>
-              <a:tr h="393192">
-                <a:tc>
-                  <a:txBody>
-                    <a:bodyPr/>
-                    <a:lstStyle/>
-                    <a:p>
-                      <a:r>
-                        <a:rPr sz="890" b="0">
-                          <a:solidFill>
-                            <a:srgbClr val="1F2D34"/>
-                          </a:solidFill>
-                          <a:latin typeface="Calibri"/>
-                        </a:rPr>
-                        <a:t>WarehouseToHome, CouponUsed</a:t>
-                      </a:r>
-                    </a:p>
-                  </a:txBody>
-                  <a:tcPr marL="54864" marR="54864" marT="27432" marB="27432">
-                    <a:solidFill>
-                      <a:srgbClr val="FFFFFF"/>
-                    </a:solidFill>
-                  </a:tcPr>
-                </a:tc>
-                <a:tc>
-                  <a:txBody>
-                    <a:bodyPr/>
-                    <a:lstStyle/>
-                    <a:p>
-                      <a:pPr algn="ctr"/>
-                      <a:r>
-                        <a:rPr sz="890" b="0">
-                          <a:solidFill>
-                            <a:srgbClr val="1F2D34"/>
-                          </a:solidFill>
-                          <a:latin typeface="Calibri"/>
-                        </a:rPr>
-                        <a:t>Mediana</a:t>
-                      </a:r>
-                    </a:p>
-                  </a:txBody>
-                  <a:tcPr marL="54864" marR="54864" marT="27432" marB="27432">
-                    <a:solidFill>
-                      <a:srgbClr val="FFFFFF"/>
-                    </a:solidFill>
-                  </a:tcPr>
-                </a:tc>
-                <a:extLst>
-                  <a:ext uri="{0D108BD9-81ED-4DB2-BD59-A6C34878D82A}">
-                    <a16:rowId xmlns:a16="http://schemas.microsoft.com/office/drawing/2014/main" val="10001"/>
-                  </a:ext>
-                </a:extLst>
-              </a:tr>
-              <a:tr h="393192">
-                <a:tc>
-                  <a:txBody>
-                    <a:bodyPr/>
-                    <a:lstStyle/>
-                    <a:p>
-                      <a:r>
-                        <a:rPr sz="890" b="0">
-                          <a:solidFill>
-                            <a:srgbClr val="1F2D34"/>
-                          </a:solidFill>
-                          <a:latin typeface="Calibri"/>
-                        </a:rPr>
-                        <a:t>Tenure, HourSpendOnApp, OrderAmountHike,</a:t>
-                      </a:r>
-                    </a:p>
-                    <a:p>
-                      <a:r>
-                        <a:rPr sz="890" b="0">
-                          <a:solidFill>
-                            <a:srgbClr val="1F2D34"/>
-                          </a:solidFill>
-                          <a:latin typeface="Calibri"/>
-                        </a:rPr>
-                        <a:t>OrderCount, DaySinceLastOrder</a:t>
-                      </a:r>
-                    </a:p>
-                  </a:txBody>
-                  <a:tcPr marL="54864" marR="54864" marT="27432" marB="27432">
-                    <a:solidFill>
-                      <a:srgbClr val="FFFFFF"/>
-                    </a:solidFill>
-                  </a:tcPr>
-                </a:tc>
-                <a:tc>
-                  <a:txBody>
-                    <a:bodyPr/>
-                    <a:lstStyle/>
-                    <a:p>
-                      <a:pPr algn="ctr"/>
-                      <a:r>
-                        <a:rPr sz="890" b="0">
-                          <a:solidFill>
-                            <a:srgbClr val="1F2D34"/>
-                          </a:solidFill>
-                          <a:latin typeface="Calibri"/>
-                        </a:rPr>
-                        <a:t>KNN Imputer</a:t>
-                      </a:r>
-                    </a:p>
-                  </a:txBody>
-                  <a:tcPr marL="54864" marR="54864" marT="27432" marB="27432">
-                    <a:solidFill>
-                      <a:srgbClr val="FFFFFF"/>
-                    </a:solidFill>
-                  </a:tcPr>
-                </a:tc>
-                <a:extLst>
-                  <a:ext uri="{0D108BD9-81ED-4DB2-BD59-A6C34878D82A}">
-                    <a16:rowId xmlns:a16="http://schemas.microsoft.com/office/drawing/2014/main" val="10002"/>
-                  </a:ext>
-                </a:extLst>
-              </a:tr>
-              <a:tr h="393192">
-                <a:tc>
-                  <a:txBody>
-                    <a:bodyPr/>
-                    <a:lstStyle/>
-                    <a:p>
-                      <a:r>
-                        <a:rPr sz="890" b="0">
-                          <a:solidFill>
-                            <a:srgbClr val="1F2D34"/>
-                          </a:solidFill>
-                          <a:latin typeface="Calibri"/>
-                        </a:rPr>
-                        <a:t>Categoricas</a:t>
-                      </a:r>
-                    </a:p>
-                  </a:txBody>
-                  <a:tcPr marL="54864" marR="54864" marT="27432" marB="27432">
-                    <a:solidFill>
-                      <a:srgbClr val="FFFFFF"/>
-                    </a:solidFill>
-                  </a:tcPr>
-                </a:tc>
-                <a:tc>
-                  <a:txBody>
-                    <a:bodyPr/>
-                    <a:lstStyle/>
-                    <a:p>
-                      <a:pPr algn="ctr"/>
-                      <a:r>
-                        <a:rPr sz="890" b="0" dirty="0">
-                          <a:solidFill>
-                            <a:srgbClr val="1F2D34"/>
-                          </a:solidFill>
-                          <a:latin typeface="Calibri"/>
-                        </a:rPr>
-                        <a:t>Moda</a:t>
-                      </a:r>
-                    </a:p>
-                  </a:txBody>
-                  <a:tcPr marL="54864" marR="54864" marT="27432" marB="27432">
-                    <a:solidFill>
-                      <a:srgbClr val="FFFFFF"/>
-                    </a:solidFill>
-                  </a:tcPr>
-                </a:tc>
-                <a:extLst>
-                  <a:ext uri="{0D108BD9-81ED-4DB2-BD59-A6C34878D82A}">
-                    <a16:rowId xmlns:a16="http://schemas.microsoft.com/office/drawing/2014/main" val="10003"/>
-                  </a:ext>
-                </a:extLst>
-              </a:tr>
-            </a:tbl>
-          </a:graphicData>
-        </a:graphic>
-      </p:graphicFrame>
       <p:sp>
         <p:nvSpPr>
           <p:cNvPr id="41" name="Rectangle 40"/>
@@ -9964,8 +9524,8 @@
         </p:nvSpPr>
         <p:spPr>
           <a:xfrm>
-            <a:off x="7543800" y="3977639"/>
-            <a:ext cx="4096512" cy="1572768"/>
+            <a:off x="548640" y="3977639"/>
+            <a:ext cx="11091672" cy="1572768"/>
           </a:xfrm>
           <a:prstGeom prst="rect">
             <a:avLst/>
@@ -10004,14 +9564,14 @@
       </p:sp>
       <p:sp>
         <p:nvSpPr>
-          <p:cNvPr id="42" name="TextBox 41"/>
+          <p:cNvPr id="43" name="TextBox 42"/>
           <p:cNvSpPr txBox="1"/>
           <p:nvPr/>
         </p:nvSpPr>
         <p:spPr>
           <a:xfrm>
-            <a:off x="7726679" y="4133087"/>
-            <a:ext cx="947375" cy="176972"/>
+            <a:off x="777240" y="4133087"/>
+            <a:ext cx="3685304" cy="176972"/>
           </a:xfrm>
           <a:prstGeom prst="rect">
             <a:avLst/>
@@ -10019,335 +9579,19 @@
           <a:noFill/>
         </p:spPr>
         <p:txBody>
-          <a:bodyPr wrap="none" lIns="0" tIns="0" rIns="0" bIns="0">
+          <a:bodyPr wrap="none" tIns="30000" bIns="30000">
             <a:spAutoFit/>
           </a:bodyPr>
           <a:lstStyle/>
           <a:p>
             <a:r>
-              <a:rPr sz="1150" b="1" i="0" dirty="0" err="1">
+              <a:rPr sz="1350" b="1">
                 <a:solidFill>
                   <a:srgbClr val="0E7C86"/>
                 </a:solidFill>
                 <a:latin typeface="Trebuchet MS"/>
               </a:rPr>
-              <a:t>Configuraci</a:t>
-            </a:r>
-            <a:r>
-              <a:rPr lang="es-AR" sz="1150" b="1" i="0" dirty="0" err="1">
-                <a:solidFill>
-                  <a:srgbClr val="0E7C86"/>
-                </a:solidFill>
-                <a:latin typeface="Trebuchet MS"/>
-              </a:rPr>
-              <a:t>ó</a:t>
-            </a:r>
-            <a:r>
-              <a:rPr sz="1150" b="1" i="0" dirty="0">
-                <a:solidFill>
-                  <a:srgbClr val="0E7C86"/>
-                </a:solidFill>
-                <a:latin typeface="Trebuchet MS"/>
-              </a:rPr>
-              <a:t>n</a:t>
-            </a:r>
-          </a:p>
-        </p:txBody>
-      </p:sp>
-      <p:sp>
-        <p:nvSpPr>
-          <p:cNvPr id="43" name="TextBox 42"/>
-          <p:cNvSpPr txBox="1"/>
-          <p:nvPr/>
-        </p:nvSpPr>
-        <p:spPr>
-          <a:xfrm>
-            <a:off x="7726679" y="4462272"/>
-            <a:ext cx="3842975" cy="738664"/>
-          </a:xfrm>
-          <a:prstGeom prst="rect">
-            <a:avLst/>
-          </a:prstGeom>
-          <a:noFill/>
-        </p:spPr>
-        <p:txBody>
-          <a:bodyPr wrap="none" lIns="0" tIns="0" rIns="0" bIns="0">
-            <a:spAutoFit/>
-          </a:bodyPr>
-          <a:lstStyle/>
-          <a:p>
-            <a:r>
-              <a:rPr sz="790" b="0" i="0" dirty="0">
-                <a:solidFill>
-                  <a:srgbClr val="1F2D34"/>
-                </a:solidFill>
-                <a:latin typeface="Calibri"/>
-              </a:rPr>
-              <a:t>- </a:t>
-            </a:r>
-            <a:r>
-              <a:rPr sz="1200" b="0" i="0" dirty="0" err="1">
-                <a:solidFill>
-                  <a:srgbClr val="1F2D34"/>
-                </a:solidFill>
-                <a:latin typeface="Calibri"/>
-              </a:rPr>
-              <a:t>KNNImputer</a:t>
-            </a:r>
-            <a:r>
-              <a:rPr sz="1200" b="0" i="0" dirty="0">
-                <a:solidFill>
-                  <a:srgbClr val="1F2D34"/>
-                </a:solidFill>
-                <a:latin typeface="Calibri"/>
-              </a:rPr>
-              <a:t>(</a:t>
-            </a:r>
-            <a:r>
-              <a:rPr sz="1200" b="0" i="0" dirty="0" err="1">
-                <a:solidFill>
-                  <a:srgbClr val="1F2D34"/>
-                </a:solidFill>
-                <a:latin typeface="Calibri"/>
-              </a:rPr>
-              <a:t>n_neighbors</a:t>
-            </a:r>
-            <a:r>
-              <a:rPr sz="1200" b="0" i="0" dirty="0">
-                <a:solidFill>
-                  <a:srgbClr val="1F2D34"/>
-                </a:solidFill>
-                <a:latin typeface="Calibri"/>
-              </a:rPr>
-              <a:t>=5, weights="distance")
-- </a:t>
-            </a:r>
-            <a:r>
-              <a:rPr sz="1200" b="0" i="0" dirty="0" err="1">
-                <a:solidFill>
-                  <a:srgbClr val="1F2D34"/>
-                </a:solidFill>
-                <a:latin typeface="Calibri"/>
-              </a:rPr>
-              <a:t>Estandarizacion</a:t>
-            </a:r>
-            <a:r>
-              <a:rPr sz="1200" b="0" i="0" dirty="0">
-                <a:solidFill>
-                  <a:srgbClr val="1F2D34"/>
-                </a:solidFill>
-                <a:latin typeface="Calibri"/>
-              </a:rPr>
-              <a:t> previa para </a:t>
-            </a:r>
-            <a:r>
-              <a:rPr sz="1200" b="0" i="0" dirty="0" err="1">
-                <a:solidFill>
-                  <a:srgbClr val="1F2D34"/>
-                </a:solidFill>
-                <a:latin typeface="Calibri"/>
-              </a:rPr>
-              <a:t>modelos</a:t>
-            </a:r>
-            <a:r>
-              <a:rPr sz="1200" b="0" i="0" dirty="0">
-                <a:solidFill>
-                  <a:srgbClr val="1F2D34"/>
-                </a:solidFill>
-                <a:latin typeface="Calibri"/>
-              </a:rPr>
-              <a:t> </a:t>
-            </a:r>
-            <a:r>
-              <a:rPr sz="1200" b="0" i="0" dirty="0" err="1">
-                <a:solidFill>
-                  <a:srgbClr val="1F2D34"/>
-                </a:solidFill>
-                <a:latin typeface="Calibri"/>
-              </a:rPr>
-              <a:t>sensibles</a:t>
-            </a:r>
-            <a:r>
-              <a:rPr sz="1200" b="0" i="0" dirty="0">
-                <a:solidFill>
-                  <a:srgbClr val="1F2D34"/>
-                </a:solidFill>
-                <a:latin typeface="Calibri"/>
-              </a:rPr>
-              <a:t> a </a:t>
-            </a:r>
-            <a:r>
-              <a:rPr sz="1200" b="0" i="0" dirty="0" err="1">
-                <a:solidFill>
-                  <a:srgbClr val="1F2D34"/>
-                </a:solidFill>
-                <a:latin typeface="Calibri"/>
-              </a:rPr>
-              <a:t>escala</a:t>
-            </a:r>
-            <a:r>
-              <a:rPr sz="1200" b="0" i="0" dirty="0">
-                <a:solidFill>
-                  <a:srgbClr val="1F2D34"/>
-                </a:solidFill>
-                <a:latin typeface="Calibri"/>
-              </a:rPr>
-              <a:t>
-- KNN vs. </a:t>
-            </a:r>
-            <a:r>
-              <a:rPr sz="1200" b="0" i="0" dirty="0" err="1">
-                <a:solidFill>
-                  <a:srgbClr val="1F2D34"/>
-                </a:solidFill>
-                <a:latin typeface="Calibri"/>
-              </a:rPr>
-              <a:t>imputacion</a:t>
-            </a:r>
-            <a:r>
-              <a:rPr sz="1200" b="0" i="0" dirty="0">
-                <a:solidFill>
-                  <a:srgbClr val="1F2D34"/>
-                </a:solidFill>
-                <a:latin typeface="Calibri"/>
-              </a:rPr>
-              <a:t> </a:t>
-            </a:r>
-            <a:r>
-              <a:rPr sz="1200" b="0" i="0" dirty="0" err="1">
-                <a:solidFill>
-                  <a:srgbClr val="1F2D34"/>
-                </a:solidFill>
-                <a:latin typeface="Calibri"/>
-              </a:rPr>
-              <a:t>iterativa</a:t>
-            </a:r>
-            <a:r>
-              <a:rPr sz="1200" b="0" i="0" dirty="0">
-                <a:solidFill>
-                  <a:srgbClr val="1F2D34"/>
-                </a:solidFill>
-                <a:latin typeface="Calibri"/>
-              </a:rPr>
-              <a:t> </a:t>
-            </a:r>
-            <a:r>
-              <a:rPr sz="1200" b="0" i="0" dirty="0" err="1">
-                <a:solidFill>
-                  <a:srgbClr val="1F2D34"/>
-                </a:solidFill>
-                <a:latin typeface="Calibri"/>
-              </a:rPr>
-              <a:t>comparados</a:t>
-            </a:r>
-            <a:r>
-              <a:rPr sz="1200" b="0" i="0" dirty="0">
-                <a:solidFill>
-                  <a:srgbClr val="1F2D34"/>
-                </a:solidFill>
-                <a:latin typeface="Calibri"/>
-              </a:rPr>
-              <a:t> </a:t>
-            </a:r>
-            <a:r>
-              <a:rPr sz="1200" b="0" i="0" dirty="0" err="1">
-                <a:solidFill>
-                  <a:srgbClr val="1F2D34"/>
-                </a:solidFill>
-                <a:latin typeface="Calibri"/>
-              </a:rPr>
-              <a:t>por</a:t>
-            </a:r>
-            <a:r>
-              <a:rPr sz="1200" b="0" i="0" dirty="0">
-                <a:solidFill>
-                  <a:srgbClr val="1F2D34"/>
-                </a:solidFill>
-                <a:latin typeface="Calibri"/>
-              </a:rPr>
-              <a:t> MAE </a:t>
-            </a:r>
-            <a:r>
-              <a:rPr sz="1200" b="0" i="0" dirty="0" err="1">
-                <a:solidFill>
-                  <a:srgbClr val="1F2D34"/>
-                </a:solidFill>
-                <a:latin typeface="Calibri"/>
-              </a:rPr>
-              <a:t>simulado</a:t>
-            </a:r>
-            <a:r>
-              <a:rPr sz="1200" b="0" i="0" dirty="0">
-                <a:solidFill>
-                  <a:srgbClr val="1F2D34"/>
-                </a:solidFill>
-                <a:latin typeface="Calibri"/>
-              </a:rPr>
-              <a:t>
-- KNN </a:t>
-            </a:r>
-            <a:r>
-              <a:rPr sz="1200" b="0" i="0" dirty="0" err="1">
-                <a:solidFill>
-                  <a:srgbClr val="1F2D34"/>
-                </a:solidFill>
-                <a:latin typeface="Calibri"/>
-              </a:rPr>
-              <a:t>obtuvo</a:t>
-            </a:r>
-            <a:r>
-              <a:rPr sz="1200" b="0" i="0" dirty="0">
-                <a:solidFill>
-                  <a:srgbClr val="1F2D34"/>
-                </a:solidFill>
-                <a:latin typeface="Calibri"/>
-              </a:rPr>
-              <a:t> </a:t>
-            </a:r>
-            <a:r>
-              <a:rPr sz="1200" b="0" i="0" dirty="0" err="1">
-                <a:solidFill>
-                  <a:srgbClr val="1F2D34"/>
-                </a:solidFill>
-                <a:latin typeface="Calibri"/>
-              </a:rPr>
-              <a:t>menor</a:t>
-            </a:r>
-            <a:r>
-              <a:rPr sz="1200" b="0" i="0" dirty="0">
-                <a:solidFill>
-                  <a:srgbClr val="1F2D34"/>
-                </a:solidFill>
-                <a:latin typeface="Calibri"/>
-              </a:rPr>
-              <a:t> MAE </a:t>
-            </a:r>
-            <a:r>
-              <a:rPr sz="1200" b="0" i="0" dirty="0" err="1">
-                <a:solidFill>
-                  <a:srgbClr val="1F2D34"/>
-                </a:solidFill>
-                <a:latin typeface="Calibri"/>
-              </a:rPr>
-              <a:t>en</a:t>
-            </a:r>
-            <a:r>
-              <a:rPr sz="1200" b="0" i="0" dirty="0">
-                <a:solidFill>
-                  <a:srgbClr val="1F2D34"/>
-                </a:solidFill>
-                <a:latin typeface="Calibri"/>
-              </a:rPr>
-              <a:t> las 5 variables </a:t>
-            </a:r>
-            <a:r>
-              <a:rPr sz="1200" b="0" i="0" dirty="0" err="1">
-                <a:solidFill>
-                  <a:srgbClr val="1F2D34"/>
-                </a:solidFill>
-                <a:latin typeface="Calibri"/>
-              </a:rPr>
-              <a:t>evaluadas</a:t>
+              <a:t>Imputación y outliers</a:t>
             </a:r>
             <a:endParaRPr sz="790" b="0" i="0" dirty="0">
               <a:solidFill>
@@ -10366,8 +9610,8 @@
         </p:nvSpPr>
         <p:spPr>
           <a:xfrm>
-            <a:off x="548640" y="5760720"/>
-            <a:ext cx="11091672" cy="320040"/>
+            <a:off x="777240" y="4462272"/>
+            <a:ext cx="10177200" cy="1005840"/>
           </a:xfrm>
           <a:prstGeom prst="rect">
             <a:avLst/>
@@ -10396,11 +9640,108 @@
           </a:fontRef>
         </p:style>
         <p:txBody>
-          <a:bodyPr rtlCol="0" anchor="ctr"/>
+          <a:bodyPr rtlCol="0" anchor="ctr" tIns="30000" bIns="30000"/>
           <a:lstStyle/>
           <a:p>
             <a:pPr algn="ctr"/>
+            <a:r>
+              <a:rPr sz="890" b="1">
+                <a:solidFill>
+                  <a:srgbClr val="1F2D34"/>
+                </a:solidFill>
+                <a:latin typeface="Calibri"/>
+              </a:rPr>
+              <a:t>Mediana - WarehouseToHome, CouponUsed</a:t>
+            </a:r>
             <a:endParaRPr/>
+          </a:p>
+          <a:p>
+            <a:r>
+              <a:rPr sz="840" b="0">
+                <a:solidFill>
+                  <a:srgbClr val="1F2D34"/>
+                </a:solidFill>
+                <a:latin typeface="Calibri"/>
+              </a:rPr>
+              <a:t>Sin patrón predictivo claro frente al resto de variables</a:t>
+            </a:r>
+          </a:p>
+          <a:p>
+            <a:r>
+              <a:rPr sz="400" b="0">
+                <a:solidFill>
+                  <a:srgbClr val="1F2D34"/>
+                </a:solidFill>
+                <a:latin typeface="Calibri"/>
+              </a:rPr>
+              <a:t/>
+            </a:r>
+          </a:p>
+          <a:p>
+            <a:r>
+              <a:rPr sz="850" b="1">
+                <a:solidFill>
+                  <a:srgbClr val="1F2D34"/>
+                </a:solidFill>
+                <a:latin typeface="Calibri"/>
+              </a:rPr>
+              <a:t>KNN (k=5, weights=distance) - Tenure, OrderCount, DaySinceLastOrder, HourSpendOnApp, OrderAmountHike</a:t>
+            </a:r>
+          </a:p>
+          <a:p>
+            <a:r>
+              <a:rPr sz="840" b="0">
+                <a:solidFill>
+                  <a:srgbClr val="1F2D34"/>
+                </a:solidFill>
+                <a:latin typeface="Calibri"/>
+              </a:rPr>
+              <a:t>Mejor MAE (Mean Absolute Error) frente a Regresión y Mediana</a:t>
+            </a:r>
+          </a:p>
+          <a:p>
+            <a:r>
+              <a:rPr sz="400" b="0">
+                <a:solidFill>
+                  <a:srgbClr val="1F2D34"/>
+                </a:solidFill>
+                <a:latin typeface="Calibri"/>
+              </a:rPr>
+              <a:t/>
+            </a:r>
+          </a:p>
+          <a:p>
+            <a:r>
+              <a:rPr sz="890" b="1">
+                <a:solidFill>
+                  <a:srgbClr val="1F2D34"/>
+                </a:solidFill>
+                <a:latin typeface="Calibri"/>
+              </a:rPr>
+              <a:t>Outliers - eliminados solo de gráficos del EDA</a:t>
+            </a:r>
+          </a:p>
+          <a:p>
+            <a:r>
+              <a:rPr sz="850" b="0">
+                <a:solidFill>
+                  <a:srgbClr val="1F2D34"/>
+                </a:solidFill>
+                <a:latin typeface="Calibri"/>
+              </a:rPr>
+              <a:t>WarehouseToHome: 2 extremos  |  Tenure: 4 extremos  |  DaySinceLastOrder: 1 valor máximo</a:t>
+            </a:r>
+          </a:p>
+          <a:p>
+            <a:r>
+              <a:rPr sz="840" b="0">
+                <a:solidFill>
+                  <a:srgbClr val="1F2D34"/>
+                </a:solidFill>
+                <a:latin typeface="Calibri"/>
+              </a:rPr>
+              <a:t>No se eliminan del modelado.</a:t>
+            </a:r>
           </a:p>
         </p:txBody>
       </p:sp>
@@ -10461,13 +9802,13 @@
           <a:lstStyle/>
           <a:p>
             <a:r>
-              <a:rPr sz="830" b="0" i="0">
+              <a:rPr sz="830" b="0">
                 <a:solidFill>
                   <a:srgbClr val="1F2D34"/>
                 </a:solidFill>
                 <a:latin typeface="Calibri"/>
               </a:rPr>
-              <a:t>La imputacion se ajusta dentro de cada fold; validacion y test no participan del calculo de medianas, vecinos, moda ni escalado.</a:t>
+              <a:t>La imputación y el escalado se ajustan dentro de cada fold; validación y test no participan del cálculo.</a:t>
             </a:r>
           </a:p>
         </p:txBody>
@@ -10644,15 +9985,13 @@
               <a:buNone/>
             </a:pPr>
             <a:r>
-              <a:rPr lang="en-US" sz="2700" b="1" dirty="0">
+              <a:rPr sz="2650" b="1">
                 <a:solidFill>
                   <a:srgbClr val="1F2D34"/>
                 </a:solidFill>
-                <a:latin typeface="Trebuchet MS" pitchFamily="34" charset="0"/>
-                <a:ea typeface="Trebuchet MS" pitchFamily="34" charset="-122"/>
-                <a:cs typeface="Trebuchet MS" pitchFamily="34" charset="-120"/>
-              </a:rPr>
-              <a:t>StratifiedGroupKFold sin perfiles compartidos</a:t>
+                <a:latin typeface="Trebuchet MS"/>
+              </a:rPr>
+              <a:t>StratifiedGroupKFold: evaluación más honesta</a:t>
             </a:r>
             <a:endParaRPr lang="en-US" sz="2700" dirty="0"/>
           </a:p>
@@ -10944,15 +10283,13 @@
               <a:buNone/>
             </a:pPr>
             <a:r>
-              <a:rPr lang="en-US" sz="1300" b="1" dirty="0">
+              <a:rPr sz="1300" b="1">
                 <a:solidFill>
                   <a:srgbClr val="0E7C86"/>
                 </a:solidFill>
-                <a:latin typeface="Trebuchet MS" pitchFamily="34" charset="0"/>
-                <a:ea typeface="Trebuchet MS" pitchFamily="34" charset="-122"/>
-                <a:cs typeface="Trebuchet MS" pitchFamily="34" charset="-120"/>
-              </a:rPr>
-              <a:t>Definicion del grupo</a:t>
+                <a:latin typeface="Trebuchet MS"/>
+              </a:rPr>
+              <a:t>Cómo definimos el grupo</a:t>
             </a:r>
             <a:endParaRPr lang="en-US" sz="1300" dirty="0"/>
           </a:p>
@@ -10987,38 +10324,59 @@
               <a:buChar char="•"/>
             </a:pPr>
             <a:r>
-              <a:rPr lang="en-US" sz="1250" dirty="0">
+              <a:rPr sz="1030" b="1">
                 <a:solidFill>
                   <a:srgbClr val="1F2D34"/>
                 </a:solidFill>
-                <a:latin typeface="Calibri" pitchFamily="34" charset="0"/>
-                <a:ea typeface="Calibri" pitchFamily="34" charset="-122"/>
-                <a:cs typeface="Calibri" pitchFamily="34" charset="-120"/>
-              </a:rPr>
-              <a:t>Hash de todas las variables explicativas</a:t>
+                <a:latin typeface="Calibri"/>
+              </a:rPr>
+              <a:t>StratifiedGroupKFold (5 folds, shuffle=True, random_state=42)</a:t>
             </a:r>
             <a:endParaRPr lang="en-US" sz="1250" dirty="0"/>
           </a:p>
           <a:p>
-            <a:pPr marL="342900" indent="-342900">
-              <a:spcAft>
-                <a:spcPts val="500"/>
-              </a:spcAft>
-              <a:buSzPct val="100000"/>
-              <a:buChar char="•"/>
-            </a:pPr>
-            <a:r>
-              <a:rPr lang="en-US" sz="1250" dirty="0">
+            <a:r>
+              <a:rPr sz="1030" b="0">
                 <a:solidFill>
                   <a:srgbClr val="1F2D34"/>
                 </a:solidFill>
-                <a:latin typeface="Calibri" pitchFamily="34" charset="0"/>
-                <a:ea typeface="Calibri" pitchFamily="34" charset="-122"/>
-                <a:cs typeface="Calibri" pitchFamily="34" charset="-120"/>
-              </a:rPr>
-              <a:t>No incluye CustomerID ni Churn</a:t>
-            </a:r>
-            <a:endParaRPr lang="en-US" sz="1250" dirty="0"/>
+                <a:latin typeface="Calibri"/>
+              </a:rPr>
+              <a:t>Entrena con 4 folds y valida con 1, manteniendo la proporción de churn.</a:t>
+            </a:r>
+          </a:p>
+          <a:p>
+            <a:r>
+              <a:rPr sz="1030" b="0">
+                <a:solidFill>
+                  <a:srgbClr val="1F2D34"/>
+                </a:solidFill>
+                <a:latin typeface="Calibri"/>
+              </a:rPr>
+              <a:t>Agrupa perfiles equivalentes: no se repiten entre entrenamiento y validación.</a:t>
+            </a:r>
+          </a:p>
+          <a:p>
+            <a:r>
+              <a:rPr sz="1030" b="0">
+                <a:solidFill>
+                  <a:srgbClr val="1F2D34"/>
+                </a:solidFill>
+                <a:latin typeface="Calibri"/>
+              </a:rPr>
+              <a:t>No usa CustomerID ni Churn para definir los grupos.</a:t>
+            </a:r>
+          </a:p>
+          <a:p>
+            <a:r>
+              <a:rPr sz="1030" b="1">
+                <a:solidFill>
+                  <a:srgbClr val="1F2D34"/>
+                </a:solidFill>
+                <a:latin typeface="Calibri"/>
+              </a:rPr>
+              <a:t>El test queda cerrado: solo se usa para medir el resultado final.</a:t>
+            </a:r>
           </a:p>
         </p:txBody>
       </p:sp>
@@ -11807,17 +11165,27 @@
               <a:buNone/>
             </a:pPr>
             <a:r>
-              <a:rPr lang="en-US" sz="1300" b="1" dirty="0">
+              <a:rPr sz="1300" b="1">
                 <a:solidFill>
                   <a:srgbClr val="1F2D34"/>
                 </a:solidFill>
-                <a:latin typeface="Calibri" pitchFamily="34" charset="0"/>
-                <a:ea typeface="Calibri" pitchFamily="34" charset="-122"/>
-                <a:cs typeface="Calibri" pitchFamily="34" charset="-120"/>
-              </a:rPr>
-              <a:t>perfiles compartidos entre train y test</a:t>
+                <a:latin typeface="Calibri"/>
+              </a:rPr>
+              <a:t>perfiles compartidos</a:t>
             </a:r>
             <a:endParaRPr lang="en-US" sz="1300" dirty="0"/>
+          </a:p>
+          <a:p>
+            <a:pPr algn="ctr"/>
+            <a:r>
+              <a:rPr sz="1300" b="1">
+                <a:solidFill>
+                  <a:srgbClr val="1F2D34"/>
+                </a:solidFill>
+                <a:latin typeface="Calibri"/>
+              </a:rPr>
+              <a:t>entre train y test</a:t>
+            </a:r>
           </a:p>
         </p:txBody>
       </p:sp>
@@ -11846,17 +11214,27 @@
               <a:buNone/>
             </a:pPr>
             <a:r>
-              <a:rPr lang="en-US" sz="1050" dirty="0">
+              <a:rPr sz="1019" b="1">
                 <a:solidFill>
                   <a:srgbClr val="6A7A82"/>
                 </a:solidFill>
-                <a:latin typeface="Calibri" pitchFamily="34" charset="0"/>
-                <a:ea typeface="Calibri" pitchFamily="34" charset="-122"/>
-                <a:cs typeface="Calibri" pitchFamily="34" charset="-120"/>
-              </a:rPr>
-              <a:t>El test no se usa para elegir modelo, features ni umbral</a:t>
+                <a:latin typeface="Calibri"/>
+              </a:rPr>
+              <a:t>Test cerrado:</a:t>
             </a:r>
             <a:endParaRPr lang="en-US" sz="1050" dirty="0"/>
+          </a:p>
+          <a:p>
+            <a:pPr algn="ctr"/>
+            <a:r>
+              <a:rPr sz="1019" b="0">
+                <a:solidFill>
+                  <a:srgbClr val="6A7A82"/>
+                </a:solidFill>
+                <a:latin typeface="Calibri"/>
+              </a:rPr>
+              <a:t>solo mide el resultado final</a:t>
+            </a:r>
           </a:p>
         </p:txBody>
       </p:sp>
@@ -12032,15 +11410,13 @@
               <a:buNone/>
             </a:pPr>
             <a:r>
-              <a:rPr lang="en-US" sz="2700" b="1" dirty="0">
+              <a:rPr sz="2550" b="1">
                 <a:solidFill>
                   <a:srgbClr val="1F2D34"/>
                 </a:solidFill>
-                <a:latin typeface="Trebuchet MS" pitchFamily="34" charset="0"/>
-                <a:ea typeface="Trebuchet MS" pitchFamily="34" charset="-122"/>
-                <a:cs typeface="Trebuchet MS" pitchFamily="34" charset="-120"/>
-              </a:rPr>
-              <a:t>Tres variables de intensidad, deterministas</a:t>
+                <a:latin typeface="Trebuchet MS"/>
+              </a:rPr>
+              <a:t>Tres ratios de intensidad, deterministas y con sentido de negocio</a:t>
             </a:r>
             <a:endParaRPr lang="en-US" sz="2700" dirty="0"/>
           </a:p>
@@ -12537,15 +11913,13 @@
               <a:buNone/>
             </a:pPr>
             <a:r>
-              <a:rPr lang="en-US" sz="1400" b="1" dirty="0">
+              <a:rPr sz="1400" b="1">
                 <a:solidFill>
                   <a:srgbClr val="0E7C86"/>
                 </a:solidFill>
-                <a:latin typeface="Trebuchet MS" pitchFamily="34" charset="0"/>
-                <a:ea typeface="Trebuchet MS" pitchFamily="34" charset="-122"/>
-                <a:cs typeface="Trebuchet MS" pitchFamily="34" charset="-120"/>
-              </a:rPr>
-              <a:t>Justificacion tecnica</a:t>
+                <a:latin typeface="Trebuchet MS"/>
+              </a:rPr>
+              <a:t>Justificación técnica y de negocio</a:t>
             </a:r>
             <a:endParaRPr lang="en-US" sz="1400" dirty="0"/>
           </a:p>
@@ -12577,15 +11951,13 @@
               <a:buChar char="•"/>
             </a:pPr>
             <a:r>
-              <a:rPr lang="en-US" sz="1200" dirty="0">
+              <a:rPr sz="1200" b="0">
                 <a:solidFill>
                   <a:srgbClr val="1F2D34"/>
                 </a:solidFill>
-                <a:latin typeface="Calibri" pitchFamily="34" charset="0"/>
-                <a:ea typeface="Calibri" pitchFamily="34" charset="-122"/>
-                <a:cs typeface="Calibri" pitchFamily="34" charset="-120"/>
-              </a:rPr>
-              <a:t>Capturan intensidad, no solo magnitud absoluta</a:t>
+                <a:latin typeface="Calibri"/>
+              </a:rPr>
+              <a:t>Miden intensidad relativa del cliente</a:t>
             </a:r>
             <a:endParaRPr lang="en-US" sz="1200" dirty="0"/>
           </a:p>
@@ -12617,13 +11989,11 @@
               <a:buChar char="•"/>
             </a:pPr>
             <a:r>
-              <a:rPr lang="en-US" sz="1200" dirty="0">
+              <a:rPr sz="1200" b="0">
                 <a:solidFill>
                   <a:srgbClr val="1F2D34"/>
                 </a:solidFill>
-                <a:latin typeface="Calibri" pitchFamily="34" charset="0"/>
-                <a:ea typeface="Calibri" pitchFamily="34" charset="-122"/>
-                <a:cs typeface="Calibri" pitchFamily="34" charset="-120"/>
+                <a:latin typeface="Calibri"/>
               </a:rPr>
               <a:t>El +1 evita divisiones por cero</a:t>
             </a:r>
@@ -12657,15 +12027,13 @@
               <a:buChar char="•"/>
             </a:pPr>
             <a:r>
-              <a:rPr lang="en-US" sz="1200" dirty="0">
+              <a:rPr sz="1200" b="0">
                 <a:solidFill>
                   <a:srgbClr val="1F2D34"/>
                 </a:solidFill>
-                <a:latin typeface="Calibri" pitchFamily="34" charset="0"/>
-                <a:ea typeface="Calibri" pitchFamily="34" charset="-122"/>
-                <a:cs typeface="Calibri" pitchFamily="34" charset="-120"/>
-              </a:rPr>
-              <a:t>Transformaciones deterministas, no usan el target</a:t>
+                <a:latin typeface="Calibri"/>
+              </a:rPr>
+              <a:t>No usan Churn: evitan fuga de información</a:t>
             </a:r>
             <a:endParaRPr lang="en-US" sz="1200" dirty="0"/>
           </a:p>
@@ -12697,15 +12065,13 @@
               <a:buChar char="•"/>
             </a:pPr>
             <a:r>
-              <a:rPr lang="en-US" sz="1200" dirty="0">
+              <a:rPr sz="1200" b="0">
                 <a:solidFill>
                   <a:srgbClr val="1F2D34"/>
                 </a:solidFill>
-                <a:latin typeface="Calibri" pitchFamily="34" charset="0"/>
-                <a:ea typeface="Calibri" pitchFamily="34" charset="-122"/>
-                <a:cs typeface="Calibri" pitchFamily="34" charset="-120"/>
-              </a:rPr>
-              <a:t>Se generan por separado en train y test</a:t>
+                <a:latin typeface="Calibri"/>
+              </a:rPr>
+              <a:t>Se calculan por separado en train y test</a:t>
             </a:r>
             <a:endParaRPr lang="en-US" sz="1200" dirty="0"/>
           </a:p>
@@ -12737,15 +12103,13 @@
               <a:buChar char="•"/>
             </a:pPr>
             <a:r>
-              <a:rPr lang="en-US" sz="1200" dirty="0">
+              <a:rPr sz="1200" b="0">
                 <a:solidFill>
                   <a:srgbClr val="1F2D34"/>
                 </a:solidFill>
-                <a:latin typeface="Calibri" pitchFamily="34" charset="0"/>
-                <a:ea typeface="Calibri" pitchFamily="34" charset="-122"/>
-                <a:cs typeface="Calibri" pitchFamily="34" charset="-120"/>
-              </a:rPr>
-              <a:t>Se incluyen antes del ColumnTransformer</a:t>
+                <a:latin typeface="Calibri"/>
+              </a:rPr>
+              <a:t>Se generan antes del preprocesamiento del modelo</a:t>
             </a:r>
             <a:endParaRPr lang="en-US" sz="1200" dirty="0"/>
           </a:p>
@@ -12777,15 +12141,13 @@
               <a:buChar char="•"/>
             </a:pPr>
             <a:r>
-              <a:rPr lang="en-US" sz="1200" dirty="0">
+              <a:rPr sz="1200" b="0">
                 <a:solidFill>
                   <a:srgbClr val="1F2D34"/>
                 </a:solidFill>
-                <a:latin typeface="Calibri" pitchFamily="34" charset="0"/>
-                <a:ea typeface="Calibri" pitchFamily="34" charset="-122"/>
-                <a:cs typeface="Calibri" pitchFamily="34" charset="-120"/>
-              </a:rPr>
-              <a:t>OrdersPerTenure conserva importancia en el modelo final</a:t>
+                <a:latin typeface="Calibri"/>
+              </a:rPr>
+              <a:t>OrdersPerTenure queda entre las variables más importantes</a:t>
             </a:r>
             <a:endParaRPr lang="en-US" sz="1200" dirty="0"/>
           </a:p>
